--- a/docs/chapters/images.pptx
+++ b/docs/chapters/images.pptx
@@ -4,6 +4,9 @@
   <p:sldMasterIdLst>
     <p:sldMasterId id="2147483648" r:id="rId1"/>
   </p:sldMasterIdLst>
+  <p:notesMasterIdLst>
+    <p:notesMasterId r:id="rId14"/>
+  </p:notesMasterIdLst>
   <p:sldIdLst>
     <p:sldId id="256" r:id="rId2"/>
     <p:sldId id="257" r:id="rId3"/>
@@ -11,6 +14,12 @@
     <p:sldId id="259" r:id="rId5"/>
     <p:sldId id="260" r:id="rId6"/>
     <p:sldId id="261" r:id="rId7"/>
+    <p:sldId id="262" r:id="rId8"/>
+    <p:sldId id="263" r:id="rId9"/>
+    <p:sldId id="264" r:id="rId10"/>
+    <p:sldId id="265" r:id="rId11"/>
+    <p:sldId id="266" r:id="rId12"/>
+    <p:sldId id="267" r:id="rId13"/>
   </p:sldIdLst>
   <p:sldSz cx="12192000" cy="6858000"/>
   <p:notesSz cx="6858000" cy="9144000"/>
@@ -120,7 +129,7 @@
 <file path=ppt/revisionInfo.xml><?xml version="1.0" encoding="utf-8"?>
 <p1510:revInfo xmlns:a="http://schemas.openxmlformats.org/drawingml/2006/main" xmlns:r="http://schemas.openxmlformats.org/officeDocument/2006/relationships" xmlns:p1510="http://schemas.microsoft.com/office/powerpoint/2015/10/main">
   <p1510:revLst>
-    <p1510:client id="{B0D34C48-54B8-43B1-B18D-AA5901F76394}" v="22" dt="2025-04-28T05:47:57.060"/>
+    <p1510:client id="{7D97CB1E-4F7A-4B5D-BAC2-AE8954581E6E}" v="30" dt="2025-06-24T05:58:59.349"/>
   </p1510:revLst>
 </p1510:revInfo>
 </file>
@@ -140,30 +149,6 @@
           <pc:docMk/>
           <pc:sldMk cId="908723532" sldId="257"/>
         </pc:sldMkLst>
-        <pc:spChg chg="del">
-          <ac:chgData name="Alex Casson" userId="53cffa54-f866-4b4c-8e51-0383f28edfe1" providerId="ADAL" clId="{B0D34C48-54B8-43B1-B18D-AA5901F76394}" dt="2025-04-28T05:08:29.379" v="2" actId="478"/>
-          <ac:spMkLst>
-            <pc:docMk/>
-            <pc:sldMk cId="908723532" sldId="257"/>
-            <ac:spMk id="2" creationId="{E4766E7C-4869-4782-FEA7-A9F5E2F72B96}"/>
-          </ac:spMkLst>
-        </pc:spChg>
-        <pc:spChg chg="del">
-          <ac:chgData name="Alex Casson" userId="53cffa54-f866-4b4c-8e51-0383f28edfe1" providerId="ADAL" clId="{B0D34C48-54B8-43B1-B18D-AA5901F76394}" dt="2025-04-28T05:08:28.180" v="1" actId="478"/>
-          <ac:spMkLst>
-            <pc:docMk/>
-            <pc:sldMk cId="908723532" sldId="257"/>
-            <ac:spMk id="3" creationId="{FB811778-3355-ADA5-3DCE-68171D733F6B}"/>
-          </ac:spMkLst>
-        </pc:spChg>
-        <pc:spChg chg="add del mod">
-          <ac:chgData name="Alex Casson" userId="53cffa54-f866-4b4c-8e51-0383f28edfe1" providerId="ADAL" clId="{B0D34C48-54B8-43B1-B18D-AA5901F76394}" dt="2025-04-28T05:08:34.539" v="5" actId="478"/>
-          <ac:spMkLst>
-            <pc:docMk/>
-            <pc:sldMk cId="908723532" sldId="257"/>
-            <ac:spMk id="5" creationId="{CC1C0D8A-4FF6-0AE9-257D-638C6E804250}"/>
-          </ac:spMkLst>
-        </pc:spChg>
         <pc:spChg chg="add mod">
           <ac:chgData name="Alex Casson" userId="53cffa54-f866-4b4c-8e51-0383f28edfe1" providerId="ADAL" clId="{B0D34C48-54B8-43B1-B18D-AA5901F76394}" dt="2025-04-28T05:09:17.703" v="11" actId="14100"/>
           <ac:spMkLst>
@@ -277,14 +262,6 @@
           </ac:spMkLst>
         </pc:spChg>
         <pc:spChg chg="add mod">
-          <ac:chgData name="Alex Casson" userId="53cffa54-f866-4b4c-8e51-0383f28edfe1" providerId="ADAL" clId="{B0D34C48-54B8-43B1-B18D-AA5901F76394}" dt="2025-04-28T05:13:32.903" v="135"/>
-          <ac:spMkLst>
-            <pc:docMk/>
-            <pc:sldMk cId="908723532" sldId="257"/>
-            <ac:spMk id="22" creationId="{69725984-B921-F10A-6AEB-E1AF655E7A8C}"/>
-          </ac:spMkLst>
-        </pc:spChg>
-        <pc:spChg chg="add mod">
           <ac:chgData name="Alex Casson" userId="53cffa54-f866-4b4c-8e51-0383f28edfe1" providerId="ADAL" clId="{B0D34C48-54B8-43B1-B18D-AA5901F76394}" dt="2025-04-28T05:14:00.379" v="192" actId="14100"/>
           <ac:spMkLst>
             <pc:docMk/>
@@ -315,22 +292,6 @@
           <pc:docMk/>
           <pc:sldMk cId="1510492760" sldId="258"/>
         </pc:sldMkLst>
-        <pc:spChg chg="del">
-          <ac:chgData name="Alex Casson" userId="53cffa54-f866-4b4c-8e51-0383f28edfe1" providerId="ADAL" clId="{B0D34C48-54B8-43B1-B18D-AA5901F76394}" dt="2025-04-28T05:14:54.402" v="200" actId="478"/>
-          <ac:spMkLst>
-            <pc:docMk/>
-            <pc:sldMk cId="1510492760" sldId="258"/>
-            <ac:spMk id="2" creationId="{356D25D9-EEC3-D52A-D78C-682022E3D431}"/>
-          </ac:spMkLst>
-        </pc:spChg>
-        <pc:spChg chg="del">
-          <ac:chgData name="Alex Casson" userId="53cffa54-f866-4b4c-8e51-0383f28edfe1" providerId="ADAL" clId="{B0D34C48-54B8-43B1-B18D-AA5901F76394}" dt="2025-04-28T05:14:52.769" v="199" actId="478"/>
-          <ac:spMkLst>
-            <pc:docMk/>
-            <pc:sldMk cId="1510492760" sldId="258"/>
-            <ac:spMk id="3" creationId="{FBB17C11-A2FF-A59A-A78A-4725A00D3B08}"/>
-          </ac:spMkLst>
-        </pc:spChg>
         <pc:spChg chg="add mod">
           <ac:chgData name="Alex Casson" userId="53cffa54-f866-4b4c-8e51-0383f28edfe1" providerId="ADAL" clId="{B0D34C48-54B8-43B1-B18D-AA5901F76394}" dt="2025-04-28T05:17:19.487" v="211" actId="1076"/>
           <ac:spMkLst>
@@ -426,30 +387,6 @@
           <pc:docMk/>
           <pc:sldMk cId="1590658493" sldId="259"/>
         </pc:sldMkLst>
-        <pc:spChg chg="del">
-          <ac:chgData name="Alex Casson" userId="53cffa54-f866-4b4c-8e51-0383f28edfe1" providerId="ADAL" clId="{B0D34C48-54B8-43B1-B18D-AA5901F76394}" dt="2025-04-28T05:42:19.575" v="236" actId="478"/>
-          <ac:spMkLst>
-            <pc:docMk/>
-            <pc:sldMk cId="1590658493" sldId="259"/>
-            <ac:spMk id="2" creationId="{8979A6BC-071E-992E-732D-8C48BE1E01A0}"/>
-          </ac:spMkLst>
-        </pc:spChg>
-        <pc:spChg chg="del">
-          <ac:chgData name="Alex Casson" userId="53cffa54-f866-4b4c-8e51-0383f28edfe1" providerId="ADAL" clId="{B0D34C48-54B8-43B1-B18D-AA5901F76394}" dt="2025-04-28T05:42:17.158" v="235" actId="478"/>
-          <ac:spMkLst>
-            <pc:docMk/>
-            <pc:sldMk cId="1590658493" sldId="259"/>
-            <ac:spMk id="3" creationId="{30C6039E-AB96-6C96-6FDB-EC5F6A2A48DA}"/>
-          </ac:spMkLst>
-        </pc:spChg>
-        <pc:picChg chg="add del">
-          <ac:chgData name="Alex Casson" userId="53cffa54-f866-4b4c-8e51-0383f28edfe1" providerId="ADAL" clId="{B0D34C48-54B8-43B1-B18D-AA5901F76394}" dt="2025-04-28T05:42:24.877" v="238" actId="478"/>
-          <ac:picMkLst>
-            <pc:docMk/>
-            <pc:sldMk cId="1590658493" sldId="259"/>
-            <ac:picMk id="5" creationId="{13857456-14F5-1DA0-9388-B9FE252188DD}"/>
-          </ac:picMkLst>
-        </pc:picChg>
         <pc:picChg chg="add mod">
           <ac:chgData name="Alex Casson" userId="53cffa54-f866-4b4c-8e51-0383f28edfe1" providerId="ADAL" clId="{B0D34C48-54B8-43B1-B18D-AA5901F76394}" dt="2025-04-28T05:42:51.584" v="239"/>
           <ac:picMkLst>
@@ -465,22 +402,6 @@
           <pc:docMk/>
           <pc:sldMk cId="1918308472" sldId="260"/>
         </pc:sldMkLst>
-        <pc:spChg chg="del">
-          <ac:chgData name="Alex Casson" userId="53cffa54-f866-4b4c-8e51-0383f28edfe1" providerId="ADAL" clId="{B0D34C48-54B8-43B1-B18D-AA5901F76394}" dt="2025-04-28T05:45:58.583" v="242" actId="478"/>
-          <ac:spMkLst>
-            <pc:docMk/>
-            <pc:sldMk cId="1918308472" sldId="260"/>
-            <ac:spMk id="2" creationId="{618E42EE-FE58-18E1-4BC1-247BFDCC4C32}"/>
-          </ac:spMkLst>
-        </pc:spChg>
-        <pc:spChg chg="del">
-          <ac:chgData name="Alex Casson" userId="53cffa54-f866-4b4c-8e51-0383f28edfe1" providerId="ADAL" clId="{B0D34C48-54B8-43B1-B18D-AA5901F76394}" dt="2025-04-28T05:45:57.584" v="241" actId="478"/>
-          <ac:spMkLst>
-            <pc:docMk/>
-            <pc:sldMk cId="1918308472" sldId="260"/>
-            <ac:spMk id="3" creationId="{DDEB31BD-8968-E24D-8C65-31E7126AAE2A}"/>
-          </ac:spMkLst>
-        </pc:spChg>
         <pc:picChg chg="add">
           <ac:chgData name="Alex Casson" userId="53cffa54-f866-4b4c-8e51-0383f28edfe1" providerId="ADAL" clId="{B0D34C48-54B8-43B1-B18D-AA5901F76394}" dt="2025-04-28T05:45:59.180" v="243" actId="22"/>
           <ac:picMkLst>
@@ -496,30 +417,6 @@
           <pc:docMk/>
           <pc:sldMk cId="253267570" sldId="261"/>
         </pc:sldMkLst>
-        <pc:spChg chg="del">
-          <ac:chgData name="Alex Casson" userId="53cffa54-f866-4b4c-8e51-0383f28edfe1" providerId="ADAL" clId="{B0D34C48-54B8-43B1-B18D-AA5901F76394}" dt="2025-04-28T05:47:33.417" v="246" actId="478"/>
-          <ac:spMkLst>
-            <pc:docMk/>
-            <pc:sldMk cId="253267570" sldId="261"/>
-            <ac:spMk id="2" creationId="{6159ECA4-45D4-F9DC-CF27-6DC924555DC8}"/>
-          </ac:spMkLst>
-        </pc:spChg>
-        <pc:spChg chg="del">
-          <ac:chgData name="Alex Casson" userId="53cffa54-f866-4b4c-8e51-0383f28edfe1" providerId="ADAL" clId="{B0D34C48-54B8-43B1-B18D-AA5901F76394}" dt="2025-04-28T05:47:32.523" v="245" actId="478"/>
-          <ac:spMkLst>
-            <pc:docMk/>
-            <pc:sldMk cId="253267570" sldId="261"/>
-            <ac:spMk id="3" creationId="{305332B6-51A2-2563-2AFE-70F98620638E}"/>
-          </ac:spMkLst>
-        </pc:spChg>
-        <pc:picChg chg="add del">
-          <ac:chgData name="Alex Casson" userId="53cffa54-f866-4b4c-8e51-0383f28edfe1" providerId="ADAL" clId="{B0D34C48-54B8-43B1-B18D-AA5901F76394}" dt="2025-04-28T05:47:36.794" v="248" actId="478"/>
-          <ac:picMkLst>
-            <pc:docMk/>
-            <pc:sldMk cId="253267570" sldId="261"/>
-            <ac:picMk id="5" creationId="{25A05AA7-5D06-15B3-EBF5-6B671114EC32}"/>
-          </ac:picMkLst>
-        </pc:picChg>
         <pc:picChg chg="add mod">
           <ac:chgData name="Alex Casson" userId="53cffa54-f866-4b4c-8e51-0383f28edfe1" providerId="ADAL" clId="{B0D34C48-54B8-43B1-B18D-AA5901F76394}" dt="2025-04-28T05:47:57.060" v="249"/>
           <ac:picMkLst>
@@ -531,7 +428,969 @@
       </pc:sldChg>
     </pc:docChg>
   </pc:docChgLst>
+  <pc:docChgLst>
+    <pc:chgData name="Alex Casson" userId="53cffa54-f866-4b4c-8e51-0383f28edfe1" providerId="ADAL" clId="{7D97CB1E-4F7A-4B5D-BAC2-AE8954581E6E}"/>
+    <pc:docChg chg="undo custSel addSld modSld">
+      <pc:chgData name="Alex Casson" userId="53cffa54-f866-4b4c-8e51-0383f28edfe1" providerId="ADAL" clId="{7D97CB1E-4F7A-4B5D-BAC2-AE8954581E6E}" dt="2025-06-24T05:59:32.140" v="275" actId="1076"/>
+      <pc:docMkLst>
+        <pc:docMk/>
+      </pc:docMkLst>
+      <pc:sldChg chg="addSp modSp mod">
+        <pc:chgData name="Alex Casson" userId="53cffa54-f866-4b4c-8e51-0383f28edfe1" providerId="ADAL" clId="{7D97CB1E-4F7A-4B5D-BAC2-AE8954581E6E}" dt="2025-06-24T05:03:38.116" v="22" actId="207"/>
+        <pc:sldMkLst>
+          <pc:docMk/>
+          <pc:sldMk cId="1590658493" sldId="259"/>
+        </pc:sldMkLst>
+        <pc:spChg chg="add mod">
+          <ac:chgData name="Alex Casson" userId="53cffa54-f866-4b4c-8e51-0383f28edfe1" providerId="ADAL" clId="{7D97CB1E-4F7A-4B5D-BAC2-AE8954581E6E}" dt="2025-06-24T04:59:43.722" v="2" actId="14100"/>
+          <ac:spMkLst>
+            <pc:docMk/>
+            <pc:sldMk cId="1590658493" sldId="259"/>
+            <ac:spMk id="2" creationId="{1DADA7B5-1CA5-1FDB-A67C-59B3C3D81B0E}"/>
+          </ac:spMkLst>
+        </pc:spChg>
+        <pc:spChg chg="add mod">
+          <ac:chgData name="Alex Casson" userId="53cffa54-f866-4b4c-8e51-0383f28edfe1" providerId="ADAL" clId="{7D97CB1E-4F7A-4B5D-BAC2-AE8954581E6E}" dt="2025-06-24T04:59:59.221" v="5" actId="14100"/>
+          <ac:spMkLst>
+            <pc:docMk/>
+            <pc:sldMk cId="1590658493" sldId="259"/>
+            <ac:spMk id="3" creationId="{218A5E3C-3CC1-22F7-4BCD-8FD3378B6327}"/>
+          </ac:spMkLst>
+        </pc:spChg>
+        <pc:spChg chg="add mod">
+          <ac:chgData name="Alex Casson" userId="53cffa54-f866-4b4c-8e51-0383f28edfe1" providerId="ADAL" clId="{7D97CB1E-4F7A-4B5D-BAC2-AE8954581E6E}" dt="2025-06-24T05:03:38.116" v="22" actId="207"/>
+          <ac:spMkLst>
+            <pc:docMk/>
+            <pc:sldMk cId="1590658493" sldId="259"/>
+            <ac:spMk id="4" creationId="{E1C51E95-947D-BFEC-9685-AF91F3B89243}"/>
+          </ac:spMkLst>
+        </pc:spChg>
+      </pc:sldChg>
+      <pc:sldChg chg="addSp modSp mod">
+        <pc:chgData name="Alex Casson" userId="53cffa54-f866-4b4c-8e51-0383f28edfe1" providerId="ADAL" clId="{7D97CB1E-4F7A-4B5D-BAC2-AE8954581E6E}" dt="2025-06-24T05:01:49.734" v="12" actId="14100"/>
+        <pc:sldMkLst>
+          <pc:docMk/>
+          <pc:sldMk cId="1918308472" sldId="260"/>
+        </pc:sldMkLst>
+        <pc:spChg chg="add mod">
+          <ac:chgData name="Alex Casson" userId="53cffa54-f866-4b4c-8e51-0383f28edfe1" providerId="ADAL" clId="{7D97CB1E-4F7A-4B5D-BAC2-AE8954581E6E}" dt="2025-06-24T05:01:33.333" v="7" actId="1076"/>
+          <ac:spMkLst>
+            <pc:docMk/>
+            <pc:sldMk cId="1918308472" sldId="260"/>
+            <ac:spMk id="2" creationId="{09494AB5-F140-A160-0246-7F970C8AF37B}"/>
+          </ac:spMkLst>
+        </pc:spChg>
+        <pc:spChg chg="add mod">
+          <ac:chgData name="Alex Casson" userId="53cffa54-f866-4b4c-8e51-0383f28edfe1" providerId="ADAL" clId="{7D97CB1E-4F7A-4B5D-BAC2-AE8954581E6E}" dt="2025-06-24T05:01:39.710" v="9" actId="1076"/>
+          <ac:spMkLst>
+            <pc:docMk/>
+            <pc:sldMk cId="1918308472" sldId="260"/>
+            <ac:spMk id="3" creationId="{BB55F9B8-500A-2AAF-245A-ECBC000D2DA3}"/>
+          </ac:spMkLst>
+        </pc:spChg>
+        <pc:spChg chg="add mod">
+          <ac:chgData name="Alex Casson" userId="53cffa54-f866-4b4c-8e51-0383f28edfe1" providerId="ADAL" clId="{7D97CB1E-4F7A-4B5D-BAC2-AE8954581E6E}" dt="2025-06-24T05:01:49.734" v="12" actId="14100"/>
+          <ac:spMkLst>
+            <pc:docMk/>
+            <pc:sldMk cId="1918308472" sldId="260"/>
+            <ac:spMk id="4" creationId="{8E6E879E-A3CE-1684-5C78-E586C7F51B48}"/>
+          </ac:spMkLst>
+        </pc:spChg>
+      </pc:sldChg>
+      <pc:sldChg chg="addSp modSp mod">
+        <pc:chgData name="Alex Casson" userId="53cffa54-f866-4b4c-8e51-0383f28edfe1" providerId="ADAL" clId="{7D97CB1E-4F7A-4B5D-BAC2-AE8954581E6E}" dt="2025-06-24T05:03:51.054" v="23"/>
+        <pc:sldMkLst>
+          <pc:docMk/>
+          <pc:sldMk cId="253267570" sldId="261"/>
+        </pc:sldMkLst>
+        <pc:spChg chg="add mod">
+          <ac:chgData name="Alex Casson" userId="53cffa54-f866-4b4c-8e51-0383f28edfe1" providerId="ADAL" clId="{7D97CB1E-4F7A-4B5D-BAC2-AE8954581E6E}" dt="2025-06-24T05:02:41.200" v="14" actId="1076"/>
+          <ac:spMkLst>
+            <pc:docMk/>
+            <pc:sldMk cId="253267570" sldId="261"/>
+            <ac:spMk id="2" creationId="{4767F785-E53D-6F97-7B00-ADD8C95A1D5A}"/>
+          </ac:spMkLst>
+        </pc:spChg>
+        <pc:spChg chg="add mod">
+          <ac:chgData name="Alex Casson" userId="53cffa54-f866-4b4c-8e51-0383f28edfe1" providerId="ADAL" clId="{7D97CB1E-4F7A-4B5D-BAC2-AE8954581E6E}" dt="2025-06-24T05:02:50.205" v="17" actId="14100"/>
+          <ac:spMkLst>
+            <pc:docMk/>
+            <pc:sldMk cId="253267570" sldId="261"/>
+            <ac:spMk id="3" creationId="{C4413740-4BAC-065A-8DB5-498E4F1BD347}"/>
+          </ac:spMkLst>
+        </pc:spChg>
+        <pc:spChg chg="add mod">
+          <ac:chgData name="Alex Casson" userId="53cffa54-f866-4b4c-8e51-0383f28edfe1" providerId="ADAL" clId="{7D97CB1E-4F7A-4B5D-BAC2-AE8954581E6E}" dt="2025-06-24T05:03:51.054" v="23"/>
+          <ac:spMkLst>
+            <pc:docMk/>
+            <pc:sldMk cId="253267570" sldId="261"/>
+            <ac:spMk id="4" creationId="{A5A5E619-5507-7E01-EB12-2EF149273990}"/>
+          </ac:spMkLst>
+        </pc:spChg>
+      </pc:sldChg>
+      <pc:sldChg chg="addSp delSp modSp new mod setBg">
+        <pc:chgData name="Alex Casson" userId="53cffa54-f866-4b4c-8e51-0383f28edfe1" providerId="ADAL" clId="{7D97CB1E-4F7A-4B5D-BAC2-AE8954581E6E}" dt="2025-06-24T05:14:47.057" v="71" actId="20577"/>
+        <pc:sldMkLst>
+          <pc:docMk/>
+          <pc:sldMk cId="1768232676" sldId="262"/>
+        </pc:sldMkLst>
+        <pc:spChg chg="del mod">
+          <ac:chgData name="Alex Casson" userId="53cffa54-f866-4b4c-8e51-0383f28edfe1" providerId="ADAL" clId="{7D97CB1E-4F7A-4B5D-BAC2-AE8954581E6E}" dt="2025-06-24T05:14:03.160" v="26" actId="478"/>
+          <ac:spMkLst>
+            <pc:docMk/>
+            <pc:sldMk cId="1768232676" sldId="262"/>
+            <ac:spMk id="2" creationId="{480ED188-6408-C647-5E47-BC11F858EABA}"/>
+          </ac:spMkLst>
+        </pc:spChg>
+        <pc:spChg chg="del mod">
+          <ac:chgData name="Alex Casson" userId="53cffa54-f866-4b4c-8e51-0383f28edfe1" providerId="ADAL" clId="{7D97CB1E-4F7A-4B5D-BAC2-AE8954581E6E}" dt="2025-06-24T05:14:06.271" v="27" actId="478"/>
+          <ac:spMkLst>
+            <pc:docMk/>
+            <pc:sldMk cId="1768232676" sldId="262"/>
+            <ac:spMk id="3" creationId="{7D6993FA-874E-0D66-D65A-B1CE3753F977}"/>
+          </ac:spMkLst>
+        </pc:spChg>
+        <pc:spChg chg="add del mod">
+          <ac:chgData name="Alex Casson" userId="53cffa54-f866-4b4c-8e51-0383f28edfe1" providerId="ADAL" clId="{7D97CB1E-4F7A-4B5D-BAC2-AE8954581E6E}" dt="2025-06-24T05:14:08.420" v="28" actId="478"/>
+          <ac:spMkLst>
+            <pc:docMk/>
+            <pc:sldMk cId="1768232676" sldId="262"/>
+            <ac:spMk id="5" creationId="{C106E409-B549-D77F-2808-83BA8758400D}"/>
+          </ac:spMkLst>
+        </pc:spChg>
+        <pc:spChg chg="add">
+          <ac:chgData name="Alex Casson" userId="53cffa54-f866-4b4c-8e51-0383f28edfe1" providerId="ADAL" clId="{7D97CB1E-4F7A-4B5D-BAC2-AE8954581E6E}" dt="2025-06-24T05:14:03.110" v="25" actId="26606"/>
+          <ac:spMkLst>
+            <pc:docMk/>
+            <pc:sldMk cId="1768232676" sldId="262"/>
+            <ac:spMk id="8" creationId="{095B79CA-1CB8-A133-67D7-E2B7AC1F9454}"/>
+          </ac:spMkLst>
+        </pc:spChg>
+        <pc:spChg chg="add mod">
+          <ac:chgData name="Alex Casson" userId="53cffa54-f866-4b4c-8e51-0383f28edfe1" providerId="ADAL" clId="{7D97CB1E-4F7A-4B5D-BAC2-AE8954581E6E}" dt="2025-06-24T05:14:32.161" v="31" actId="1076"/>
+          <ac:spMkLst>
+            <pc:docMk/>
+            <pc:sldMk cId="1768232676" sldId="262"/>
+            <ac:spMk id="9" creationId="{392E130A-F480-01F5-5AFD-AF30C2C3EECB}"/>
+          </ac:spMkLst>
+        </pc:spChg>
+        <pc:spChg chg="add mod">
+          <ac:chgData name="Alex Casson" userId="53cffa54-f866-4b4c-8e51-0383f28edfe1" providerId="ADAL" clId="{7D97CB1E-4F7A-4B5D-BAC2-AE8954581E6E}" dt="2025-06-24T05:14:47.057" v="71" actId="20577"/>
+          <ac:spMkLst>
+            <pc:docMk/>
+            <pc:sldMk cId="1768232676" sldId="262"/>
+            <ac:spMk id="10" creationId="{61004C15-95C4-BBE5-3F3C-1C59E173D73B}"/>
+          </ac:spMkLst>
+        </pc:spChg>
+        <pc:picChg chg="add">
+          <ac:chgData name="Alex Casson" userId="53cffa54-f866-4b4c-8e51-0383f28edfe1" providerId="ADAL" clId="{7D97CB1E-4F7A-4B5D-BAC2-AE8954581E6E}" dt="2025-06-24T05:14:09.126" v="29" actId="22"/>
+          <ac:picMkLst>
+            <pc:docMk/>
+            <pc:sldMk cId="1768232676" sldId="262"/>
+            <ac:picMk id="7" creationId="{DD456608-E1EF-3C25-00EC-93FD6E61FBA4}"/>
+          </ac:picMkLst>
+        </pc:picChg>
+      </pc:sldChg>
+      <pc:sldChg chg="addSp delSp modSp new mod">
+        <pc:chgData name="Alex Casson" userId="53cffa54-f866-4b4c-8e51-0383f28edfe1" providerId="ADAL" clId="{7D97CB1E-4F7A-4B5D-BAC2-AE8954581E6E}" dt="2025-06-24T05:16:56.297" v="76"/>
+        <pc:sldMkLst>
+          <pc:docMk/>
+          <pc:sldMk cId="2430991985" sldId="263"/>
+        </pc:sldMkLst>
+        <pc:spChg chg="del">
+          <ac:chgData name="Alex Casson" userId="53cffa54-f866-4b4c-8e51-0383f28edfe1" providerId="ADAL" clId="{7D97CB1E-4F7A-4B5D-BAC2-AE8954581E6E}" dt="2025-06-24T05:16:47.366" v="74" actId="478"/>
+          <ac:spMkLst>
+            <pc:docMk/>
+            <pc:sldMk cId="2430991985" sldId="263"/>
+            <ac:spMk id="2" creationId="{AE3211A4-D696-1E26-E9F4-C988B313D19A}"/>
+          </ac:spMkLst>
+        </pc:spChg>
+        <pc:spChg chg="del">
+          <ac:chgData name="Alex Casson" userId="53cffa54-f866-4b4c-8e51-0383f28edfe1" providerId="ADAL" clId="{7D97CB1E-4F7A-4B5D-BAC2-AE8954581E6E}" dt="2025-06-24T05:16:45.726" v="73" actId="478"/>
+          <ac:spMkLst>
+            <pc:docMk/>
+            <pc:sldMk cId="2430991985" sldId="263"/>
+            <ac:spMk id="3" creationId="{2EE3627A-F082-B2DF-CA07-80C028B0C120}"/>
+          </ac:spMkLst>
+        </pc:spChg>
+        <pc:spChg chg="add mod">
+          <ac:chgData name="Alex Casson" userId="53cffa54-f866-4b4c-8e51-0383f28edfe1" providerId="ADAL" clId="{7D97CB1E-4F7A-4B5D-BAC2-AE8954581E6E}" dt="2025-06-24T05:16:56.297" v="76"/>
+          <ac:spMkLst>
+            <pc:docMk/>
+            <pc:sldMk cId="2430991985" sldId="263"/>
+            <ac:spMk id="6" creationId="{BF5EEA95-4A3E-FF80-5A76-EA184A0A6F8C}"/>
+          </ac:spMkLst>
+        </pc:spChg>
+        <pc:spChg chg="add mod">
+          <ac:chgData name="Alex Casson" userId="53cffa54-f866-4b4c-8e51-0383f28edfe1" providerId="ADAL" clId="{7D97CB1E-4F7A-4B5D-BAC2-AE8954581E6E}" dt="2025-06-24T05:16:56.297" v="76"/>
+          <ac:spMkLst>
+            <pc:docMk/>
+            <pc:sldMk cId="2430991985" sldId="263"/>
+            <ac:spMk id="7" creationId="{CA8F5669-AEAF-3EE2-2451-2A9806E9FD75}"/>
+          </ac:spMkLst>
+        </pc:spChg>
+        <pc:picChg chg="add">
+          <ac:chgData name="Alex Casson" userId="53cffa54-f866-4b4c-8e51-0383f28edfe1" providerId="ADAL" clId="{7D97CB1E-4F7A-4B5D-BAC2-AE8954581E6E}" dt="2025-06-24T05:16:48.223" v="75" actId="22"/>
+          <ac:picMkLst>
+            <pc:docMk/>
+            <pc:sldMk cId="2430991985" sldId="263"/>
+            <ac:picMk id="5" creationId="{D7E2EE55-E8D6-E641-82CF-E0BECF726395}"/>
+          </ac:picMkLst>
+        </pc:picChg>
+      </pc:sldChg>
+      <pc:sldChg chg="addSp delSp modSp new mod">
+        <pc:chgData name="Alex Casson" userId="53cffa54-f866-4b4c-8e51-0383f28edfe1" providerId="ADAL" clId="{7D97CB1E-4F7A-4B5D-BAC2-AE8954581E6E}" dt="2025-06-24T05:30:39.933" v="204" actId="14100"/>
+        <pc:sldMkLst>
+          <pc:docMk/>
+          <pc:sldMk cId="3841700758" sldId="264"/>
+        </pc:sldMkLst>
+        <pc:spChg chg="del">
+          <ac:chgData name="Alex Casson" userId="53cffa54-f866-4b4c-8e51-0383f28edfe1" providerId="ADAL" clId="{7D97CB1E-4F7A-4B5D-BAC2-AE8954581E6E}" dt="2025-06-24T05:27:20.393" v="79" actId="478"/>
+          <ac:spMkLst>
+            <pc:docMk/>
+            <pc:sldMk cId="3841700758" sldId="264"/>
+            <ac:spMk id="2" creationId="{DC72E307-E9A8-629B-684B-3A1E9CF91873}"/>
+          </ac:spMkLst>
+        </pc:spChg>
+        <pc:spChg chg="del">
+          <ac:chgData name="Alex Casson" userId="53cffa54-f866-4b4c-8e51-0383f28edfe1" providerId="ADAL" clId="{7D97CB1E-4F7A-4B5D-BAC2-AE8954581E6E}" dt="2025-06-24T05:27:18.242" v="78" actId="478"/>
+          <ac:spMkLst>
+            <pc:docMk/>
+            <pc:sldMk cId="3841700758" sldId="264"/>
+            <ac:spMk id="3" creationId="{CB43A23C-29F4-238D-06E2-E1F517F8B233}"/>
+          </ac:spMkLst>
+        </pc:spChg>
+        <pc:spChg chg="add mod">
+          <ac:chgData name="Alex Casson" userId="53cffa54-f866-4b4c-8e51-0383f28edfe1" providerId="ADAL" clId="{7D97CB1E-4F7A-4B5D-BAC2-AE8954581E6E}" dt="2025-06-24T05:28:29.138" v="91" actId="1076"/>
+          <ac:spMkLst>
+            <pc:docMk/>
+            <pc:sldMk cId="3841700758" sldId="264"/>
+            <ac:spMk id="8" creationId="{0E1730CE-393E-380D-CF35-0815593124A8}"/>
+          </ac:spMkLst>
+        </pc:spChg>
+        <pc:spChg chg="add mod">
+          <ac:chgData name="Alex Casson" userId="53cffa54-f866-4b4c-8e51-0383f28edfe1" providerId="ADAL" clId="{7D97CB1E-4F7A-4B5D-BAC2-AE8954581E6E}" dt="2025-06-24T05:28:51.675" v="116" actId="1076"/>
+          <ac:spMkLst>
+            <pc:docMk/>
+            <pc:sldMk cId="3841700758" sldId="264"/>
+            <ac:spMk id="9" creationId="{D609B0F7-FCF1-39CB-7EA0-907BAA37BAA7}"/>
+          </ac:spMkLst>
+        </pc:spChg>
+        <pc:spChg chg="add mod">
+          <ac:chgData name="Alex Casson" userId="53cffa54-f866-4b4c-8e51-0383f28edfe1" providerId="ADAL" clId="{7D97CB1E-4F7A-4B5D-BAC2-AE8954581E6E}" dt="2025-06-24T05:29:04.421" v="119" actId="14100"/>
+          <ac:spMkLst>
+            <pc:docMk/>
+            <pc:sldMk cId="3841700758" sldId="264"/>
+            <ac:spMk id="10" creationId="{99DC136C-1B5E-2240-19B9-68DA7DE1AC4C}"/>
+          </ac:spMkLst>
+        </pc:spChg>
+        <pc:spChg chg="add mod">
+          <ac:chgData name="Alex Casson" userId="53cffa54-f866-4b4c-8e51-0383f28edfe1" providerId="ADAL" clId="{7D97CB1E-4F7A-4B5D-BAC2-AE8954581E6E}" dt="2025-06-24T05:29:18.412" v="128" actId="1076"/>
+          <ac:spMkLst>
+            <pc:docMk/>
+            <pc:sldMk cId="3841700758" sldId="264"/>
+            <ac:spMk id="11" creationId="{AA03C277-02EA-492A-6D25-40EDD8F8E0E4}"/>
+          </ac:spMkLst>
+        </pc:spChg>
+        <pc:spChg chg="add mod">
+          <ac:chgData name="Alex Casson" userId="53cffa54-f866-4b4c-8e51-0383f28edfe1" providerId="ADAL" clId="{7D97CB1E-4F7A-4B5D-BAC2-AE8954581E6E}" dt="2025-06-24T05:29:38.087" v="130" actId="1076"/>
+          <ac:spMkLst>
+            <pc:docMk/>
+            <pc:sldMk cId="3841700758" sldId="264"/>
+            <ac:spMk id="12" creationId="{AA4072D0-FA2B-9EAC-548C-856243005081}"/>
+          </ac:spMkLst>
+        </pc:spChg>
+        <pc:spChg chg="add mod">
+          <ac:chgData name="Alex Casson" userId="53cffa54-f866-4b4c-8e51-0383f28edfe1" providerId="ADAL" clId="{7D97CB1E-4F7A-4B5D-BAC2-AE8954581E6E}" dt="2025-06-24T05:29:54.283" v="146" actId="1076"/>
+          <ac:spMkLst>
+            <pc:docMk/>
+            <pc:sldMk cId="3841700758" sldId="264"/>
+            <ac:spMk id="13" creationId="{BA230488-68D6-A478-6ADB-B7DD5F9BA5C7}"/>
+          </ac:spMkLst>
+        </pc:spChg>
+        <pc:spChg chg="add mod">
+          <ac:chgData name="Alex Casson" userId="53cffa54-f866-4b4c-8e51-0383f28edfe1" providerId="ADAL" clId="{7D97CB1E-4F7A-4B5D-BAC2-AE8954581E6E}" dt="2025-06-24T05:30:18.246" v="149" actId="14100"/>
+          <ac:spMkLst>
+            <pc:docMk/>
+            <pc:sldMk cId="3841700758" sldId="264"/>
+            <ac:spMk id="14" creationId="{72EF0246-3117-EBE2-7F30-D7891F88A08D}"/>
+          </ac:spMkLst>
+        </pc:spChg>
+        <pc:spChg chg="add mod">
+          <ac:chgData name="Alex Casson" userId="53cffa54-f866-4b4c-8e51-0383f28edfe1" providerId="ADAL" clId="{7D97CB1E-4F7A-4B5D-BAC2-AE8954581E6E}" dt="2025-06-24T05:30:39.933" v="204" actId="14100"/>
+          <ac:spMkLst>
+            <pc:docMk/>
+            <pc:sldMk cId="3841700758" sldId="264"/>
+            <ac:spMk id="15" creationId="{316BADE1-8400-219B-2380-4B07C9E9B312}"/>
+          </ac:spMkLst>
+        </pc:spChg>
+        <pc:picChg chg="add del">
+          <ac:chgData name="Alex Casson" userId="53cffa54-f866-4b4c-8e51-0383f28edfe1" providerId="ADAL" clId="{7D97CB1E-4F7A-4B5D-BAC2-AE8954581E6E}" dt="2025-06-24T05:27:25.883" v="81" actId="478"/>
+          <ac:picMkLst>
+            <pc:docMk/>
+            <pc:sldMk cId="3841700758" sldId="264"/>
+            <ac:picMk id="5" creationId="{D4E0601F-D7EB-FE86-67B8-7C1024052F84}"/>
+          </ac:picMkLst>
+        </pc:picChg>
+        <pc:picChg chg="add mod modCrop">
+          <ac:chgData name="Alex Casson" userId="53cffa54-f866-4b4c-8e51-0383f28edfe1" providerId="ADAL" clId="{7D97CB1E-4F7A-4B5D-BAC2-AE8954581E6E}" dt="2025-06-24T05:28:12.247" v="89" actId="14100"/>
+          <ac:picMkLst>
+            <pc:docMk/>
+            <pc:sldMk cId="3841700758" sldId="264"/>
+            <ac:picMk id="7" creationId="{01DFEE01-ABA1-2B6E-A547-758E875FDA3A}"/>
+          </ac:picMkLst>
+        </pc:picChg>
+      </pc:sldChg>
+      <pc:sldChg chg="addSp delSp modSp new mod">
+        <pc:chgData name="Alex Casson" userId="53cffa54-f866-4b4c-8e51-0383f28edfe1" providerId="ADAL" clId="{7D97CB1E-4F7A-4B5D-BAC2-AE8954581E6E}" dt="2025-06-24T05:42:25.512" v="227" actId="1076"/>
+        <pc:sldMkLst>
+          <pc:docMk/>
+          <pc:sldMk cId="1089121650" sldId="265"/>
+        </pc:sldMkLst>
+        <pc:spChg chg="del">
+          <ac:chgData name="Alex Casson" userId="53cffa54-f866-4b4c-8e51-0383f28edfe1" providerId="ADAL" clId="{7D97CB1E-4F7A-4B5D-BAC2-AE8954581E6E}" dt="2025-06-24T05:41:17.607" v="207" actId="478"/>
+          <ac:spMkLst>
+            <pc:docMk/>
+            <pc:sldMk cId="1089121650" sldId="265"/>
+            <ac:spMk id="2" creationId="{7B3CF4BE-D61B-1CDC-8469-4E6AB2AC87D7}"/>
+          </ac:spMkLst>
+        </pc:spChg>
+        <pc:spChg chg="del">
+          <ac:chgData name="Alex Casson" userId="53cffa54-f866-4b4c-8e51-0383f28edfe1" providerId="ADAL" clId="{7D97CB1E-4F7A-4B5D-BAC2-AE8954581E6E}" dt="2025-06-24T05:41:16.453" v="206" actId="478"/>
+          <ac:spMkLst>
+            <pc:docMk/>
+            <pc:sldMk cId="1089121650" sldId="265"/>
+            <ac:spMk id="3" creationId="{F50C6891-C884-CE1A-20FA-DE4BF02CFE6F}"/>
+          </ac:spMkLst>
+        </pc:spChg>
+        <pc:spChg chg="add mod">
+          <ac:chgData name="Alex Casson" userId="53cffa54-f866-4b4c-8e51-0383f28edfe1" providerId="ADAL" clId="{7D97CB1E-4F7A-4B5D-BAC2-AE8954581E6E}" dt="2025-06-24T05:42:25.512" v="227" actId="1076"/>
+          <ac:spMkLst>
+            <pc:docMk/>
+            <pc:sldMk cId="1089121650" sldId="265"/>
+            <ac:spMk id="6" creationId="{9D90D4D1-BDE6-90FA-77BC-2F46F508AB7D}"/>
+          </ac:spMkLst>
+        </pc:spChg>
+        <pc:spChg chg="add mod">
+          <ac:chgData name="Alex Casson" userId="53cffa54-f866-4b4c-8e51-0383f28edfe1" providerId="ADAL" clId="{7D97CB1E-4F7A-4B5D-BAC2-AE8954581E6E}" dt="2025-06-24T05:41:47.938" v="214" actId="1076"/>
+          <ac:spMkLst>
+            <pc:docMk/>
+            <pc:sldMk cId="1089121650" sldId="265"/>
+            <ac:spMk id="7" creationId="{AB94B683-2A1F-2365-9996-E63CE7350C1D}"/>
+          </ac:spMkLst>
+        </pc:spChg>
+        <pc:spChg chg="add mod">
+          <ac:chgData name="Alex Casson" userId="53cffa54-f866-4b4c-8e51-0383f28edfe1" providerId="ADAL" clId="{7D97CB1E-4F7A-4B5D-BAC2-AE8954581E6E}" dt="2025-06-24T05:41:57.652" v="216" actId="1076"/>
+          <ac:spMkLst>
+            <pc:docMk/>
+            <pc:sldMk cId="1089121650" sldId="265"/>
+            <ac:spMk id="8" creationId="{A113E5C6-C329-7CE1-9849-510FCC024B51}"/>
+          </ac:spMkLst>
+        </pc:spChg>
+        <pc:spChg chg="add mod">
+          <ac:chgData name="Alex Casson" userId="53cffa54-f866-4b4c-8e51-0383f28edfe1" providerId="ADAL" clId="{7D97CB1E-4F7A-4B5D-BAC2-AE8954581E6E}" dt="2025-06-24T05:42:18.233" v="226" actId="1076"/>
+          <ac:spMkLst>
+            <pc:docMk/>
+            <pc:sldMk cId="1089121650" sldId="265"/>
+            <ac:spMk id="9" creationId="{F1F61FC9-7CB5-B2C5-1429-263324F52E57}"/>
+          </ac:spMkLst>
+        </pc:spChg>
+        <pc:picChg chg="add mod">
+          <ac:chgData name="Alex Casson" userId="53cffa54-f866-4b4c-8e51-0383f28edfe1" providerId="ADAL" clId="{7D97CB1E-4F7A-4B5D-BAC2-AE8954581E6E}" dt="2025-06-24T05:41:44.595" v="213" actId="1076"/>
+          <ac:picMkLst>
+            <pc:docMk/>
+            <pc:sldMk cId="1089121650" sldId="265"/>
+            <ac:picMk id="5" creationId="{B56DAA8B-146D-C657-DAA8-ED520BEA6D06}"/>
+          </ac:picMkLst>
+        </pc:picChg>
+      </pc:sldChg>
+      <pc:sldChg chg="addSp delSp modSp new mod">
+        <pc:chgData name="Alex Casson" userId="53cffa54-f866-4b4c-8e51-0383f28edfe1" providerId="ADAL" clId="{7D97CB1E-4F7A-4B5D-BAC2-AE8954581E6E}" dt="2025-06-24T05:56:34.765" v="262" actId="20577"/>
+        <pc:sldMkLst>
+          <pc:docMk/>
+          <pc:sldMk cId="2715702536" sldId="266"/>
+        </pc:sldMkLst>
+        <pc:spChg chg="del">
+          <ac:chgData name="Alex Casson" userId="53cffa54-f866-4b4c-8e51-0383f28edfe1" providerId="ADAL" clId="{7D97CB1E-4F7A-4B5D-BAC2-AE8954581E6E}" dt="2025-06-24T05:47:40.483" v="230" actId="478"/>
+          <ac:spMkLst>
+            <pc:docMk/>
+            <pc:sldMk cId="2715702536" sldId="266"/>
+            <ac:spMk id="2" creationId="{39AAF805-BBB8-2658-E265-B18769E0A714}"/>
+          </ac:spMkLst>
+        </pc:spChg>
+        <pc:spChg chg="del">
+          <ac:chgData name="Alex Casson" userId="53cffa54-f866-4b4c-8e51-0383f28edfe1" providerId="ADAL" clId="{7D97CB1E-4F7A-4B5D-BAC2-AE8954581E6E}" dt="2025-06-24T05:47:39.675" v="229" actId="478"/>
+          <ac:spMkLst>
+            <pc:docMk/>
+            <pc:sldMk cId="2715702536" sldId="266"/>
+            <ac:spMk id="3" creationId="{506C0D4C-5DA2-5892-D0AD-3B58C6F31EBA}"/>
+          </ac:spMkLst>
+        </pc:spChg>
+        <pc:spChg chg="add del mod">
+          <ac:chgData name="Alex Casson" userId="53cffa54-f866-4b4c-8e51-0383f28edfe1" providerId="ADAL" clId="{7D97CB1E-4F7A-4B5D-BAC2-AE8954581E6E}" dt="2025-06-24T05:47:46.439" v="233" actId="478"/>
+          <ac:spMkLst>
+            <pc:docMk/>
+            <pc:sldMk cId="2715702536" sldId="266"/>
+            <ac:spMk id="5" creationId="{B2362307-08C2-A91E-97B6-168AB682A93E}"/>
+          </ac:spMkLst>
+        </pc:spChg>
+        <pc:spChg chg="add mod">
+          <ac:chgData name="Alex Casson" userId="53cffa54-f866-4b4c-8e51-0383f28edfe1" providerId="ADAL" clId="{7D97CB1E-4F7A-4B5D-BAC2-AE8954581E6E}" dt="2025-06-24T05:54:34.579" v="245" actId="207"/>
+          <ac:spMkLst>
+            <pc:docMk/>
+            <pc:sldMk cId="2715702536" sldId="266"/>
+            <ac:spMk id="8" creationId="{5D34F374-FC68-9DCD-B2E4-8B02F19C56F5}"/>
+          </ac:spMkLst>
+        </pc:spChg>
+        <pc:spChg chg="add mod">
+          <ac:chgData name="Alex Casson" userId="53cffa54-f866-4b4c-8e51-0383f28edfe1" providerId="ADAL" clId="{7D97CB1E-4F7A-4B5D-BAC2-AE8954581E6E}" dt="2025-06-24T05:54:55.457" v="247" actId="1076"/>
+          <ac:spMkLst>
+            <pc:docMk/>
+            <pc:sldMk cId="2715702536" sldId="266"/>
+            <ac:spMk id="9" creationId="{D643BEEF-7703-E84C-0F4B-53860067726B}"/>
+          </ac:spMkLst>
+        </pc:spChg>
+        <pc:spChg chg="add mod">
+          <ac:chgData name="Alex Casson" userId="53cffa54-f866-4b4c-8e51-0383f28edfe1" providerId="ADAL" clId="{7D97CB1E-4F7A-4B5D-BAC2-AE8954581E6E}" dt="2025-06-24T05:55:12.847" v="249" actId="1076"/>
+          <ac:spMkLst>
+            <pc:docMk/>
+            <pc:sldMk cId="2715702536" sldId="266"/>
+            <ac:spMk id="10" creationId="{4662C1A9-9FF2-3977-91DA-75A6C14689C6}"/>
+          </ac:spMkLst>
+        </pc:spChg>
+        <pc:spChg chg="add mod">
+          <ac:chgData name="Alex Casson" userId="53cffa54-f866-4b4c-8e51-0383f28edfe1" providerId="ADAL" clId="{7D97CB1E-4F7A-4B5D-BAC2-AE8954581E6E}" dt="2025-06-24T05:55:35.282" v="252" actId="14100"/>
+          <ac:spMkLst>
+            <pc:docMk/>
+            <pc:sldMk cId="2715702536" sldId="266"/>
+            <ac:spMk id="11" creationId="{A889E33E-5D9C-07F0-AA42-BADECFCB97C8}"/>
+          </ac:spMkLst>
+        </pc:spChg>
+        <pc:spChg chg="add mod">
+          <ac:chgData name="Alex Casson" userId="53cffa54-f866-4b4c-8e51-0383f28edfe1" providerId="ADAL" clId="{7D97CB1E-4F7A-4B5D-BAC2-AE8954581E6E}" dt="2025-06-24T05:55:53.468" v="256" actId="1076"/>
+          <ac:spMkLst>
+            <pc:docMk/>
+            <pc:sldMk cId="2715702536" sldId="266"/>
+            <ac:spMk id="12" creationId="{AB4004CE-6101-1A40-ED68-E49D3739B72A}"/>
+          </ac:spMkLst>
+        </pc:spChg>
+        <pc:spChg chg="add mod">
+          <ac:chgData name="Alex Casson" userId="53cffa54-f866-4b4c-8e51-0383f28edfe1" providerId="ADAL" clId="{7D97CB1E-4F7A-4B5D-BAC2-AE8954581E6E}" dt="2025-06-24T05:56:34.765" v="262" actId="20577"/>
+          <ac:spMkLst>
+            <pc:docMk/>
+            <pc:sldMk cId="2715702536" sldId="266"/>
+            <ac:spMk id="13" creationId="{57E5B07D-0012-4B83-3AC2-9E5E131D6E0E}"/>
+          </ac:spMkLst>
+        </pc:spChg>
+        <pc:picChg chg="add mod modCrop">
+          <ac:chgData name="Alex Casson" userId="53cffa54-f866-4b4c-8e51-0383f28edfe1" providerId="ADAL" clId="{7D97CB1E-4F7A-4B5D-BAC2-AE8954581E6E}" dt="2025-06-24T05:55:48.102" v="255" actId="1076"/>
+          <ac:picMkLst>
+            <pc:docMk/>
+            <pc:sldMk cId="2715702536" sldId="266"/>
+            <ac:picMk id="7" creationId="{F26628ED-C9FD-A57F-4908-522DB59F51E7}"/>
+          </ac:picMkLst>
+        </pc:picChg>
+      </pc:sldChg>
+      <pc:sldChg chg="addSp delSp modSp new mod">
+        <pc:chgData name="Alex Casson" userId="53cffa54-f866-4b4c-8e51-0383f28edfe1" providerId="ADAL" clId="{7D97CB1E-4F7A-4B5D-BAC2-AE8954581E6E}" dt="2025-06-24T05:59:32.140" v="275" actId="1076"/>
+        <pc:sldMkLst>
+          <pc:docMk/>
+          <pc:sldMk cId="2381781374" sldId="267"/>
+        </pc:sldMkLst>
+        <pc:spChg chg="del">
+          <ac:chgData name="Alex Casson" userId="53cffa54-f866-4b4c-8e51-0383f28edfe1" providerId="ADAL" clId="{7D97CB1E-4F7A-4B5D-BAC2-AE8954581E6E}" dt="2025-06-24T05:58:45.405" v="264" actId="478"/>
+          <ac:spMkLst>
+            <pc:docMk/>
+            <pc:sldMk cId="2381781374" sldId="267"/>
+            <ac:spMk id="2" creationId="{E2800E5D-04F2-F18C-2EEC-3AB8CF7255DA}"/>
+          </ac:spMkLst>
+        </pc:spChg>
+        <pc:spChg chg="del">
+          <ac:chgData name="Alex Casson" userId="53cffa54-f866-4b4c-8e51-0383f28edfe1" providerId="ADAL" clId="{7D97CB1E-4F7A-4B5D-BAC2-AE8954581E6E}" dt="2025-06-24T05:58:46.286" v="265" actId="478"/>
+          <ac:spMkLst>
+            <pc:docMk/>
+            <pc:sldMk cId="2381781374" sldId="267"/>
+            <ac:spMk id="3" creationId="{8CF27EB0-E973-896D-8EC9-0CA886C28FD3}"/>
+          </ac:spMkLst>
+        </pc:spChg>
+        <pc:spChg chg="add mod">
+          <ac:chgData name="Alex Casson" userId="53cffa54-f866-4b4c-8e51-0383f28edfe1" providerId="ADAL" clId="{7D97CB1E-4F7A-4B5D-BAC2-AE8954581E6E}" dt="2025-06-24T05:59:17.645" v="271" actId="1076"/>
+          <ac:spMkLst>
+            <pc:docMk/>
+            <pc:sldMk cId="2381781374" sldId="267"/>
+            <ac:spMk id="6" creationId="{D397DF99-B757-C2B3-4099-DEECF0171CB9}"/>
+          </ac:spMkLst>
+        </pc:spChg>
+        <pc:spChg chg="add mod">
+          <ac:chgData name="Alex Casson" userId="53cffa54-f866-4b4c-8e51-0383f28edfe1" providerId="ADAL" clId="{7D97CB1E-4F7A-4B5D-BAC2-AE8954581E6E}" dt="2025-06-24T05:59:11.621" v="270" actId="1076"/>
+          <ac:spMkLst>
+            <pc:docMk/>
+            <pc:sldMk cId="2381781374" sldId="267"/>
+            <ac:spMk id="7" creationId="{2CEF40D7-D443-8056-F1B8-20C755729AFF}"/>
+          </ac:spMkLst>
+        </pc:spChg>
+        <pc:spChg chg="add mod">
+          <ac:chgData name="Alex Casson" userId="53cffa54-f866-4b4c-8e51-0383f28edfe1" providerId="ADAL" clId="{7D97CB1E-4F7A-4B5D-BAC2-AE8954581E6E}" dt="2025-06-24T05:59:09.150" v="269" actId="14100"/>
+          <ac:spMkLst>
+            <pc:docMk/>
+            <pc:sldMk cId="2381781374" sldId="267"/>
+            <ac:spMk id="8" creationId="{6C281ABB-FABF-3FD2-20BB-63C76EE7DAAD}"/>
+          </ac:spMkLst>
+        </pc:spChg>
+        <pc:spChg chg="add mod">
+          <ac:chgData name="Alex Casson" userId="53cffa54-f866-4b4c-8e51-0383f28edfe1" providerId="ADAL" clId="{7D97CB1E-4F7A-4B5D-BAC2-AE8954581E6E}" dt="2025-06-24T05:59:32.140" v="275" actId="1076"/>
+          <ac:spMkLst>
+            <pc:docMk/>
+            <pc:sldMk cId="2381781374" sldId="267"/>
+            <ac:spMk id="9" creationId="{B9031CE3-349B-3556-9D18-32BD5B9EEE52}"/>
+          </ac:spMkLst>
+        </pc:spChg>
+        <pc:picChg chg="add">
+          <ac:chgData name="Alex Casson" userId="53cffa54-f866-4b4c-8e51-0383f28edfe1" providerId="ADAL" clId="{7D97CB1E-4F7A-4B5D-BAC2-AE8954581E6E}" dt="2025-06-24T05:58:46.869" v="266" actId="22"/>
+          <ac:picMkLst>
+            <pc:docMk/>
+            <pc:sldMk cId="2381781374" sldId="267"/>
+            <ac:picMk id="5" creationId="{12D82434-D5E0-433C-9957-1DCEACA6DAE2}"/>
+          </ac:picMkLst>
+        </pc:picChg>
+      </pc:sldChg>
+    </pc:docChg>
+  </pc:docChgLst>
 </pc:chgInfo>
+</file>
+
+<file path=ppt/notesMasters/notesMaster1.xml><?xml version="1.0" encoding="utf-8"?>
+<p:notesMaster xmlns:a="http://schemas.openxmlformats.org/drawingml/2006/main" xmlns:r="http://schemas.openxmlformats.org/officeDocument/2006/relationships" xmlns:p="http://schemas.openxmlformats.org/presentationml/2006/main">
+  <p:cSld>
+    <p:bg>
+      <p:bgRef idx="1001">
+        <a:schemeClr val="bg1"/>
+      </p:bgRef>
+    </p:bg>
+    <p:spTree>
+      <p:nvGrpSpPr>
+        <p:cNvPr id="1" name=""/>
+        <p:cNvGrpSpPr/>
+        <p:nvPr/>
+      </p:nvGrpSpPr>
+      <p:grpSpPr>
+        <a:xfrm>
+          <a:off x="0" y="0"/>
+          <a:ext cx="0" cy="0"/>
+          <a:chOff x="0" y="0"/>
+          <a:chExt cx="0" cy="0"/>
+        </a:xfrm>
+      </p:grpSpPr>
+      <p:sp>
+        <p:nvSpPr>
+          <p:cNvPr id="2" name="Header Placeholder 1"/>
+          <p:cNvSpPr>
+            <a:spLocks noGrp="1"/>
+          </p:cNvSpPr>
+          <p:nvPr>
+            <p:ph type="hdr" sz="quarter"/>
+          </p:nvPr>
+        </p:nvSpPr>
+        <p:spPr>
+          <a:xfrm>
+            <a:off x="0" y="0"/>
+            <a:ext cx="2971800" cy="458788"/>
+          </a:xfrm>
+          <a:prstGeom prst="rect">
+            <a:avLst/>
+          </a:prstGeom>
+        </p:spPr>
+        <p:txBody>
+          <a:bodyPr vert="horz" lIns="91440" tIns="45720" rIns="91440" bIns="45720" rtlCol="0"/>
+          <a:lstStyle>
+            <a:lvl1pPr algn="l">
+              <a:defRPr sz="1200"/>
+            </a:lvl1pPr>
+          </a:lstStyle>
+          <a:p>
+            <a:endParaRPr lang="en-GB"/>
+          </a:p>
+        </p:txBody>
+      </p:sp>
+      <p:sp>
+        <p:nvSpPr>
+          <p:cNvPr id="3" name="Date Placeholder 2"/>
+          <p:cNvSpPr>
+            <a:spLocks noGrp="1"/>
+          </p:cNvSpPr>
+          <p:nvPr>
+            <p:ph type="dt" idx="1"/>
+          </p:nvPr>
+        </p:nvSpPr>
+        <p:spPr>
+          <a:xfrm>
+            <a:off x="3884613" y="0"/>
+            <a:ext cx="2971800" cy="458788"/>
+          </a:xfrm>
+          <a:prstGeom prst="rect">
+            <a:avLst/>
+          </a:prstGeom>
+        </p:spPr>
+        <p:txBody>
+          <a:bodyPr vert="horz" lIns="91440" tIns="45720" rIns="91440" bIns="45720" rtlCol="0"/>
+          <a:lstStyle>
+            <a:lvl1pPr algn="r">
+              <a:defRPr sz="1200"/>
+            </a:lvl1pPr>
+          </a:lstStyle>
+          <a:p>
+            <a:fld id="{155B4900-3FD7-460A-B0E9-A4A64F1293B0}" type="datetimeFigureOut">
+              <a:rPr lang="en-GB" smtClean="0"/>
+              <a:t>24/06/2025</a:t>
+            </a:fld>
+            <a:endParaRPr lang="en-GB"/>
+          </a:p>
+        </p:txBody>
+      </p:sp>
+      <p:sp>
+        <p:nvSpPr>
+          <p:cNvPr id="4" name="Slide Image Placeholder 3"/>
+          <p:cNvSpPr>
+            <a:spLocks noGrp="1" noRot="1" noChangeAspect="1"/>
+          </p:cNvSpPr>
+          <p:nvPr>
+            <p:ph type="sldImg" idx="2"/>
+          </p:nvPr>
+        </p:nvSpPr>
+        <p:spPr>
+          <a:xfrm>
+            <a:off x="685800" y="1143000"/>
+            <a:ext cx="5486400" cy="3086100"/>
+          </a:xfrm>
+          <a:prstGeom prst="rect">
+            <a:avLst/>
+          </a:prstGeom>
+          <a:noFill/>
+          <a:ln w="12700">
+            <a:solidFill>
+              <a:prstClr val="black"/>
+            </a:solidFill>
+          </a:ln>
+        </p:spPr>
+        <p:txBody>
+          <a:bodyPr vert="horz" lIns="91440" tIns="45720" rIns="91440" bIns="45720" rtlCol="0" anchor="ctr"/>
+          <a:lstStyle/>
+          <a:p>
+            <a:endParaRPr lang="en-GB"/>
+          </a:p>
+        </p:txBody>
+      </p:sp>
+      <p:sp>
+        <p:nvSpPr>
+          <p:cNvPr id="5" name="Notes Placeholder 4"/>
+          <p:cNvSpPr>
+            <a:spLocks noGrp="1"/>
+          </p:cNvSpPr>
+          <p:nvPr>
+            <p:ph type="body" sz="quarter" idx="3"/>
+          </p:nvPr>
+        </p:nvSpPr>
+        <p:spPr>
+          <a:xfrm>
+            <a:off x="685800" y="4400550"/>
+            <a:ext cx="5486400" cy="3600450"/>
+          </a:xfrm>
+          <a:prstGeom prst="rect">
+            <a:avLst/>
+          </a:prstGeom>
+        </p:spPr>
+        <p:txBody>
+          <a:bodyPr vert="horz" lIns="91440" tIns="45720" rIns="91440" bIns="45720" rtlCol="0"/>
+          <a:lstStyle/>
+          <a:p>
+            <a:pPr lvl="0"/>
+            <a:r>
+              <a:rPr lang="en-US"/>
+              <a:t>Click to edit Master text styles</a:t>
+            </a:r>
+          </a:p>
+          <a:p>
+            <a:pPr lvl="1"/>
+            <a:r>
+              <a:rPr lang="en-US"/>
+              <a:t>Second level</a:t>
+            </a:r>
+          </a:p>
+          <a:p>
+            <a:pPr lvl="2"/>
+            <a:r>
+              <a:rPr lang="en-US"/>
+              <a:t>Third level</a:t>
+            </a:r>
+          </a:p>
+          <a:p>
+            <a:pPr lvl="3"/>
+            <a:r>
+              <a:rPr lang="en-US"/>
+              <a:t>Fourth level</a:t>
+            </a:r>
+          </a:p>
+          <a:p>
+            <a:pPr lvl="4"/>
+            <a:r>
+              <a:rPr lang="en-US"/>
+              <a:t>Fifth level</a:t>
+            </a:r>
+            <a:endParaRPr lang="en-GB"/>
+          </a:p>
+        </p:txBody>
+      </p:sp>
+      <p:sp>
+        <p:nvSpPr>
+          <p:cNvPr id="6" name="Footer Placeholder 5"/>
+          <p:cNvSpPr>
+            <a:spLocks noGrp="1"/>
+          </p:cNvSpPr>
+          <p:nvPr>
+            <p:ph type="ftr" sz="quarter" idx="4"/>
+          </p:nvPr>
+        </p:nvSpPr>
+        <p:spPr>
+          <a:xfrm>
+            <a:off x="0" y="8685213"/>
+            <a:ext cx="2971800" cy="458787"/>
+          </a:xfrm>
+          <a:prstGeom prst="rect">
+            <a:avLst/>
+          </a:prstGeom>
+        </p:spPr>
+        <p:txBody>
+          <a:bodyPr vert="horz" lIns="91440" tIns="45720" rIns="91440" bIns="45720" rtlCol="0" anchor="b"/>
+          <a:lstStyle>
+            <a:lvl1pPr algn="l">
+              <a:defRPr sz="1200"/>
+            </a:lvl1pPr>
+          </a:lstStyle>
+          <a:p>
+            <a:endParaRPr lang="en-GB"/>
+          </a:p>
+        </p:txBody>
+      </p:sp>
+      <p:sp>
+        <p:nvSpPr>
+          <p:cNvPr id="7" name="Slide Number Placeholder 6"/>
+          <p:cNvSpPr>
+            <a:spLocks noGrp="1"/>
+          </p:cNvSpPr>
+          <p:nvPr>
+            <p:ph type="sldNum" sz="quarter" idx="5"/>
+          </p:nvPr>
+        </p:nvSpPr>
+        <p:spPr>
+          <a:xfrm>
+            <a:off x="3884613" y="8685213"/>
+            <a:ext cx="2971800" cy="458787"/>
+          </a:xfrm>
+          <a:prstGeom prst="rect">
+            <a:avLst/>
+          </a:prstGeom>
+        </p:spPr>
+        <p:txBody>
+          <a:bodyPr vert="horz" lIns="91440" tIns="45720" rIns="91440" bIns="45720" rtlCol="0" anchor="b"/>
+          <a:lstStyle>
+            <a:lvl1pPr algn="r">
+              <a:defRPr sz="1200"/>
+            </a:lvl1pPr>
+          </a:lstStyle>
+          <a:p>
+            <a:fld id="{17F0C152-9A07-464A-AE12-CF5EFA87AB0C}" type="slidenum">
+              <a:rPr lang="en-GB" smtClean="0"/>
+              <a:t>‹#›</a:t>
+            </a:fld>
+            <a:endParaRPr lang="en-GB"/>
+          </a:p>
+        </p:txBody>
+      </p:sp>
+    </p:spTree>
+    <p:extLst>
+      <p:ext uri="{BB962C8B-B14F-4D97-AF65-F5344CB8AC3E}">
+        <p14:creationId xmlns:p14="http://schemas.microsoft.com/office/powerpoint/2010/main" val="3277629856"/>
+      </p:ext>
+    </p:extLst>
+  </p:cSld>
+  <p:clrMap bg1="lt1" tx1="dk1" bg2="lt2" tx2="dk2" accent1="accent1" accent2="accent2" accent3="accent3" accent4="accent4" accent5="accent5" accent6="accent6" hlink="hlink" folHlink="folHlink"/>
+  <p:notesStyle>
+    <a:lvl1pPr marL="0" algn="l" defTabSz="914400" rtl="0" eaLnBrk="1" latinLnBrk="0" hangingPunct="1">
+      <a:defRPr sz="1200" kern="1200">
+        <a:solidFill>
+          <a:schemeClr val="tx1"/>
+        </a:solidFill>
+        <a:latin typeface="+mn-lt"/>
+        <a:ea typeface="+mn-ea"/>
+        <a:cs typeface="+mn-cs"/>
+      </a:defRPr>
+    </a:lvl1pPr>
+    <a:lvl2pPr marL="457200" algn="l" defTabSz="914400" rtl="0" eaLnBrk="1" latinLnBrk="0" hangingPunct="1">
+      <a:defRPr sz="1200" kern="1200">
+        <a:solidFill>
+          <a:schemeClr val="tx1"/>
+        </a:solidFill>
+        <a:latin typeface="+mn-lt"/>
+        <a:ea typeface="+mn-ea"/>
+        <a:cs typeface="+mn-cs"/>
+      </a:defRPr>
+    </a:lvl2pPr>
+    <a:lvl3pPr marL="914400" algn="l" defTabSz="914400" rtl="0" eaLnBrk="1" latinLnBrk="0" hangingPunct="1">
+      <a:defRPr sz="1200" kern="1200">
+        <a:solidFill>
+          <a:schemeClr val="tx1"/>
+        </a:solidFill>
+        <a:latin typeface="+mn-lt"/>
+        <a:ea typeface="+mn-ea"/>
+        <a:cs typeface="+mn-cs"/>
+      </a:defRPr>
+    </a:lvl3pPr>
+    <a:lvl4pPr marL="1371600" algn="l" defTabSz="914400" rtl="0" eaLnBrk="1" latinLnBrk="0" hangingPunct="1">
+      <a:defRPr sz="1200" kern="1200">
+        <a:solidFill>
+          <a:schemeClr val="tx1"/>
+        </a:solidFill>
+        <a:latin typeface="+mn-lt"/>
+        <a:ea typeface="+mn-ea"/>
+        <a:cs typeface="+mn-cs"/>
+      </a:defRPr>
+    </a:lvl4pPr>
+    <a:lvl5pPr marL="1828800" algn="l" defTabSz="914400" rtl="0" eaLnBrk="1" latinLnBrk="0" hangingPunct="1">
+      <a:defRPr sz="1200" kern="1200">
+        <a:solidFill>
+          <a:schemeClr val="tx1"/>
+        </a:solidFill>
+        <a:latin typeface="+mn-lt"/>
+        <a:ea typeface="+mn-ea"/>
+        <a:cs typeface="+mn-cs"/>
+      </a:defRPr>
+    </a:lvl5pPr>
+    <a:lvl6pPr marL="2286000" algn="l" defTabSz="914400" rtl="0" eaLnBrk="1" latinLnBrk="0" hangingPunct="1">
+      <a:defRPr sz="1200" kern="1200">
+        <a:solidFill>
+          <a:schemeClr val="tx1"/>
+        </a:solidFill>
+        <a:latin typeface="+mn-lt"/>
+        <a:ea typeface="+mn-ea"/>
+        <a:cs typeface="+mn-cs"/>
+      </a:defRPr>
+    </a:lvl6pPr>
+    <a:lvl7pPr marL="2743200" algn="l" defTabSz="914400" rtl="0" eaLnBrk="1" latinLnBrk="0" hangingPunct="1">
+      <a:defRPr sz="1200" kern="1200">
+        <a:solidFill>
+          <a:schemeClr val="tx1"/>
+        </a:solidFill>
+        <a:latin typeface="+mn-lt"/>
+        <a:ea typeface="+mn-ea"/>
+        <a:cs typeface="+mn-cs"/>
+      </a:defRPr>
+    </a:lvl7pPr>
+    <a:lvl8pPr marL="3200400" algn="l" defTabSz="914400" rtl="0" eaLnBrk="1" latinLnBrk="0" hangingPunct="1">
+      <a:defRPr sz="1200" kern="1200">
+        <a:solidFill>
+          <a:schemeClr val="tx1"/>
+        </a:solidFill>
+        <a:latin typeface="+mn-lt"/>
+        <a:ea typeface="+mn-ea"/>
+        <a:cs typeface="+mn-cs"/>
+      </a:defRPr>
+    </a:lvl8pPr>
+    <a:lvl9pPr marL="3657600" algn="l" defTabSz="914400" rtl="0" eaLnBrk="1" latinLnBrk="0" hangingPunct="1">
+      <a:defRPr sz="1200" kern="1200">
+        <a:solidFill>
+          <a:schemeClr val="tx1"/>
+        </a:solidFill>
+        <a:latin typeface="+mn-lt"/>
+        <a:ea typeface="+mn-ea"/>
+        <a:cs typeface="+mn-cs"/>
+      </a:defRPr>
+    </a:lvl9pPr>
+  </p:notesStyle>
+</p:notesMaster>
+</file>
+
+<file path=ppt/notesSlides/notesSlide1.xml><?xml version="1.0" encoding="utf-8"?>
+<p:notes xmlns:a="http://schemas.openxmlformats.org/drawingml/2006/main" xmlns:r="http://schemas.openxmlformats.org/officeDocument/2006/relationships" xmlns:p="http://schemas.openxmlformats.org/presentationml/2006/main">
+  <p:cSld>
+    <p:spTree>
+      <p:nvGrpSpPr>
+        <p:cNvPr id="1" name=""/>
+        <p:cNvGrpSpPr/>
+        <p:nvPr/>
+      </p:nvGrpSpPr>
+      <p:grpSpPr>
+        <a:xfrm>
+          <a:off x="0" y="0"/>
+          <a:ext cx="0" cy="0"/>
+          <a:chOff x="0" y="0"/>
+          <a:chExt cx="0" cy="0"/>
+        </a:xfrm>
+      </p:grpSpPr>
+      <p:sp>
+        <p:nvSpPr>
+          <p:cNvPr id="2" name="Slide Image Placeholder 1"/>
+          <p:cNvSpPr>
+            <a:spLocks noGrp="1" noRot="1" noChangeAspect="1"/>
+          </p:cNvSpPr>
+          <p:nvPr>
+            <p:ph type="sldImg"/>
+          </p:nvPr>
+        </p:nvSpPr>
+        <p:spPr/>
+      </p:sp>
+      <p:sp>
+        <p:nvSpPr>
+          <p:cNvPr id="3" name="Notes Placeholder 2"/>
+          <p:cNvSpPr>
+            <a:spLocks noGrp="1"/>
+          </p:cNvSpPr>
+          <p:nvPr>
+            <p:ph type="body" idx="1"/>
+          </p:nvPr>
+        </p:nvSpPr>
+        <p:spPr/>
+        <p:txBody>
+          <a:bodyPr/>
+          <a:lstStyle/>
+          <a:p>
+            <a:endParaRPr lang="en-GB" dirty="0"/>
+          </a:p>
+        </p:txBody>
+      </p:sp>
+      <p:sp>
+        <p:nvSpPr>
+          <p:cNvPr id="4" name="Slide Number Placeholder 3"/>
+          <p:cNvSpPr>
+            <a:spLocks noGrp="1"/>
+          </p:cNvSpPr>
+          <p:nvPr>
+            <p:ph type="sldNum" sz="quarter" idx="5"/>
+          </p:nvPr>
+        </p:nvSpPr>
+        <p:spPr/>
+        <p:txBody>
+          <a:bodyPr/>
+          <a:lstStyle/>
+          <a:p>
+            <a:fld id="{17F0C152-9A07-464A-AE12-CF5EFA87AB0C}" type="slidenum">
+              <a:rPr lang="en-GB" smtClean="0"/>
+              <a:t>10</a:t>
+            </a:fld>
+            <a:endParaRPr lang="en-GB"/>
+          </a:p>
+        </p:txBody>
+      </p:sp>
+    </p:spTree>
+    <p:extLst>
+      <p:ext uri="{BB962C8B-B14F-4D97-AF65-F5344CB8AC3E}">
+        <p14:creationId xmlns:p14="http://schemas.microsoft.com/office/powerpoint/2010/main" val="3484136999"/>
+      </p:ext>
+    </p:extLst>
+  </p:cSld>
+  <p:clrMapOvr>
+    <a:masterClrMapping/>
+  </p:clrMapOvr>
+</p:notes>
 </file>
 
 <file path=ppt/slideLayouts/slideLayout1.xml><?xml version="1.0" encoding="utf-8"?>
@@ -683,7 +1542,7 @@
           <a:p>
             <a:fld id="{E69854C0-639F-4D5F-B4A0-F31CC4856932}" type="datetimeFigureOut">
               <a:rPr lang="en-GB" smtClean="0"/>
-              <a:t>26/04/2025</a:t>
+              <a:t>24/06/2025</a:t>
             </a:fld>
             <a:endParaRPr lang="en-GB"/>
           </a:p>
@@ -883,7 +1742,7 @@
           <a:p>
             <a:fld id="{E69854C0-639F-4D5F-B4A0-F31CC4856932}" type="datetimeFigureOut">
               <a:rPr lang="en-GB" smtClean="0"/>
-              <a:t>26/04/2025</a:t>
+              <a:t>24/06/2025</a:t>
             </a:fld>
             <a:endParaRPr lang="en-GB"/>
           </a:p>
@@ -1093,7 +1952,7 @@
           <a:p>
             <a:fld id="{E69854C0-639F-4D5F-B4A0-F31CC4856932}" type="datetimeFigureOut">
               <a:rPr lang="en-GB" smtClean="0"/>
-              <a:t>26/04/2025</a:t>
+              <a:t>24/06/2025</a:t>
             </a:fld>
             <a:endParaRPr lang="en-GB"/>
           </a:p>
@@ -1293,7 +2152,7 @@
           <a:p>
             <a:fld id="{E69854C0-639F-4D5F-B4A0-F31CC4856932}" type="datetimeFigureOut">
               <a:rPr lang="en-GB" smtClean="0"/>
-              <a:t>26/04/2025</a:t>
+              <a:t>24/06/2025</a:t>
             </a:fld>
             <a:endParaRPr lang="en-GB"/>
           </a:p>
@@ -1569,7 +2428,7 @@
           <a:p>
             <a:fld id="{E69854C0-639F-4D5F-B4A0-F31CC4856932}" type="datetimeFigureOut">
               <a:rPr lang="en-GB" smtClean="0"/>
-              <a:t>26/04/2025</a:t>
+              <a:t>24/06/2025</a:t>
             </a:fld>
             <a:endParaRPr lang="en-GB"/>
           </a:p>
@@ -1837,7 +2696,7 @@
           <a:p>
             <a:fld id="{E69854C0-639F-4D5F-B4A0-F31CC4856932}" type="datetimeFigureOut">
               <a:rPr lang="en-GB" smtClean="0"/>
-              <a:t>26/04/2025</a:t>
+              <a:t>24/06/2025</a:t>
             </a:fld>
             <a:endParaRPr lang="en-GB"/>
           </a:p>
@@ -2252,7 +3111,7 @@
           <a:p>
             <a:fld id="{E69854C0-639F-4D5F-B4A0-F31CC4856932}" type="datetimeFigureOut">
               <a:rPr lang="en-GB" smtClean="0"/>
-              <a:t>26/04/2025</a:t>
+              <a:t>24/06/2025</a:t>
             </a:fld>
             <a:endParaRPr lang="en-GB"/>
           </a:p>
@@ -2394,7 +3253,7 @@
           <a:p>
             <a:fld id="{E69854C0-639F-4D5F-B4A0-F31CC4856932}" type="datetimeFigureOut">
               <a:rPr lang="en-GB" smtClean="0"/>
-              <a:t>26/04/2025</a:t>
+              <a:t>24/06/2025</a:t>
             </a:fld>
             <a:endParaRPr lang="en-GB"/>
           </a:p>
@@ -2507,7 +3366,7 @@
           <a:p>
             <a:fld id="{E69854C0-639F-4D5F-B4A0-F31CC4856932}" type="datetimeFigureOut">
               <a:rPr lang="en-GB" smtClean="0"/>
-              <a:t>26/04/2025</a:t>
+              <a:t>24/06/2025</a:t>
             </a:fld>
             <a:endParaRPr lang="en-GB"/>
           </a:p>
@@ -2820,7 +3679,7 @@
           <a:p>
             <a:fld id="{E69854C0-639F-4D5F-B4A0-F31CC4856932}" type="datetimeFigureOut">
               <a:rPr lang="en-GB" smtClean="0"/>
-              <a:t>26/04/2025</a:t>
+              <a:t>24/06/2025</a:t>
             </a:fld>
             <a:endParaRPr lang="en-GB"/>
           </a:p>
@@ -3109,7 +3968,7 @@
           <a:p>
             <a:fld id="{E69854C0-639F-4D5F-B4A0-F31CC4856932}" type="datetimeFigureOut">
               <a:rPr lang="en-GB" smtClean="0"/>
-              <a:t>26/04/2025</a:t>
+              <a:t>24/06/2025</a:t>
             </a:fld>
             <a:endParaRPr lang="en-GB"/>
           </a:p>
@@ -3352,7 +4211,7 @@
           <a:p>
             <a:fld id="{E69854C0-639F-4D5F-B4A0-F31CC4856932}" type="datetimeFigureOut">
               <a:rPr lang="en-GB" smtClean="0"/>
-              <a:t>26/04/2025</a:t>
+              <a:t>24/06/2025</a:t>
             </a:fld>
             <a:endParaRPr lang="en-GB"/>
           </a:p>
@@ -3842,6 +4701,830 @@
 </p:sld>
 </file>
 
+<file path=ppt/slides/slide10.xml><?xml version="1.0" encoding="utf-8"?>
+<p:sld xmlns:a="http://schemas.openxmlformats.org/drawingml/2006/main" xmlns:r="http://schemas.openxmlformats.org/officeDocument/2006/relationships" xmlns:p="http://schemas.openxmlformats.org/presentationml/2006/main">
+  <p:cSld>
+    <p:spTree>
+      <p:nvGrpSpPr>
+        <p:cNvPr id="1" name=""/>
+        <p:cNvGrpSpPr/>
+        <p:nvPr/>
+      </p:nvGrpSpPr>
+      <p:grpSpPr>
+        <a:xfrm>
+          <a:off x="0" y="0"/>
+          <a:ext cx="0" cy="0"/>
+          <a:chOff x="0" y="0"/>
+          <a:chExt cx="0" cy="0"/>
+        </a:xfrm>
+      </p:grpSpPr>
+      <p:pic>
+        <p:nvPicPr>
+          <p:cNvPr id="5" name="Picture 4">
+            <a:extLst>
+              <a:ext uri="{FF2B5EF4-FFF2-40B4-BE49-F238E27FC236}">
+                <a16:creationId xmlns:a16="http://schemas.microsoft.com/office/drawing/2014/main" id="{B56DAA8B-146D-C657-DAA8-ED520BEA6D06}"/>
+              </a:ext>
+            </a:extLst>
+          </p:cNvPr>
+          <p:cNvPicPr>
+            <a:picLocks noChangeAspect="1"/>
+          </p:cNvPicPr>
+          <p:nvPr/>
+        </p:nvPicPr>
+        <p:blipFill>
+          <a:blip r:embed="rId3"/>
+          <a:stretch>
+            <a:fillRect/>
+          </a:stretch>
+        </p:blipFill>
+        <p:spPr>
+          <a:xfrm>
+            <a:off x="0" y="170065"/>
+            <a:ext cx="12192000" cy="6517869"/>
+          </a:xfrm>
+          <a:prstGeom prst="rect">
+            <a:avLst/>
+          </a:prstGeom>
+        </p:spPr>
+      </p:pic>
+      <p:sp>
+        <p:nvSpPr>
+          <p:cNvPr id="6" name="Rectangle 5">
+            <a:extLst>
+              <a:ext uri="{FF2B5EF4-FFF2-40B4-BE49-F238E27FC236}">
+                <a16:creationId xmlns:a16="http://schemas.microsoft.com/office/drawing/2014/main" id="{9D90D4D1-BDE6-90FA-77BC-2F46F508AB7D}"/>
+              </a:ext>
+            </a:extLst>
+          </p:cNvPr>
+          <p:cNvSpPr/>
+          <p:nvPr/>
+        </p:nvSpPr>
+        <p:spPr>
+          <a:xfrm>
+            <a:off x="1788273" y="5966901"/>
+            <a:ext cx="1260181" cy="245889"/>
+          </a:xfrm>
+          <a:prstGeom prst="rect">
+            <a:avLst/>
+          </a:prstGeom>
+          <a:noFill/>
+          <a:ln w="28575">
+            <a:solidFill>
+              <a:srgbClr val="C00000"/>
+            </a:solidFill>
+          </a:ln>
+        </p:spPr>
+        <p:style>
+          <a:lnRef idx="2">
+            <a:schemeClr val="accent1">
+              <a:shade val="15000"/>
+            </a:schemeClr>
+          </a:lnRef>
+          <a:fillRef idx="1">
+            <a:schemeClr val="accent1"/>
+          </a:fillRef>
+          <a:effectRef idx="0">
+            <a:schemeClr val="accent1"/>
+          </a:effectRef>
+          <a:fontRef idx="minor">
+            <a:schemeClr val="lt1"/>
+          </a:fontRef>
+        </p:style>
+        <p:txBody>
+          <a:bodyPr rtlCol="0" anchor="ctr"/>
+          <a:lstStyle/>
+          <a:p>
+            <a:pPr algn="ctr"/>
+            <a:endParaRPr lang="en-GB"/>
+          </a:p>
+        </p:txBody>
+      </p:sp>
+      <p:sp>
+        <p:nvSpPr>
+          <p:cNvPr id="7" name="TextBox 6">
+            <a:extLst>
+              <a:ext uri="{FF2B5EF4-FFF2-40B4-BE49-F238E27FC236}">
+                <a16:creationId xmlns:a16="http://schemas.microsoft.com/office/drawing/2014/main" id="{AB94B683-2A1F-2365-9996-E63CE7350C1D}"/>
+              </a:ext>
+            </a:extLst>
+          </p:cNvPr>
+          <p:cNvSpPr txBox="1"/>
+          <p:nvPr/>
+        </p:nvSpPr>
+        <p:spPr>
+          <a:xfrm>
+            <a:off x="3048454" y="5914618"/>
+            <a:ext cx="1806905" cy="369332"/>
+          </a:xfrm>
+          <a:prstGeom prst="rect">
+            <a:avLst/>
+          </a:prstGeom>
+          <a:noFill/>
+        </p:spPr>
+        <p:txBody>
+          <a:bodyPr wrap="none" rtlCol="0">
+            <a:spAutoFit/>
+          </a:bodyPr>
+          <a:lstStyle/>
+          <a:p>
+            <a:r>
+              <a:rPr lang="en-GB" dirty="0">
+                <a:solidFill>
+                  <a:srgbClr val="C00000"/>
+                </a:solidFill>
+              </a:rPr>
+              <a:t>Command input</a:t>
+            </a:r>
+          </a:p>
+        </p:txBody>
+      </p:sp>
+      <p:sp>
+        <p:nvSpPr>
+          <p:cNvPr id="8" name="Rectangle 7">
+            <a:extLst>
+              <a:ext uri="{FF2B5EF4-FFF2-40B4-BE49-F238E27FC236}">
+                <a16:creationId xmlns:a16="http://schemas.microsoft.com/office/drawing/2014/main" id="{A113E5C6-C329-7CE1-9849-510FCC024B51}"/>
+              </a:ext>
+            </a:extLst>
+          </p:cNvPr>
+          <p:cNvSpPr/>
+          <p:nvPr/>
+        </p:nvSpPr>
+        <p:spPr>
+          <a:xfrm>
+            <a:off x="71412" y="6161005"/>
+            <a:ext cx="1260181" cy="245889"/>
+          </a:xfrm>
+          <a:prstGeom prst="rect">
+            <a:avLst/>
+          </a:prstGeom>
+          <a:noFill/>
+          <a:ln w="28575">
+            <a:solidFill>
+              <a:srgbClr val="C00000"/>
+            </a:solidFill>
+          </a:ln>
+        </p:spPr>
+        <p:style>
+          <a:lnRef idx="2">
+            <a:schemeClr val="accent1">
+              <a:shade val="15000"/>
+            </a:schemeClr>
+          </a:lnRef>
+          <a:fillRef idx="1">
+            <a:schemeClr val="accent1"/>
+          </a:fillRef>
+          <a:effectRef idx="0">
+            <a:schemeClr val="accent1"/>
+          </a:effectRef>
+          <a:fontRef idx="minor">
+            <a:schemeClr val="lt1"/>
+          </a:fontRef>
+        </p:style>
+        <p:txBody>
+          <a:bodyPr rtlCol="0" anchor="ctr"/>
+          <a:lstStyle/>
+          <a:p>
+            <a:pPr algn="ctr"/>
+            <a:endParaRPr lang="en-GB"/>
+          </a:p>
+        </p:txBody>
+      </p:sp>
+      <p:sp>
+        <p:nvSpPr>
+          <p:cNvPr id="9" name="TextBox 8">
+            <a:extLst>
+              <a:ext uri="{FF2B5EF4-FFF2-40B4-BE49-F238E27FC236}">
+                <a16:creationId xmlns:a16="http://schemas.microsoft.com/office/drawing/2014/main" id="{F1F61FC9-7CB5-B2C5-1429-263324F52E57}"/>
+              </a:ext>
+            </a:extLst>
+          </p:cNvPr>
+          <p:cNvSpPr txBox="1"/>
+          <p:nvPr/>
+        </p:nvSpPr>
+        <p:spPr>
+          <a:xfrm>
+            <a:off x="1331593" y="6116610"/>
+            <a:ext cx="1955985" cy="369332"/>
+          </a:xfrm>
+          <a:prstGeom prst="rect">
+            <a:avLst/>
+          </a:prstGeom>
+          <a:noFill/>
+        </p:spPr>
+        <p:txBody>
+          <a:bodyPr wrap="none" rtlCol="0">
+            <a:spAutoFit/>
+          </a:bodyPr>
+          <a:lstStyle/>
+          <a:p>
+            <a:r>
+              <a:rPr lang="en-GB" dirty="0">
+                <a:solidFill>
+                  <a:srgbClr val="C00000"/>
+                </a:solidFill>
+              </a:rPr>
+              <a:t>Command output</a:t>
+            </a:r>
+          </a:p>
+        </p:txBody>
+      </p:sp>
+    </p:spTree>
+    <p:extLst>
+      <p:ext uri="{BB962C8B-B14F-4D97-AF65-F5344CB8AC3E}">
+        <p14:creationId xmlns:p14="http://schemas.microsoft.com/office/powerpoint/2010/main" val="1089121650"/>
+      </p:ext>
+    </p:extLst>
+  </p:cSld>
+  <p:clrMapOvr>
+    <a:masterClrMapping/>
+  </p:clrMapOvr>
+</p:sld>
+</file>
+
+<file path=ppt/slides/slide11.xml><?xml version="1.0" encoding="utf-8"?>
+<p:sld xmlns:a="http://schemas.openxmlformats.org/drawingml/2006/main" xmlns:r="http://schemas.openxmlformats.org/officeDocument/2006/relationships" xmlns:p="http://schemas.openxmlformats.org/presentationml/2006/main">
+  <p:cSld>
+    <p:spTree>
+      <p:nvGrpSpPr>
+        <p:cNvPr id="1" name=""/>
+        <p:cNvGrpSpPr/>
+        <p:nvPr/>
+      </p:nvGrpSpPr>
+      <p:grpSpPr>
+        <a:xfrm>
+          <a:off x="0" y="0"/>
+          <a:ext cx="0" cy="0"/>
+          <a:chOff x="0" y="0"/>
+          <a:chExt cx="0" cy="0"/>
+        </a:xfrm>
+      </p:grpSpPr>
+      <p:pic>
+        <p:nvPicPr>
+          <p:cNvPr id="7" name="Picture 6" descr="A screenshot of a computer&#10;&#10;AI-generated content may be incorrect.">
+            <a:extLst>
+              <a:ext uri="{FF2B5EF4-FFF2-40B4-BE49-F238E27FC236}">
+                <a16:creationId xmlns:a16="http://schemas.microsoft.com/office/drawing/2014/main" id="{F26628ED-C9FD-A57F-4908-522DB59F51E7}"/>
+              </a:ext>
+            </a:extLst>
+          </p:cNvPr>
+          <p:cNvPicPr>
+            <a:picLocks noChangeAspect="1"/>
+          </p:cNvPicPr>
+          <p:nvPr/>
+        </p:nvPicPr>
+        <p:blipFill>
+          <a:blip r:embed="rId2">
+            <a:extLst>
+              <a:ext uri="{28A0092B-C50C-407E-A947-70E740481C1C}">
+                <a14:useLocalDpi xmlns:a14="http://schemas.microsoft.com/office/drawing/2010/main" val="0"/>
+              </a:ext>
+            </a:extLst>
+          </a:blip>
+          <a:srcRect l="4742" t="7198" b="35103"/>
+          <a:stretch>
+            <a:fillRect/>
+          </a:stretch>
+        </p:blipFill>
+        <p:spPr>
+          <a:xfrm>
+            <a:off x="0" y="331773"/>
+            <a:ext cx="12243890" cy="4944234"/>
+          </a:xfrm>
+          <a:prstGeom prst="rect">
+            <a:avLst/>
+          </a:prstGeom>
+        </p:spPr>
+      </p:pic>
+      <p:sp>
+        <p:nvSpPr>
+          <p:cNvPr id="8" name="Rectangle 7">
+            <a:extLst>
+              <a:ext uri="{FF2B5EF4-FFF2-40B4-BE49-F238E27FC236}">
+                <a16:creationId xmlns:a16="http://schemas.microsoft.com/office/drawing/2014/main" id="{5D34F374-FC68-9DCD-B2E4-8B02F19C56F5}"/>
+              </a:ext>
+            </a:extLst>
+          </p:cNvPr>
+          <p:cNvSpPr/>
+          <p:nvPr/>
+        </p:nvSpPr>
+        <p:spPr>
+          <a:xfrm>
+            <a:off x="1039543" y="4419287"/>
+            <a:ext cx="1647013" cy="403566"/>
+          </a:xfrm>
+          <a:prstGeom prst="rect">
+            <a:avLst/>
+          </a:prstGeom>
+          <a:solidFill>
+            <a:srgbClr val="0C0C0C"/>
+          </a:solidFill>
+          <a:ln w="28575">
+            <a:noFill/>
+          </a:ln>
+        </p:spPr>
+        <p:style>
+          <a:lnRef idx="2">
+            <a:schemeClr val="accent1">
+              <a:shade val="15000"/>
+            </a:schemeClr>
+          </a:lnRef>
+          <a:fillRef idx="1">
+            <a:schemeClr val="accent1"/>
+          </a:fillRef>
+          <a:effectRef idx="0">
+            <a:schemeClr val="accent1"/>
+          </a:effectRef>
+          <a:fontRef idx="minor">
+            <a:schemeClr val="lt1"/>
+          </a:fontRef>
+        </p:style>
+        <p:txBody>
+          <a:bodyPr rtlCol="0" anchor="ctr"/>
+          <a:lstStyle/>
+          <a:p>
+            <a:pPr algn="ctr"/>
+            <a:endParaRPr lang="en-GB"/>
+          </a:p>
+        </p:txBody>
+      </p:sp>
+      <p:sp>
+        <p:nvSpPr>
+          <p:cNvPr id="9" name="Rectangle 8">
+            <a:extLst>
+              <a:ext uri="{FF2B5EF4-FFF2-40B4-BE49-F238E27FC236}">
+                <a16:creationId xmlns:a16="http://schemas.microsoft.com/office/drawing/2014/main" id="{D643BEEF-7703-E84C-0F4B-53860067726B}"/>
+              </a:ext>
+            </a:extLst>
+          </p:cNvPr>
+          <p:cNvSpPr/>
+          <p:nvPr/>
+        </p:nvSpPr>
+        <p:spPr>
+          <a:xfrm>
+            <a:off x="1363991" y="3238331"/>
+            <a:ext cx="1260181" cy="245889"/>
+          </a:xfrm>
+          <a:prstGeom prst="rect">
+            <a:avLst/>
+          </a:prstGeom>
+          <a:noFill/>
+          <a:ln w="28575">
+            <a:solidFill>
+              <a:srgbClr val="C00000"/>
+            </a:solidFill>
+          </a:ln>
+        </p:spPr>
+        <p:style>
+          <a:lnRef idx="2">
+            <a:schemeClr val="accent1">
+              <a:shade val="15000"/>
+            </a:schemeClr>
+          </a:lnRef>
+          <a:fillRef idx="1">
+            <a:schemeClr val="accent1"/>
+          </a:fillRef>
+          <a:effectRef idx="0">
+            <a:schemeClr val="accent1"/>
+          </a:effectRef>
+          <a:fontRef idx="minor">
+            <a:schemeClr val="lt1"/>
+          </a:fontRef>
+        </p:style>
+        <p:txBody>
+          <a:bodyPr rtlCol="0" anchor="ctr"/>
+          <a:lstStyle/>
+          <a:p>
+            <a:pPr algn="ctr"/>
+            <a:endParaRPr lang="en-GB"/>
+          </a:p>
+        </p:txBody>
+      </p:sp>
+      <p:sp>
+        <p:nvSpPr>
+          <p:cNvPr id="10" name="TextBox 9">
+            <a:extLst>
+              <a:ext uri="{FF2B5EF4-FFF2-40B4-BE49-F238E27FC236}">
+                <a16:creationId xmlns:a16="http://schemas.microsoft.com/office/drawing/2014/main" id="{4662C1A9-9FF2-3977-91DA-75A6C14689C6}"/>
+              </a:ext>
+            </a:extLst>
+          </p:cNvPr>
+          <p:cNvSpPr txBox="1"/>
+          <p:nvPr/>
+        </p:nvSpPr>
+        <p:spPr>
+          <a:xfrm>
+            <a:off x="1280182" y="2933310"/>
+            <a:ext cx="1806905" cy="369332"/>
+          </a:xfrm>
+          <a:prstGeom prst="rect">
+            <a:avLst/>
+          </a:prstGeom>
+          <a:noFill/>
+        </p:spPr>
+        <p:txBody>
+          <a:bodyPr wrap="none" rtlCol="0">
+            <a:spAutoFit/>
+          </a:bodyPr>
+          <a:lstStyle/>
+          <a:p>
+            <a:r>
+              <a:rPr lang="en-GB" dirty="0">
+                <a:solidFill>
+                  <a:srgbClr val="C00000"/>
+                </a:solidFill>
+              </a:rPr>
+              <a:t>Command input</a:t>
+            </a:r>
+          </a:p>
+        </p:txBody>
+      </p:sp>
+      <p:sp>
+        <p:nvSpPr>
+          <p:cNvPr id="11" name="Rectangle 10">
+            <a:extLst>
+              <a:ext uri="{FF2B5EF4-FFF2-40B4-BE49-F238E27FC236}">
+                <a16:creationId xmlns:a16="http://schemas.microsoft.com/office/drawing/2014/main" id="{A889E33E-5D9C-07F0-AA42-BADECFCB97C8}"/>
+              </a:ext>
+            </a:extLst>
+          </p:cNvPr>
+          <p:cNvSpPr/>
+          <p:nvPr/>
+        </p:nvSpPr>
+        <p:spPr>
+          <a:xfrm>
+            <a:off x="26934" y="4114764"/>
+            <a:ext cx="7017604" cy="764474"/>
+          </a:xfrm>
+          <a:prstGeom prst="rect">
+            <a:avLst/>
+          </a:prstGeom>
+          <a:noFill/>
+          <a:ln w="28575">
+            <a:solidFill>
+              <a:srgbClr val="C00000"/>
+            </a:solidFill>
+          </a:ln>
+        </p:spPr>
+        <p:style>
+          <a:lnRef idx="2">
+            <a:schemeClr val="accent1">
+              <a:shade val="15000"/>
+            </a:schemeClr>
+          </a:lnRef>
+          <a:fillRef idx="1">
+            <a:schemeClr val="accent1"/>
+          </a:fillRef>
+          <a:effectRef idx="0">
+            <a:schemeClr val="accent1"/>
+          </a:effectRef>
+          <a:fontRef idx="minor">
+            <a:schemeClr val="lt1"/>
+          </a:fontRef>
+        </p:style>
+        <p:txBody>
+          <a:bodyPr rtlCol="0" anchor="ctr"/>
+          <a:lstStyle/>
+          <a:p>
+            <a:pPr algn="ctr"/>
+            <a:endParaRPr lang="en-GB"/>
+          </a:p>
+        </p:txBody>
+      </p:sp>
+      <p:sp>
+        <p:nvSpPr>
+          <p:cNvPr id="12" name="TextBox 11">
+            <a:extLst>
+              <a:ext uri="{FF2B5EF4-FFF2-40B4-BE49-F238E27FC236}">
+                <a16:creationId xmlns:a16="http://schemas.microsoft.com/office/drawing/2014/main" id="{AB4004CE-6101-1A40-ED68-E49D3739B72A}"/>
+              </a:ext>
+            </a:extLst>
+          </p:cNvPr>
+          <p:cNvSpPr txBox="1"/>
+          <p:nvPr/>
+        </p:nvSpPr>
+        <p:spPr>
+          <a:xfrm>
+            <a:off x="7071472" y="4312335"/>
+            <a:ext cx="1955985" cy="369332"/>
+          </a:xfrm>
+          <a:prstGeom prst="rect">
+            <a:avLst/>
+          </a:prstGeom>
+          <a:noFill/>
+        </p:spPr>
+        <p:txBody>
+          <a:bodyPr wrap="none" rtlCol="0">
+            <a:spAutoFit/>
+          </a:bodyPr>
+          <a:lstStyle/>
+          <a:p>
+            <a:r>
+              <a:rPr lang="en-GB" dirty="0">
+                <a:solidFill>
+                  <a:srgbClr val="C00000"/>
+                </a:solidFill>
+              </a:rPr>
+              <a:t>Command output</a:t>
+            </a:r>
+          </a:p>
+        </p:txBody>
+      </p:sp>
+      <p:sp>
+        <p:nvSpPr>
+          <p:cNvPr id="13" name="TextBox 12">
+            <a:extLst>
+              <a:ext uri="{FF2B5EF4-FFF2-40B4-BE49-F238E27FC236}">
+                <a16:creationId xmlns:a16="http://schemas.microsoft.com/office/drawing/2014/main" id="{57E5B07D-0012-4B83-3AC2-9E5E131D6E0E}"/>
+              </a:ext>
+            </a:extLst>
+          </p:cNvPr>
+          <p:cNvSpPr txBox="1"/>
+          <p:nvPr/>
+        </p:nvSpPr>
+        <p:spPr>
+          <a:xfrm>
+            <a:off x="6977279" y="1818229"/>
+            <a:ext cx="3340066" cy="646331"/>
+          </a:xfrm>
+          <a:prstGeom prst="rect">
+            <a:avLst/>
+          </a:prstGeom>
+          <a:noFill/>
+        </p:spPr>
+        <p:txBody>
+          <a:bodyPr wrap="square" rtlCol="0">
+            <a:spAutoFit/>
+          </a:bodyPr>
+          <a:lstStyle/>
+          <a:p>
+            <a:r>
+              <a:rPr lang="en-GB" dirty="0">
+                <a:solidFill>
+                  <a:srgbClr val="C00000"/>
+                </a:solidFill>
+              </a:rPr>
+              <a:t>Same files shown graphically in the File Explorer</a:t>
+            </a:r>
+          </a:p>
+        </p:txBody>
+      </p:sp>
+    </p:spTree>
+    <p:extLst>
+      <p:ext uri="{BB962C8B-B14F-4D97-AF65-F5344CB8AC3E}">
+        <p14:creationId xmlns:p14="http://schemas.microsoft.com/office/powerpoint/2010/main" val="2715702536"/>
+      </p:ext>
+    </p:extLst>
+  </p:cSld>
+  <p:clrMapOvr>
+    <a:masterClrMapping/>
+  </p:clrMapOvr>
+</p:sld>
+</file>
+
+<file path=ppt/slides/slide12.xml><?xml version="1.0" encoding="utf-8"?>
+<p:sld xmlns:a="http://schemas.openxmlformats.org/drawingml/2006/main" xmlns:r="http://schemas.openxmlformats.org/officeDocument/2006/relationships" xmlns:p="http://schemas.openxmlformats.org/presentationml/2006/main">
+  <p:cSld>
+    <p:spTree>
+      <p:nvGrpSpPr>
+        <p:cNvPr id="1" name=""/>
+        <p:cNvGrpSpPr/>
+        <p:nvPr/>
+      </p:nvGrpSpPr>
+      <p:grpSpPr>
+        <a:xfrm>
+          <a:off x="0" y="0"/>
+          <a:ext cx="0" cy="0"/>
+          <a:chOff x="0" y="0"/>
+          <a:chExt cx="0" cy="0"/>
+        </a:xfrm>
+      </p:grpSpPr>
+      <p:pic>
+        <p:nvPicPr>
+          <p:cNvPr id="5" name="Picture 4">
+            <a:extLst>
+              <a:ext uri="{FF2B5EF4-FFF2-40B4-BE49-F238E27FC236}">
+                <a16:creationId xmlns:a16="http://schemas.microsoft.com/office/drawing/2014/main" id="{12D82434-D5E0-433C-9957-1DCEACA6DAE2}"/>
+              </a:ext>
+            </a:extLst>
+          </p:cNvPr>
+          <p:cNvPicPr>
+            <a:picLocks noChangeAspect="1"/>
+          </p:cNvPicPr>
+          <p:nvPr/>
+        </p:nvPicPr>
+        <p:blipFill>
+          <a:blip r:embed="rId2"/>
+          <a:stretch>
+            <a:fillRect/>
+          </a:stretch>
+        </p:blipFill>
+        <p:spPr>
+          <a:xfrm>
+            <a:off x="0" y="170065"/>
+            <a:ext cx="12192000" cy="6517869"/>
+          </a:xfrm>
+          <a:prstGeom prst="rect">
+            <a:avLst/>
+          </a:prstGeom>
+        </p:spPr>
+      </p:pic>
+      <p:sp>
+        <p:nvSpPr>
+          <p:cNvPr id="6" name="Rectangle 5">
+            <a:extLst>
+              <a:ext uri="{FF2B5EF4-FFF2-40B4-BE49-F238E27FC236}">
+                <a16:creationId xmlns:a16="http://schemas.microsoft.com/office/drawing/2014/main" id="{D397DF99-B757-C2B3-4099-DEECF0171CB9}"/>
+              </a:ext>
+            </a:extLst>
+          </p:cNvPr>
+          <p:cNvSpPr/>
+          <p:nvPr/>
+        </p:nvSpPr>
+        <p:spPr>
+          <a:xfrm>
+            <a:off x="1769641" y="5933213"/>
+            <a:ext cx="1260181" cy="245889"/>
+          </a:xfrm>
+          <a:prstGeom prst="rect">
+            <a:avLst/>
+          </a:prstGeom>
+          <a:noFill/>
+          <a:ln w="28575">
+            <a:solidFill>
+              <a:srgbClr val="C00000"/>
+            </a:solidFill>
+          </a:ln>
+        </p:spPr>
+        <p:style>
+          <a:lnRef idx="2">
+            <a:schemeClr val="accent1">
+              <a:shade val="15000"/>
+            </a:schemeClr>
+          </a:lnRef>
+          <a:fillRef idx="1">
+            <a:schemeClr val="accent1"/>
+          </a:fillRef>
+          <a:effectRef idx="0">
+            <a:schemeClr val="accent1"/>
+          </a:effectRef>
+          <a:fontRef idx="minor">
+            <a:schemeClr val="lt1"/>
+          </a:fontRef>
+        </p:style>
+        <p:txBody>
+          <a:bodyPr rtlCol="0" anchor="ctr"/>
+          <a:lstStyle/>
+          <a:p>
+            <a:pPr algn="ctr"/>
+            <a:endParaRPr lang="en-GB"/>
+          </a:p>
+        </p:txBody>
+      </p:sp>
+      <p:sp>
+        <p:nvSpPr>
+          <p:cNvPr id="7" name="TextBox 6">
+            <a:extLst>
+              <a:ext uri="{FF2B5EF4-FFF2-40B4-BE49-F238E27FC236}">
+                <a16:creationId xmlns:a16="http://schemas.microsoft.com/office/drawing/2014/main" id="{2CEF40D7-D443-8056-F1B8-20C755729AFF}"/>
+              </a:ext>
+            </a:extLst>
+          </p:cNvPr>
+          <p:cNvSpPr txBox="1"/>
+          <p:nvPr/>
+        </p:nvSpPr>
+        <p:spPr>
+          <a:xfrm>
+            <a:off x="3029822" y="5798607"/>
+            <a:ext cx="1806905" cy="369332"/>
+          </a:xfrm>
+          <a:prstGeom prst="rect">
+            <a:avLst/>
+          </a:prstGeom>
+          <a:noFill/>
+        </p:spPr>
+        <p:txBody>
+          <a:bodyPr wrap="none" rtlCol="0">
+            <a:spAutoFit/>
+          </a:bodyPr>
+          <a:lstStyle/>
+          <a:p>
+            <a:r>
+              <a:rPr lang="en-GB" dirty="0">
+                <a:solidFill>
+                  <a:srgbClr val="C00000"/>
+                </a:solidFill>
+              </a:rPr>
+              <a:t>Command input</a:t>
+            </a:r>
+          </a:p>
+        </p:txBody>
+      </p:sp>
+      <p:sp>
+        <p:nvSpPr>
+          <p:cNvPr id="8" name="Rectangle 7">
+            <a:extLst>
+              <a:ext uri="{FF2B5EF4-FFF2-40B4-BE49-F238E27FC236}">
+                <a16:creationId xmlns:a16="http://schemas.microsoft.com/office/drawing/2014/main" id="{6C281ABB-FABF-3FD2-20BB-63C76EE7DAAD}"/>
+              </a:ext>
+            </a:extLst>
+          </p:cNvPr>
+          <p:cNvSpPr/>
+          <p:nvPr/>
+        </p:nvSpPr>
+        <p:spPr>
+          <a:xfrm>
+            <a:off x="71412" y="6161005"/>
+            <a:ext cx="6539781" cy="245889"/>
+          </a:xfrm>
+          <a:prstGeom prst="rect">
+            <a:avLst/>
+          </a:prstGeom>
+          <a:noFill/>
+          <a:ln w="28575">
+            <a:solidFill>
+              <a:srgbClr val="C00000"/>
+            </a:solidFill>
+          </a:ln>
+        </p:spPr>
+        <p:style>
+          <a:lnRef idx="2">
+            <a:schemeClr val="accent1">
+              <a:shade val="15000"/>
+            </a:schemeClr>
+          </a:lnRef>
+          <a:fillRef idx="1">
+            <a:schemeClr val="accent1"/>
+          </a:fillRef>
+          <a:effectRef idx="0">
+            <a:schemeClr val="accent1"/>
+          </a:effectRef>
+          <a:fontRef idx="minor">
+            <a:schemeClr val="lt1"/>
+          </a:fontRef>
+        </p:style>
+        <p:txBody>
+          <a:bodyPr rtlCol="0" anchor="ctr"/>
+          <a:lstStyle/>
+          <a:p>
+            <a:pPr algn="ctr"/>
+            <a:endParaRPr lang="en-GB"/>
+          </a:p>
+        </p:txBody>
+      </p:sp>
+      <p:sp>
+        <p:nvSpPr>
+          <p:cNvPr id="9" name="TextBox 8">
+            <a:extLst>
+              <a:ext uri="{FF2B5EF4-FFF2-40B4-BE49-F238E27FC236}">
+                <a16:creationId xmlns:a16="http://schemas.microsoft.com/office/drawing/2014/main" id="{B9031CE3-349B-3556-9D18-32BD5B9EEE52}"/>
+              </a:ext>
+            </a:extLst>
+          </p:cNvPr>
+          <p:cNvSpPr txBox="1"/>
+          <p:nvPr/>
+        </p:nvSpPr>
+        <p:spPr>
+          <a:xfrm>
+            <a:off x="6611193" y="6099283"/>
+            <a:ext cx="1955985" cy="369332"/>
+          </a:xfrm>
+          <a:prstGeom prst="rect">
+            <a:avLst/>
+          </a:prstGeom>
+          <a:noFill/>
+        </p:spPr>
+        <p:txBody>
+          <a:bodyPr wrap="none" rtlCol="0">
+            <a:spAutoFit/>
+          </a:bodyPr>
+          <a:lstStyle/>
+          <a:p>
+            <a:r>
+              <a:rPr lang="en-GB" dirty="0">
+                <a:solidFill>
+                  <a:srgbClr val="C00000"/>
+                </a:solidFill>
+              </a:rPr>
+              <a:t>Command output</a:t>
+            </a:r>
+          </a:p>
+        </p:txBody>
+      </p:sp>
+    </p:spTree>
+    <p:extLst>
+      <p:ext uri="{BB962C8B-B14F-4D97-AF65-F5344CB8AC3E}">
+        <p14:creationId xmlns:p14="http://schemas.microsoft.com/office/powerpoint/2010/main" val="2381781374"/>
+      </p:ext>
+    </p:extLst>
+  </p:cSld>
+  <p:clrMapOvr>
+    <a:masterClrMapping/>
+  </p:clrMapOvr>
+</p:sld>
+</file>
+
 <file path=ppt/slides/slide2.xml><?xml version="1.0" encoding="utf-8"?>
 <p:sld xmlns:a="http://schemas.openxmlformats.org/drawingml/2006/main" xmlns:r="http://schemas.openxmlformats.org/officeDocument/2006/relationships" xmlns:p="http://schemas.openxmlformats.org/presentationml/2006/main">
   <p:cSld>
@@ -5279,6 +6962,162 @@
           </a:prstGeom>
         </p:spPr>
       </p:pic>
+      <p:sp>
+        <p:nvSpPr>
+          <p:cNvPr id="2" name="Rectangle 1">
+            <a:extLst>
+              <a:ext uri="{FF2B5EF4-FFF2-40B4-BE49-F238E27FC236}">
+                <a16:creationId xmlns:a16="http://schemas.microsoft.com/office/drawing/2014/main" id="{1DADA7B5-1CA5-1FDB-A67C-59B3C3D81B0E}"/>
+              </a:ext>
+            </a:extLst>
+          </p:cNvPr>
+          <p:cNvSpPr/>
+          <p:nvPr/>
+        </p:nvSpPr>
+        <p:spPr>
+          <a:xfrm>
+            <a:off x="1111972" y="1990349"/>
+            <a:ext cx="1367881" cy="270048"/>
+          </a:xfrm>
+          <a:prstGeom prst="rect">
+            <a:avLst/>
+          </a:prstGeom>
+          <a:noFill/>
+          <a:ln w="28575">
+            <a:solidFill>
+              <a:srgbClr val="C00000"/>
+            </a:solidFill>
+          </a:ln>
+        </p:spPr>
+        <p:style>
+          <a:lnRef idx="2">
+            <a:schemeClr val="accent1">
+              <a:shade val="15000"/>
+            </a:schemeClr>
+          </a:lnRef>
+          <a:fillRef idx="1">
+            <a:schemeClr val="accent1"/>
+          </a:fillRef>
+          <a:effectRef idx="0">
+            <a:schemeClr val="accent1"/>
+          </a:effectRef>
+          <a:fontRef idx="minor">
+            <a:schemeClr val="lt1"/>
+          </a:fontRef>
+        </p:style>
+        <p:txBody>
+          <a:bodyPr rtlCol="0" anchor="ctr"/>
+          <a:lstStyle/>
+          <a:p>
+            <a:pPr algn="ctr"/>
+            <a:endParaRPr lang="en-GB"/>
+          </a:p>
+        </p:txBody>
+      </p:sp>
+      <p:sp>
+        <p:nvSpPr>
+          <p:cNvPr id="3" name="Rectangle 2">
+            <a:extLst>
+              <a:ext uri="{FF2B5EF4-FFF2-40B4-BE49-F238E27FC236}">
+                <a16:creationId xmlns:a16="http://schemas.microsoft.com/office/drawing/2014/main" id="{218A5E3C-3CC1-22F7-4BCD-8FD3378B6327}"/>
+              </a:ext>
+            </a:extLst>
+          </p:cNvPr>
+          <p:cNvSpPr/>
+          <p:nvPr/>
+        </p:nvSpPr>
+        <p:spPr>
+          <a:xfrm>
+            <a:off x="1111972" y="2838913"/>
+            <a:ext cx="2333487" cy="511449"/>
+          </a:xfrm>
+          <a:prstGeom prst="rect">
+            <a:avLst/>
+          </a:prstGeom>
+          <a:noFill/>
+          <a:ln w="28575">
+            <a:solidFill>
+              <a:srgbClr val="C00000"/>
+            </a:solidFill>
+          </a:ln>
+        </p:spPr>
+        <p:style>
+          <a:lnRef idx="2">
+            <a:schemeClr val="accent1">
+              <a:shade val="15000"/>
+            </a:schemeClr>
+          </a:lnRef>
+          <a:fillRef idx="1">
+            <a:schemeClr val="accent1"/>
+          </a:fillRef>
+          <a:effectRef idx="0">
+            <a:schemeClr val="accent1"/>
+          </a:effectRef>
+          <a:fontRef idx="minor">
+            <a:schemeClr val="lt1"/>
+          </a:fontRef>
+        </p:style>
+        <p:txBody>
+          <a:bodyPr rtlCol="0" anchor="ctr"/>
+          <a:lstStyle/>
+          <a:p>
+            <a:pPr algn="ctr"/>
+            <a:endParaRPr lang="en-GB"/>
+          </a:p>
+        </p:txBody>
+      </p:sp>
+      <p:sp>
+        <p:nvSpPr>
+          <p:cNvPr id="4" name="Rectangle 3">
+            <a:extLst>
+              <a:ext uri="{FF2B5EF4-FFF2-40B4-BE49-F238E27FC236}">
+                <a16:creationId xmlns:a16="http://schemas.microsoft.com/office/drawing/2014/main" id="{E1C51E95-947D-BFEC-9685-AF91F3B89243}"/>
+              </a:ext>
+            </a:extLst>
+          </p:cNvPr>
+          <p:cNvSpPr/>
+          <p:nvPr/>
+        </p:nvSpPr>
+        <p:spPr>
+          <a:xfrm>
+            <a:off x="10620513" y="6587952"/>
+            <a:ext cx="618987" cy="270048"/>
+          </a:xfrm>
+          <a:prstGeom prst="rect">
+            <a:avLst/>
+          </a:prstGeom>
+          <a:solidFill>
+            <a:srgbClr val="EEEEEE"/>
+          </a:solidFill>
+          <a:ln w="28575">
+            <a:noFill/>
+          </a:ln>
+        </p:spPr>
+        <p:style>
+          <a:lnRef idx="2">
+            <a:schemeClr val="accent1">
+              <a:shade val="15000"/>
+            </a:schemeClr>
+          </a:lnRef>
+          <a:fillRef idx="1">
+            <a:schemeClr val="accent1"/>
+          </a:fillRef>
+          <a:effectRef idx="0">
+            <a:schemeClr val="accent1"/>
+          </a:effectRef>
+          <a:fontRef idx="minor">
+            <a:schemeClr val="lt1"/>
+          </a:fontRef>
+        </p:style>
+        <p:txBody>
+          <a:bodyPr rtlCol="0" anchor="ctr"/>
+          <a:lstStyle/>
+          <a:p>
+            <a:pPr algn="ctr"/>
+            <a:endParaRPr lang="en-GB"/>
+          </a:p>
+        </p:txBody>
+      </p:sp>
     </p:spTree>
     <p:extLst>
       <p:ext uri="{BB962C8B-B14F-4D97-AF65-F5344CB8AC3E}">
@@ -5339,6 +7178,162 @@
           </a:prstGeom>
         </p:spPr>
       </p:pic>
+      <p:sp>
+        <p:nvSpPr>
+          <p:cNvPr id="2" name="Rectangle 1">
+            <a:extLst>
+              <a:ext uri="{FF2B5EF4-FFF2-40B4-BE49-F238E27FC236}">
+                <a16:creationId xmlns:a16="http://schemas.microsoft.com/office/drawing/2014/main" id="{09494AB5-F140-A160-0246-7F970C8AF37B}"/>
+              </a:ext>
+            </a:extLst>
+          </p:cNvPr>
+          <p:cNvSpPr/>
+          <p:nvPr/>
+        </p:nvSpPr>
+        <p:spPr>
+          <a:xfrm>
+            <a:off x="1814231" y="66451"/>
+            <a:ext cx="1367881" cy="270048"/>
+          </a:xfrm>
+          <a:prstGeom prst="rect">
+            <a:avLst/>
+          </a:prstGeom>
+          <a:noFill/>
+          <a:ln w="28575">
+            <a:solidFill>
+              <a:srgbClr val="C00000"/>
+            </a:solidFill>
+          </a:ln>
+        </p:spPr>
+        <p:style>
+          <a:lnRef idx="2">
+            <a:schemeClr val="accent1">
+              <a:shade val="15000"/>
+            </a:schemeClr>
+          </a:lnRef>
+          <a:fillRef idx="1">
+            <a:schemeClr val="accent1"/>
+          </a:fillRef>
+          <a:effectRef idx="0">
+            <a:schemeClr val="accent1"/>
+          </a:effectRef>
+          <a:fontRef idx="minor">
+            <a:schemeClr val="lt1"/>
+          </a:fontRef>
+        </p:style>
+        <p:txBody>
+          <a:bodyPr rtlCol="0" anchor="ctr"/>
+          <a:lstStyle/>
+          <a:p>
+            <a:pPr algn="ctr"/>
+            <a:endParaRPr lang="en-GB"/>
+          </a:p>
+        </p:txBody>
+      </p:sp>
+      <p:sp>
+        <p:nvSpPr>
+          <p:cNvPr id="3" name="Rectangle 2">
+            <a:extLst>
+              <a:ext uri="{FF2B5EF4-FFF2-40B4-BE49-F238E27FC236}">
+                <a16:creationId xmlns:a16="http://schemas.microsoft.com/office/drawing/2014/main" id="{BB55F9B8-500A-2AAF-245A-ECBC000D2DA3}"/>
+              </a:ext>
+            </a:extLst>
+          </p:cNvPr>
+          <p:cNvSpPr/>
+          <p:nvPr/>
+        </p:nvSpPr>
+        <p:spPr>
+          <a:xfrm>
+            <a:off x="3694238" y="66451"/>
+            <a:ext cx="1367881" cy="270048"/>
+          </a:xfrm>
+          <a:prstGeom prst="rect">
+            <a:avLst/>
+          </a:prstGeom>
+          <a:noFill/>
+          <a:ln w="28575">
+            <a:solidFill>
+              <a:srgbClr val="C00000"/>
+            </a:solidFill>
+          </a:ln>
+        </p:spPr>
+        <p:style>
+          <a:lnRef idx="2">
+            <a:schemeClr val="accent1">
+              <a:shade val="15000"/>
+            </a:schemeClr>
+          </a:lnRef>
+          <a:fillRef idx="1">
+            <a:schemeClr val="accent1"/>
+          </a:fillRef>
+          <a:effectRef idx="0">
+            <a:schemeClr val="accent1"/>
+          </a:effectRef>
+          <a:fontRef idx="minor">
+            <a:schemeClr val="lt1"/>
+          </a:fontRef>
+        </p:style>
+        <p:txBody>
+          <a:bodyPr rtlCol="0" anchor="ctr"/>
+          <a:lstStyle/>
+          <a:p>
+            <a:pPr algn="ctr"/>
+            <a:endParaRPr lang="en-GB"/>
+          </a:p>
+        </p:txBody>
+      </p:sp>
+      <p:sp>
+        <p:nvSpPr>
+          <p:cNvPr id="4" name="Rectangle 3">
+            <a:extLst>
+              <a:ext uri="{FF2B5EF4-FFF2-40B4-BE49-F238E27FC236}">
+                <a16:creationId xmlns:a16="http://schemas.microsoft.com/office/drawing/2014/main" id="{8E6E879E-A3CE-1684-5C78-E586C7F51B48}"/>
+              </a:ext>
+            </a:extLst>
+          </p:cNvPr>
+          <p:cNvSpPr/>
+          <p:nvPr/>
+        </p:nvSpPr>
+        <p:spPr>
+          <a:xfrm>
+            <a:off x="2223883" y="1646534"/>
+            <a:ext cx="2838236" cy="2523129"/>
+          </a:xfrm>
+          <a:prstGeom prst="rect">
+            <a:avLst/>
+          </a:prstGeom>
+          <a:noFill/>
+          <a:ln w="28575">
+            <a:solidFill>
+              <a:srgbClr val="C00000"/>
+            </a:solidFill>
+          </a:ln>
+        </p:spPr>
+        <p:style>
+          <a:lnRef idx="2">
+            <a:schemeClr val="accent1">
+              <a:shade val="15000"/>
+            </a:schemeClr>
+          </a:lnRef>
+          <a:fillRef idx="1">
+            <a:schemeClr val="accent1"/>
+          </a:fillRef>
+          <a:effectRef idx="0">
+            <a:schemeClr val="accent1"/>
+          </a:effectRef>
+          <a:fontRef idx="minor">
+            <a:schemeClr val="lt1"/>
+          </a:fontRef>
+        </p:style>
+        <p:txBody>
+          <a:bodyPr rtlCol="0" anchor="ctr"/>
+          <a:lstStyle/>
+          <a:p>
+            <a:pPr algn="ctr"/>
+            <a:endParaRPr lang="en-GB"/>
+          </a:p>
+        </p:txBody>
+      </p:sp>
     </p:spTree>
     <p:extLst>
       <p:ext uri="{BB962C8B-B14F-4D97-AF65-F5344CB8AC3E}">
@@ -5405,10 +7400,1012 @@
           </a:prstGeom>
         </p:spPr>
       </p:pic>
+      <p:sp>
+        <p:nvSpPr>
+          <p:cNvPr id="2" name="Rectangle 1">
+            <a:extLst>
+              <a:ext uri="{FF2B5EF4-FFF2-40B4-BE49-F238E27FC236}">
+                <a16:creationId xmlns:a16="http://schemas.microsoft.com/office/drawing/2014/main" id="{4767F785-E53D-6F97-7B00-ADD8C95A1D5A}"/>
+              </a:ext>
+            </a:extLst>
+          </p:cNvPr>
+          <p:cNvSpPr/>
+          <p:nvPr/>
+        </p:nvSpPr>
+        <p:spPr>
+          <a:xfrm>
+            <a:off x="1141232" y="2004979"/>
+            <a:ext cx="1367881" cy="270048"/>
+          </a:xfrm>
+          <a:prstGeom prst="rect">
+            <a:avLst/>
+          </a:prstGeom>
+          <a:noFill/>
+          <a:ln w="28575">
+            <a:solidFill>
+              <a:srgbClr val="C00000"/>
+            </a:solidFill>
+          </a:ln>
+        </p:spPr>
+        <p:style>
+          <a:lnRef idx="2">
+            <a:schemeClr val="accent1">
+              <a:shade val="15000"/>
+            </a:schemeClr>
+          </a:lnRef>
+          <a:fillRef idx="1">
+            <a:schemeClr val="accent1"/>
+          </a:fillRef>
+          <a:effectRef idx="0">
+            <a:schemeClr val="accent1"/>
+          </a:effectRef>
+          <a:fontRef idx="minor">
+            <a:schemeClr val="lt1"/>
+          </a:fontRef>
+        </p:style>
+        <p:txBody>
+          <a:bodyPr rtlCol="0" anchor="ctr"/>
+          <a:lstStyle/>
+          <a:p>
+            <a:pPr algn="ctr"/>
+            <a:endParaRPr lang="en-GB"/>
+          </a:p>
+        </p:txBody>
+      </p:sp>
+      <p:sp>
+        <p:nvSpPr>
+          <p:cNvPr id="3" name="Rectangle 2">
+            <a:extLst>
+              <a:ext uri="{FF2B5EF4-FFF2-40B4-BE49-F238E27FC236}">
+                <a16:creationId xmlns:a16="http://schemas.microsoft.com/office/drawing/2014/main" id="{C4413740-4BAC-065A-8DB5-498E4F1BD347}"/>
+              </a:ext>
+            </a:extLst>
+          </p:cNvPr>
+          <p:cNvSpPr/>
+          <p:nvPr/>
+        </p:nvSpPr>
+        <p:spPr>
+          <a:xfrm>
+            <a:off x="1141231" y="2868172"/>
+            <a:ext cx="2201815" cy="474874"/>
+          </a:xfrm>
+          <a:prstGeom prst="rect">
+            <a:avLst/>
+          </a:prstGeom>
+          <a:noFill/>
+          <a:ln w="28575">
+            <a:solidFill>
+              <a:srgbClr val="C00000"/>
+            </a:solidFill>
+          </a:ln>
+        </p:spPr>
+        <p:style>
+          <a:lnRef idx="2">
+            <a:schemeClr val="accent1">
+              <a:shade val="15000"/>
+            </a:schemeClr>
+          </a:lnRef>
+          <a:fillRef idx="1">
+            <a:schemeClr val="accent1"/>
+          </a:fillRef>
+          <a:effectRef idx="0">
+            <a:schemeClr val="accent1"/>
+          </a:effectRef>
+          <a:fontRef idx="minor">
+            <a:schemeClr val="lt1"/>
+          </a:fontRef>
+        </p:style>
+        <p:txBody>
+          <a:bodyPr rtlCol="0" anchor="ctr"/>
+          <a:lstStyle/>
+          <a:p>
+            <a:pPr algn="ctr"/>
+            <a:endParaRPr lang="en-GB"/>
+          </a:p>
+        </p:txBody>
+      </p:sp>
+      <p:sp>
+        <p:nvSpPr>
+          <p:cNvPr id="4" name="Rectangle 3">
+            <a:extLst>
+              <a:ext uri="{FF2B5EF4-FFF2-40B4-BE49-F238E27FC236}">
+                <a16:creationId xmlns:a16="http://schemas.microsoft.com/office/drawing/2014/main" id="{A5A5E619-5507-7E01-EB12-2EF149273990}"/>
+              </a:ext>
+            </a:extLst>
+          </p:cNvPr>
+          <p:cNvSpPr/>
+          <p:nvPr/>
+        </p:nvSpPr>
+        <p:spPr>
+          <a:xfrm>
+            <a:off x="10620513" y="6587952"/>
+            <a:ext cx="618987" cy="270048"/>
+          </a:xfrm>
+          <a:prstGeom prst="rect">
+            <a:avLst/>
+          </a:prstGeom>
+          <a:solidFill>
+            <a:srgbClr val="EEEEEE"/>
+          </a:solidFill>
+          <a:ln w="28575">
+            <a:noFill/>
+          </a:ln>
+        </p:spPr>
+        <p:style>
+          <a:lnRef idx="2">
+            <a:schemeClr val="accent1">
+              <a:shade val="15000"/>
+            </a:schemeClr>
+          </a:lnRef>
+          <a:fillRef idx="1">
+            <a:schemeClr val="accent1"/>
+          </a:fillRef>
+          <a:effectRef idx="0">
+            <a:schemeClr val="accent1"/>
+          </a:effectRef>
+          <a:fontRef idx="minor">
+            <a:schemeClr val="lt1"/>
+          </a:fontRef>
+        </p:style>
+        <p:txBody>
+          <a:bodyPr rtlCol="0" anchor="ctr"/>
+          <a:lstStyle/>
+          <a:p>
+            <a:pPr algn="ctr"/>
+            <a:endParaRPr lang="en-GB"/>
+          </a:p>
+        </p:txBody>
+      </p:sp>
     </p:spTree>
     <p:extLst>
       <p:ext uri="{BB962C8B-B14F-4D97-AF65-F5344CB8AC3E}">
         <p14:creationId xmlns:p14="http://schemas.microsoft.com/office/powerpoint/2010/main" val="253267570"/>
+      </p:ext>
+    </p:extLst>
+  </p:cSld>
+  <p:clrMapOvr>
+    <a:masterClrMapping/>
+  </p:clrMapOvr>
+</p:sld>
+</file>
+
+<file path=ppt/slides/slide7.xml><?xml version="1.0" encoding="utf-8"?>
+<p:sld xmlns:a="http://schemas.openxmlformats.org/drawingml/2006/main" xmlns:r="http://schemas.openxmlformats.org/officeDocument/2006/relationships" xmlns:p="http://schemas.openxmlformats.org/presentationml/2006/main">
+  <p:cSld>
+    <p:bg>
+      <p:bgPr>
+        <a:solidFill>
+          <a:schemeClr val="bg1"/>
+        </a:solidFill>
+        <a:effectLst/>
+      </p:bgPr>
+    </p:bg>
+    <p:spTree>
+      <p:nvGrpSpPr>
+        <p:cNvPr id="1" name=""/>
+        <p:cNvGrpSpPr/>
+        <p:nvPr/>
+      </p:nvGrpSpPr>
+      <p:grpSpPr>
+        <a:xfrm>
+          <a:off x="0" y="0"/>
+          <a:ext cx="0" cy="0"/>
+          <a:chOff x="0" y="0"/>
+          <a:chExt cx="0" cy="0"/>
+        </a:xfrm>
+      </p:grpSpPr>
+      <p:sp useBgFill="1">
+        <p:nvSpPr>
+          <p:cNvPr id="8" name="Rectangle 7">
+            <a:extLst>
+              <a:ext uri="{FF2B5EF4-FFF2-40B4-BE49-F238E27FC236}">
+                <a16:creationId xmlns:a16="http://schemas.microsoft.com/office/drawing/2014/main" id="{095B79CA-1CB8-A133-67D7-E2B7AC1F9454}"/>
+              </a:ext>
+              <a:ext uri="{C183D7F6-B498-43B3-948B-1728B52AA6E4}">
+                <adec:decorative xmlns:adec="http://schemas.microsoft.com/office/drawing/2017/decorative" val="1"/>
+              </a:ext>
+            </a:extLst>
+          </p:cNvPr>
+          <p:cNvSpPr>
+            <a:spLocks noGrp="1" noRot="1" noChangeAspect="1" noMove="1" noResize="1" noEditPoints="1" noAdjustHandles="1" noChangeArrowheads="1" noChangeShapeType="1" noTextEdit="1"/>
+          </p:cNvSpPr>
+          <p:nvPr>
+            <p:extLst>
+              <p:ext uri="{386F3935-93C4-4BCD-93E2-E3B085C9AB24}">
+                <p16:designElem xmlns:p16="http://schemas.microsoft.com/office/powerpoint/2015/main" val="1"/>
+              </p:ext>
+            </p:extLst>
+          </p:nvPr>
+        </p:nvSpPr>
+        <p:spPr>
+          <a:xfrm>
+            <a:off x="0" y="0"/>
+            <a:ext cx="12192000" cy="6858000"/>
+          </a:xfrm>
+          <a:prstGeom prst="rect">
+            <a:avLst/>
+          </a:prstGeom>
+          <a:ln w="12700" cap="flat" cmpd="sng" algn="ctr">
+            <a:noFill/>
+            <a:prstDash val="solid"/>
+            <a:miter lim="800000"/>
+          </a:ln>
+          <a:effectLst/>
+          <a:extLst>
+            <a:ext uri="{91240B29-F687-4F45-9708-019B960494DF}">
+              <a14:hiddenLine xmlns:a14="http://schemas.microsoft.com/office/drawing/2010/main" w="12700" cap="flat" cmpd="sng" algn="ctr">
+                <a:solidFill>
+                  <a:schemeClr val="accent1">
+                    <a:shade val="15000"/>
+                  </a:schemeClr>
+                </a:solidFill>
+                <a:prstDash val="solid"/>
+                <a:miter lim="800000"/>
+              </a14:hiddenLine>
+            </a:ext>
+          </a:extLst>
+        </p:spPr>
+        <p:style>
+          <a:lnRef idx="2">
+            <a:schemeClr val="accent1">
+              <a:shade val="15000"/>
+            </a:schemeClr>
+          </a:lnRef>
+          <a:fillRef idx="1">
+            <a:schemeClr val="accent1"/>
+          </a:fillRef>
+          <a:effectRef idx="0">
+            <a:schemeClr val="accent1"/>
+          </a:effectRef>
+          <a:fontRef idx="minor">
+            <a:schemeClr val="lt1"/>
+          </a:fontRef>
+        </p:style>
+        <p:txBody>
+          <a:bodyPr rtlCol="0" anchor="ctr"/>
+          <a:lstStyle/>
+          <a:p>
+            <a:pPr marL="0" marR="0" lvl="0" indent="0" algn="ctr" defTabSz="914400" rtl="0" eaLnBrk="1" fontAlgn="auto" latinLnBrk="0" hangingPunct="1">
+              <a:lnSpc>
+                <a:spcPct val="100000"/>
+              </a:lnSpc>
+              <a:spcBef>
+                <a:spcPts val="0"/>
+              </a:spcBef>
+              <a:spcAft>
+                <a:spcPts val="0"/>
+              </a:spcAft>
+              <a:buClrTx/>
+              <a:buSzTx/>
+              <a:buFontTx/>
+              <a:buNone/>
+              <a:tabLst/>
+              <a:defRPr/>
+            </a:pPr>
+            <a:endParaRPr kumimoji="0" lang="en-US" sz="1800" b="0" i="0" u="none" strike="noStrike" kern="1200" cap="none" spc="0" normalizeH="0" baseline="0" noProof="0">
+              <a:ln>
+                <a:noFill/>
+              </a:ln>
+              <a:solidFill>
+                <a:prstClr val="white"/>
+              </a:solidFill>
+              <a:effectLst/>
+              <a:uLnTx/>
+              <a:uFillTx/>
+              <a:latin typeface="Neue Haas Grotesk Text Pro"/>
+              <a:ea typeface="+mn-ea"/>
+              <a:cs typeface="+mn-cs"/>
+            </a:endParaRPr>
+          </a:p>
+        </p:txBody>
+      </p:sp>
+      <p:pic>
+        <p:nvPicPr>
+          <p:cNvPr id="7" name="Picture 6">
+            <a:extLst>
+              <a:ext uri="{FF2B5EF4-FFF2-40B4-BE49-F238E27FC236}">
+                <a16:creationId xmlns:a16="http://schemas.microsoft.com/office/drawing/2014/main" id="{DD456608-E1EF-3C25-00EC-93FD6E61FBA4}"/>
+              </a:ext>
+            </a:extLst>
+          </p:cNvPr>
+          <p:cNvPicPr>
+            <a:picLocks noChangeAspect="1"/>
+          </p:cNvPicPr>
+          <p:nvPr/>
+        </p:nvPicPr>
+        <p:blipFill>
+          <a:blip r:embed="rId2"/>
+          <a:stretch>
+            <a:fillRect/>
+          </a:stretch>
+        </p:blipFill>
+        <p:spPr>
+          <a:xfrm>
+            <a:off x="0" y="170065"/>
+            <a:ext cx="12192000" cy="6517869"/>
+          </a:xfrm>
+          <a:prstGeom prst="rect">
+            <a:avLst/>
+          </a:prstGeom>
+        </p:spPr>
+      </p:pic>
+      <p:sp>
+        <p:nvSpPr>
+          <p:cNvPr id="9" name="Rectangle 8">
+            <a:extLst>
+              <a:ext uri="{FF2B5EF4-FFF2-40B4-BE49-F238E27FC236}">
+                <a16:creationId xmlns:a16="http://schemas.microsoft.com/office/drawing/2014/main" id="{392E130A-F480-01F5-5AFD-AF30C2C3EECB}"/>
+              </a:ext>
+            </a:extLst>
+          </p:cNvPr>
+          <p:cNvSpPr/>
+          <p:nvPr/>
+        </p:nvSpPr>
+        <p:spPr>
+          <a:xfrm>
+            <a:off x="1683076" y="6389035"/>
+            <a:ext cx="1260181" cy="245889"/>
+          </a:xfrm>
+          <a:prstGeom prst="rect">
+            <a:avLst/>
+          </a:prstGeom>
+          <a:noFill/>
+          <a:ln w="28575">
+            <a:solidFill>
+              <a:srgbClr val="C00000"/>
+            </a:solidFill>
+          </a:ln>
+        </p:spPr>
+        <p:style>
+          <a:lnRef idx="2">
+            <a:schemeClr val="accent1">
+              <a:shade val="15000"/>
+            </a:schemeClr>
+          </a:lnRef>
+          <a:fillRef idx="1">
+            <a:schemeClr val="accent1"/>
+          </a:fillRef>
+          <a:effectRef idx="0">
+            <a:schemeClr val="accent1"/>
+          </a:effectRef>
+          <a:fontRef idx="minor">
+            <a:schemeClr val="lt1"/>
+          </a:fontRef>
+        </p:style>
+        <p:txBody>
+          <a:bodyPr rtlCol="0" anchor="ctr"/>
+          <a:lstStyle/>
+          <a:p>
+            <a:pPr algn="ctr"/>
+            <a:endParaRPr lang="en-GB"/>
+          </a:p>
+        </p:txBody>
+      </p:sp>
+      <p:sp>
+        <p:nvSpPr>
+          <p:cNvPr id="10" name="TextBox 9">
+            <a:extLst>
+              <a:ext uri="{FF2B5EF4-FFF2-40B4-BE49-F238E27FC236}">
+                <a16:creationId xmlns:a16="http://schemas.microsoft.com/office/drawing/2014/main" id="{61004C15-95C4-BBE5-3F3C-1C59E173D73B}"/>
+              </a:ext>
+            </a:extLst>
+          </p:cNvPr>
+          <p:cNvSpPr txBox="1"/>
+          <p:nvPr/>
+        </p:nvSpPr>
+        <p:spPr>
+          <a:xfrm>
+            <a:off x="2943257" y="6331113"/>
+            <a:ext cx="4351769" cy="369332"/>
+          </a:xfrm>
+          <a:prstGeom prst="rect">
+            <a:avLst/>
+          </a:prstGeom>
+          <a:noFill/>
+        </p:spPr>
+        <p:txBody>
+          <a:bodyPr wrap="none" rtlCol="0">
+            <a:spAutoFit/>
+          </a:bodyPr>
+          <a:lstStyle/>
+          <a:p>
+            <a:r>
+              <a:rPr lang="en-GB" dirty="0">
+                <a:solidFill>
+                  <a:srgbClr val="C00000"/>
+                </a:solidFill>
+              </a:rPr>
+              <a:t>Prompt showing where to type commands</a:t>
+            </a:r>
+          </a:p>
+        </p:txBody>
+      </p:sp>
+    </p:spTree>
+    <p:extLst>
+      <p:ext uri="{BB962C8B-B14F-4D97-AF65-F5344CB8AC3E}">
+        <p14:creationId xmlns:p14="http://schemas.microsoft.com/office/powerpoint/2010/main" val="1768232676"/>
+      </p:ext>
+    </p:extLst>
+  </p:cSld>
+  <p:clrMapOvr>
+    <a:masterClrMapping/>
+  </p:clrMapOvr>
+</p:sld>
+</file>
+
+<file path=ppt/slides/slide8.xml><?xml version="1.0" encoding="utf-8"?>
+<p:sld xmlns:a="http://schemas.openxmlformats.org/drawingml/2006/main" xmlns:r="http://schemas.openxmlformats.org/officeDocument/2006/relationships" xmlns:p="http://schemas.openxmlformats.org/presentationml/2006/main">
+  <p:cSld>
+    <p:spTree>
+      <p:nvGrpSpPr>
+        <p:cNvPr id="1" name=""/>
+        <p:cNvGrpSpPr/>
+        <p:nvPr/>
+      </p:nvGrpSpPr>
+      <p:grpSpPr>
+        <a:xfrm>
+          <a:off x="0" y="0"/>
+          <a:ext cx="0" cy="0"/>
+          <a:chOff x="0" y="0"/>
+          <a:chExt cx="0" cy="0"/>
+        </a:xfrm>
+      </p:grpSpPr>
+      <p:pic>
+        <p:nvPicPr>
+          <p:cNvPr id="5" name="Picture 4">
+            <a:extLst>
+              <a:ext uri="{FF2B5EF4-FFF2-40B4-BE49-F238E27FC236}">
+                <a16:creationId xmlns:a16="http://schemas.microsoft.com/office/drawing/2014/main" id="{D7E2EE55-E8D6-E641-82CF-E0BECF726395}"/>
+              </a:ext>
+            </a:extLst>
+          </p:cNvPr>
+          <p:cNvPicPr>
+            <a:picLocks noChangeAspect="1"/>
+          </p:cNvPicPr>
+          <p:nvPr/>
+        </p:nvPicPr>
+        <p:blipFill>
+          <a:blip r:embed="rId2"/>
+          <a:stretch>
+            <a:fillRect/>
+          </a:stretch>
+        </p:blipFill>
+        <p:spPr>
+          <a:xfrm>
+            <a:off x="0" y="170065"/>
+            <a:ext cx="12192000" cy="6517869"/>
+          </a:xfrm>
+          <a:prstGeom prst="rect">
+            <a:avLst/>
+          </a:prstGeom>
+        </p:spPr>
+      </p:pic>
+      <p:sp>
+        <p:nvSpPr>
+          <p:cNvPr id="6" name="Rectangle 5">
+            <a:extLst>
+              <a:ext uri="{FF2B5EF4-FFF2-40B4-BE49-F238E27FC236}">
+                <a16:creationId xmlns:a16="http://schemas.microsoft.com/office/drawing/2014/main" id="{BF5EEA95-4A3E-FF80-5A76-EA184A0A6F8C}"/>
+              </a:ext>
+            </a:extLst>
+          </p:cNvPr>
+          <p:cNvSpPr/>
+          <p:nvPr/>
+        </p:nvSpPr>
+        <p:spPr>
+          <a:xfrm>
+            <a:off x="1683076" y="6389035"/>
+            <a:ext cx="1260181" cy="245889"/>
+          </a:xfrm>
+          <a:prstGeom prst="rect">
+            <a:avLst/>
+          </a:prstGeom>
+          <a:noFill/>
+          <a:ln w="28575">
+            <a:solidFill>
+              <a:srgbClr val="C00000"/>
+            </a:solidFill>
+          </a:ln>
+        </p:spPr>
+        <p:style>
+          <a:lnRef idx="2">
+            <a:schemeClr val="accent1">
+              <a:shade val="15000"/>
+            </a:schemeClr>
+          </a:lnRef>
+          <a:fillRef idx="1">
+            <a:schemeClr val="accent1"/>
+          </a:fillRef>
+          <a:effectRef idx="0">
+            <a:schemeClr val="accent1"/>
+          </a:effectRef>
+          <a:fontRef idx="minor">
+            <a:schemeClr val="lt1"/>
+          </a:fontRef>
+        </p:style>
+        <p:txBody>
+          <a:bodyPr rtlCol="0" anchor="ctr"/>
+          <a:lstStyle/>
+          <a:p>
+            <a:pPr algn="ctr"/>
+            <a:endParaRPr lang="en-GB"/>
+          </a:p>
+        </p:txBody>
+      </p:sp>
+      <p:sp>
+        <p:nvSpPr>
+          <p:cNvPr id="7" name="TextBox 6">
+            <a:extLst>
+              <a:ext uri="{FF2B5EF4-FFF2-40B4-BE49-F238E27FC236}">
+                <a16:creationId xmlns:a16="http://schemas.microsoft.com/office/drawing/2014/main" id="{CA8F5669-AEAF-3EE2-2451-2A9806E9FD75}"/>
+              </a:ext>
+            </a:extLst>
+          </p:cNvPr>
+          <p:cNvSpPr txBox="1"/>
+          <p:nvPr/>
+        </p:nvSpPr>
+        <p:spPr>
+          <a:xfrm>
+            <a:off x="2943257" y="6331113"/>
+            <a:ext cx="4351769" cy="369332"/>
+          </a:xfrm>
+          <a:prstGeom prst="rect">
+            <a:avLst/>
+          </a:prstGeom>
+          <a:noFill/>
+        </p:spPr>
+        <p:txBody>
+          <a:bodyPr wrap="none" rtlCol="0">
+            <a:spAutoFit/>
+          </a:bodyPr>
+          <a:lstStyle/>
+          <a:p>
+            <a:r>
+              <a:rPr lang="en-GB" dirty="0">
+                <a:solidFill>
+                  <a:srgbClr val="C00000"/>
+                </a:solidFill>
+              </a:rPr>
+              <a:t>Prompt showing where to type commands</a:t>
+            </a:r>
+          </a:p>
+        </p:txBody>
+      </p:sp>
+    </p:spTree>
+    <p:extLst>
+      <p:ext uri="{BB962C8B-B14F-4D97-AF65-F5344CB8AC3E}">
+        <p14:creationId xmlns:p14="http://schemas.microsoft.com/office/powerpoint/2010/main" val="2430991985"/>
+      </p:ext>
+    </p:extLst>
+  </p:cSld>
+  <p:clrMapOvr>
+    <a:masterClrMapping/>
+  </p:clrMapOvr>
+</p:sld>
+</file>
+
+<file path=ppt/slides/slide9.xml><?xml version="1.0" encoding="utf-8"?>
+<p:sld xmlns:a="http://schemas.openxmlformats.org/drawingml/2006/main" xmlns:r="http://schemas.openxmlformats.org/officeDocument/2006/relationships" xmlns:p="http://schemas.openxmlformats.org/presentationml/2006/main">
+  <p:cSld>
+    <p:spTree>
+      <p:nvGrpSpPr>
+        <p:cNvPr id="1" name=""/>
+        <p:cNvGrpSpPr/>
+        <p:nvPr/>
+      </p:nvGrpSpPr>
+      <p:grpSpPr>
+        <a:xfrm>
+          <a:off x="0" y="0"/>
+          <a:ext cx="0" cy="0"/>
+          <a:chOff x="0" y="0"/>
+          <a:chExt cx="0" cy="0"/>
+        </a:xfrm>
+      </p:grpSpPr>
+      <p:pic>
+        <p:nvPicPr>
+          <p:cNvPr id="7" name="Picture 6" descr="A screenshot of a computer&#10;&#10;AI-generated content may be incorrect.">
+            <a:extLst>
+              <a:ext uri="{FF2B5EF4-FFF2-40B4-BE49-F238E27FC236}">
+                <a16:creationId xmlns:a16="http://schemas.microsoft.com/office/drawing/2014/main" id="{01DFEE01-ABA1-2B6E-A547-758E875FDA3A}"/>
+              </a:ext>
+            </a:extLst>
+          </p:cNvPr>
+          <p:cNvPicPr>
+            <a:picLocks noChangeAspect="1"/>
+          </p:cNvPicPr>
+          <p:nvPr/>
+        </p:nvPicPr>
+        <p:blipFill>
+          <a:blip r:embed="rId2">
+            <a:extLst>
+              <a:ext uri="{28A0092B-C50C-407E-A947-70E740481C1C}">
+                <a14:useLocalDpi xmlns:a14="http://schemas.microsoft.com/office/drawing/2010/main" val="0"/>
+              </a:ext>
+            </a:extLst>
+          </a:blip>
+          <a:srcRect l="4742" t="6962" b="34514"/>
+          <a:stretch>
+            <a:fillRect/>
+          </a:stretch>
+        </p:blipFill>
+        <p:spPr>
+          <a:xfrm>
+            <a:off x="-1" y="558350"/>
+            <a:ext cx="12169871" cy="4984694"/>
+          </a:xfrm>
+          <a:prstGeom prst="rect">
+            <a:avLst/>
+          </a:prstGeom>
+        </p:spPr>
+      </p:pic>
+      <p:sp>
+        <p:nvSpPr>
+          <p:cNvPr id="8" name="Rectangle 7">
+            <a:extLst>
+              <a:ext uri="{FF2B5EF4-FFF2-40B4-BE49-F238E27FC236}">
+                <a16:creationId xmlns:a16="http://schemas.microsoft.com/office/drawing/2014/main" id="{0E1730CE-393E-380D-CF35-0815593124A8}"/>
+              </a:ext>
+            </a:extLst>
+          </p:cNvPr>
+          <p:cNvSpPr/>
+          <p:nvPr/>
+        </p:nvSpPr>
+        <p:spPr>
+          <a:xfrm>
+            <a:off x="1229922" y="4212277"/>
+            <a:ext cx="1260181" cy="245889"/>
+          </a:xfrm>
+          <a:prstGeom prst="rect">
+            <a:avLst/>
+          </a:prstGeom>
+          <a:noFill/>
+          <a:ln w="28575">
+            <a:solidFill>
+              <a:srgbClr val="C00000"/>
+            </a:solidFill>
+          </a:ln>
+        </p:spPr>
+        <p:style>
+          <a:lnRef idx="2">
+            <a:schemeClr val="accent1">
+              <a:shade val="15000"/>
+            </a:schemeClr>
+          </a:lnRef>
+          <a:fillRef idx="1">
+            <a:schemeClr val="accent1"/>
+          </a:fillRef>
+          <a:effectRef idx="0">
+            <a:schemeClr val="accent1"/>
+          </a:effectRef>
+          <a:fontRef idx="minor">
+            <a:schemeClr val="lt1"/>
+          </a:fontRef>
+        </p:style>
+        <p:txBody>
+          <a:bodyPr rtlCol="0" anchor="ctr"/>
+          <a:lstStyle/>
+          <a:p>
+            <a:pPr algn="ctr"/>
+            <a:endParaRPr lang="en-GB"/>
+          </a:p>
+        </p:txBody>
+      </p:sp>
+      <p:sp>
+        <p:nvSpPr>
+          <p:cNvPr id="9" name="TextBox 8">
+            <a:extLst>
+              <a:ext uri="{FF2B5EF4-FFF2-40B4-BE49-F238E27FC236}">
+                <a16:creationId xmlns:a16="http://schemas.microsoft.com/office/drawing/2014/main" id="{D609B0F7-FCF1-39CB-7EA0-907BAA37BAA7}"/>
+              </a:ext>
+            </a:extLst>
+          </p:cNvPr>
+          <p:cNvSpPr txBox="1"/>
+          <p:nvPr/>
+        </p:nvSpPr>
+        <p:spPr>
+          <a:xfrm>
+            <a:off x="1316758" y="3906231"/>
+            <a:ext cx="1806905" cy="369332"/>
+          </a:xfrm>
+          <a:prstGeom prst="rect">
+            <a:avLst/>
+          </a:prstGeom>
+          <a:noFill/>
+        </p:spPr>
+        <p:txBody>
+          <a:bodyPr wrap="none" rtlCol="0">
+            <a:spAutoFit/>
+          </a:bodyPr>
+          <a:lstStyle/>
+          <a:p>
+            <a:r>
+              <a:rPr lang="en-GB" dirty="0">
+                <a:solidFill>
+                  <a:srgbClr val="C00000"/>
+                </a:solidFill>
+              </a:rPr>
+              <a:t>Command input</a:t>
+            </a:r>
+          </a:p>
+        </p:txBody>
+      </p:sp>
+      <p:sp>
+        <p:nvSpPr>
+          <p:cNvPr id="10" name="Rectangle 9">
+            <a:extLst>
+              <a:ext uri="{FF2B5EF4-FFF2-40B4-BE49-F238E27FC236}">
+                <a16:creationId xmlns:a16="http://schemas.microsoft.com/office/drawing/2014/main" id="{99DC136C-1B5E-2240-19B9-68DA7DE1AC4C}"/>
+              </a:ext>
+            </a:extLst>
+          </p:cNvPr>
+          <p:cNvSpPr/>
+          <p:nvPr/>
+        </p:nvSpPr>
+        <p:spPr>
+          <a:xfrm>
+            <a:off x="30057" y="4518323"/>
+            <a:ext cx="1260181" cy="531107"/>
+          </a:xfrm>
+          <a:prstGeom prst="rect">
+            <a:avLst/>
+          </a:prstGeom>
+          <a:noFill/>
+          <a:ln w="28575">
+            <a:solidFill>
+              <a:srgbClr val="C00000"/>
+            </a:solidFill>
+          </a:ln>
+        </p:spPr>
+        <p:style>
+          <a:lnRef idx="2">
+            <a:schemeClr val="accent1">
+              <a:shade val="15000"/>
+            </a:schemeClr>
+          </a:lnRef>
+          <a:fillRef idx="1">
+            <a:schemeClr val="accent1"/>
+          </a:fillRef>
+          <a:effectRef idx="0">
+            <a:schemeClr val="accent1"/>
+          </a:effectRef>
+          <a:fontRef idx="minor">
+            <a:schemeClr val="lt1"/>
+          </a:fontRef>
+        </p:style>
+        <p:txBody>
+          <a:bodyPr rtlCol="0" anchor="ctr"/>
+          <a:lstStyle/>
+          <a:p>
+            <a:pPr algn="ctr"/>
+            <a:endParaRPr lang="en-GB"/>
+          </a:p>
+        </p:txBody>
+      </p:sp>
+      <p:sp>
+        <p:nvSpPr>
+          <p:cNvPr id="11" name="TextBox 10">
+            <a:extLst>
+              <a:ext uri="{FF2B5EF4-FFF2-40B4-BE49-F238E27FC236}">
+                <a16:creationId xmlns:a16="http://schemas.microsoft.com/office/drawing/2014/main" id="{AA03C277-02EA-492A-6D25-40EDD8F8E0E4}"/>
+              </a:ext>
+            </a:extLst>
+          </p:cNvPr>
+          <p:cNvSpPr txBox="1"/>
+          <p:nvPr/>
+        </p:nvSpPr>
+        <p:spPr>
+          <a:xfrm>
+            <a:off x="1229922" y="4633336"/>
+            <a:ext cx="1955985" cy="369332"/>
+          </a:xfrm>
+          <a:prstGeom prst="rect">
+            <a:avLst/>
+          </a:prstGeom>
+          <a:noFill/>
+        </p:spPr>
+        <p:txBody>
+          <a:bodyPr wrap="none" rtlCol="0">
+            <a:spAutoFit/>
+          </a:bodyPr>
+          <a:lstStyle/>
+          <a:p>
+            <a:r>
+              <a:rPr lang="en-GB" dirty="0">
+                <a:solidFill>
+                  <a:srgbClr val="C00000"/>
+                </a:solidFill>
+              </a:rPr>
+              <a:t>Command output</a:t>
+            </a:r>
+          </a:p>
+        </p:txBody>
+      </p:sp>
+      <p:sp>
+        <p:nvSpPr>
+          <p:cNvPr id="12" name="Rectangle 11">
+            <a:extLst>
+              <a:ext uri="{FF2B5EF4-FFF2-40B4-BE49-F238E27FC236}">
+                <a16:creationId xmlns:a16="http://schemas.microsoft.com/office/drawing/2014/main" id="{AA4072D0-FA2B-9EAC-548C-856243005081}"/>
+              </a:ext>
+            </a:extLst>
+          </p:cNvPr>
+          <p:cNvSpPr/>
+          <p:nvPr/>
+        </p:nvSpPr>
+        <p:spPr>
+          <a:xfrm>
+            <a:off x="1236586" y="5224600"/>
+            <a:ext cx="1260181" cy="245889"/>
+          </a:xfrm>
+          <a:prstGeom prst="rect">
+            <a:avLst/>
+          </a:prstGeom>
+          <a:noFill/>
+          <a:ln w="28575">
+            <a:solidFill>
+              <a:srgbClr val="C00000"/>
+            </a:solidFill>
+          </a:ln>
+        </p:spPr>
+        <p:style>
+          <a:lnRef idx="2">
+            <a:schemeClr val="accent1">
+              <a:shade val="15000"/>
+            </a:schemeClr>
+          </a:lnRef>
+          <a:fillRef idx="1">
+            <a:schemeClr val="accent1"/>
+          </a:fillRef>
+          <a:effectRef idx="0">
+            <a:schemeClr val="accent1"/>
+          </a:effectRef>
+          <a:fontRef idx="minor">
+            <a:schemeClr val="lt1"/>
+          </a:fontRef>
+        </p:style>
+        <p:txBody>
+          <a:bodyPr rtlCol="0" anchor="ctr"/>
+          <a:lstStyle/>
+          <a:p>
+            <a:pPr algn="ctr"/>
+            <a:endParaRPr lang="en-GB"/>
+          </a:p>
+        </p:txBody>
+      </p:sp>
+      <p:sp>
+        <p:nvSpPr>
+          <p:cNvPr id="13" name="TextBox 12">
+            <a:extLst>
+              <a:ext uri="{FF2B5EF4-FFF2-40B4-BE49-F238E27FC236}">
+                <a16:creationId xmlns:a16="http://schemas.microsoft.com/office/drawing/2014/main" id="{BA230488-68D6-A478-6ADB-B7DD5F9BA5C7}"/>
+              </a:ext>
+            </a:extLst>
+          </p:cNvPr>
+          <p:cNvSpPr txBox="1"/>
+          <p:nvPr/>
+        </p:nvSpPr>
+        <p:spPr>
+          <a:xfrm>
+            <a:off x="1508412" y="5460993"/>
+            <a:ext cx="1423595" cy="369332"/>
+          </a:xfrm>
+          <a:prstGeom prst="rect">
+            <a:avLst/>
+          </a:prstGeom>
+          <a:noFill/>
+        </p:spPr>
+        <p:txBody>
+          <a:bodyPr wrap="none" rtlCol="0">
+            <a:spAutoFit/>
+          </a:bodyPr>
+          <a:lstStyle/>
+          <a:p>
+            <a:r>
+              <a:rPr lang="en-GB" dirty="0">
+                <a:solidFill>
+                  <a:srgbClr val="C00000"/>
+                </a:solidFill>
+              </a:rPr>
+              <a:t>Next prompt</a:t>
+            </a:r>
+          </a:p>
+        </p:txBody>
+      </p:sp>
+      <p:sp>
+        <p:nvSpPr>
+          <p:cNvPr id="14" name="Rectangle 13">
+            <a:extLst>
+              <a:ext uri="{FF2B5EF4-FFF2-40B4-BE49-F238E27FC236}">
+                <a16:creationId xmlns:a16="http://schemas.microsoft.com/office/drawing/2014/main" id="{72EF0246-3117-EBE2-7F30-D7891F88A08D}"/>
+              </a:ext>
+            </a:extLst>
+          </p:cNvPr>
+          <p:cNvSpPr/>
+          <p:nvPr/>
+        </p:nvSpPr>
+        <p:spPr>
+          <a:xfrm>
+            <a:off x="4675780" y="933654"/>
+            <a:ext cx="3521452" cy="304427"/>
+          </a:xfrm>
+          <a:prstGeom prst="rect">
+            <a:avLst/>
+          </a:prstGeom>
+          <a:noFill/>
+          <a:ln w="28575">
+            <a:solidFill>
+              <a:srgbClr val="C00000"/>
+            </a:solidFill>
+          </a:ln>
+        </p:spPr>
+        <p:style>
+          <a:lnRef idx="2">
+            <a:schemeClr val="accent1">
+              <a:shade val="15000"/>
+            </a:schemeClr>
+          </a:lnRef>
+          <a:fillRef idx="1">
+            <a:schemeClr val="accent1"/>
+          </a:fillRef>
+          <a:effectRef idx="0">
+            <a:schemeClr val="accent1"/>
+          </a:effectRef>
+          <a:fontRef idx="minor">
+            <a:schemeClr val="lt1"/>
+          </a:fontRef>
+        </p:style>
+        <p:txBody>
+          <a:bodyPr rtlCol="0" anchor="ctr"/>
+          <a:lstStyle/>
+          <a:p>
+            <a:pPr algn="ctr"/>
+            <a:endParaRPr lang="en-GB"/>
+          </a:p>
+        </p:txBody>
+      </p:sp>
+      <p:sp>
+        <p:nvSpPr>
+          <p:cNvPr id="15" name="TextBox 14">
+            <a:extLst>
+              <a:ext uri="{FF2B5EF4-FFF2-40B4-BE49-F238E27FC236}">
+                <a16:creationId xmlns:a16="http://schemas.microsoft.com/office/drawing/2014/main" id="{316BADE1-8400-219B-2380-4B07C9E9B312}"/>
+              </a:ext>
+            </a:extLst>
+          </p:cNvPr>
+          <p:cNvSpPr txBox="1"/>
+          <p:nvPr/>
+        </p:nvSpPr>
+        <p:spPr>
+          <a:xfrm>
+            <a:off x="6977279" y="1818229"/>
+            <a:ext cx="3340066" cy="646331"/>
+          </a:xfrm>
+          <a:prstGeom prst="rect">
+            <a:avLst/>
+          </a:prstGeom>
+          <a:noFill/>
+        </p:spPr>
+        <p:txBody>
+          <a:bodyPr wrap="square" rtlCol="0">
+            <a:spAutoFit/>
+          </a:bodyPr>
+          <a:lstStyle/>
+          <a:p>
+            <a:r>
+              <a:rPr lang="en-GB" dirty="0">
+                <a:solidFill>
+                  <a:srgbClr val="C00000"/>
+                </a:solidFill>
+              </a:rPr>
+              <a:t>Same location shown graphically in the File Explorer</a:t>
+            </a:r>
+          </a:p>
+        </p:txBody>
+      </p:sp>
+    </p:spTree>
+    <p:extLst>
+      <p:ext uri="{BB962C8B-B14F-4D97-AF65-F5344CB8AC3E}">
+        <p14:creationId xmlns:p14="http://schemas.microsoft.com/office/powerpoint/2010/main" val="3841700758"/>
       </p:ext>
     </p:extLst>
   </p:cSld>
@@ -5731,4 +8728,319 @@
     </a:ext>
   </a:extLst>
 </a:theme>
+</file>
+
+<file path=ppt/theme/theme2.xml><?xml version="1.0" encoding="utf-8"?>
+<a:theme xmlns:a="http://schemas.openxmlformats.org/drawingml/2006/main" name="Office Theme">
+  <a:themeElements>
+    <a:clrScheme name="Office">
+      <a:dk1>
+        <a:sysClr val="windowText" lastClr="000000"/>
+      </a:dk1>
+      <a:lt1>
+        <a:sysClr val="window" lastClr="FFFFFF"/>
+      </a:lt1>
+      <a:dk2>
+        <a:srgbClr val="0E2841"/>
+      </a:dk2>
+      <a:lt2>
+        <a:srgbClr val="E8E8E8"/>
+      </a:lt2>
+      <a:accent1>
+        <a:srgbClr val="156082"/>
+      </a:accent1>
+      <a:accent2>
+        <a:srgbClr val="E97132"/>
+      </a:accent2>
+      <a:accent3>
+        <a:srgbClr val="196B24"/>
+      </a:accent3>
+      <a:accent4>
+        <a:srgbClr val="0F9ED5"/>
+      </a:accent4>
+      <a:accent5>
+        <a:srgbClr val="A02B93"/>
+      </a:accent5>
+      <a:accent6>
+        <a:srgbClr val="4EA72E"/>
+      </a:accent6>
+      <a:hlink>
+        <a:srgbClr val="467886"/>
+      </a:hlink>
+      <a:folHlink>
+        <a:srgbClr val="96607D"/>
+      </a:folHlink>
+    </a:clrScheme>
+    <a:fontScheme name="Office">
+      <a:majorFont>
+        <a:latin typeface="Aptos Display" panose="02110004020202020204"/>
+        <a:ea typeface=""/>
+        <a:cs typeface=""/>
+        <a:font script="Jpan" typeface="游ゴシック Light"/>
+        <a:font script="Hang" typeface="맑은 고딕"/>
+        <a:font script="Hans" typeface="等线 Light"/>
+        <a:font script="Hant" typeface="新細明體"/>
+        <a:font script="Arab" typeface="Times New Roman"/>
+        <a:font script="Hebr" typeface="Times New Roman"/>
+        <a:font script="Thai" typeface="Angsana New"/>
+        <a:font script="Ethi" typeface="Nyala"/>
+        <a:font script="Beng" typeface="Vrinda"/>
+        <a:font script="Gujr" typeface="Shruti"/>
+        <a:font script="Khmr" typeface="MoolBoran"/>
+        <a:font script="Knda" typeface="Tunga"/>
+        <a:font script="Guru" typeface="Raavi"/>
+        <a:font script="Cans" typeface="Euphemia"/>
+        <a:font script="Cher" typeface="Plantagenet Cherokee"/>
+        <a:font script="Yiii" typeface="Microsoft Yi Baiti"/>
+        <a:font script="Tibt" typeface="Microsoft Himalaya"/>
+        <a:font script="Thaa" typeface="MV Boli"/>
+        <a:font script="Deva" typeface="Mangal"/>
+        <a:font script="Telu" typeface="Gautami"/>
+        <a:font script="Taml" typeface="Latha"/>
+        <a:font script="Syrc" typeface="Estrangelo Edessa"/>
+        <a:font script="Orya" typeface="Kalinga"/>
+        <a:font script="Mlym" typeface="Kartika"/>
+        <a:font script="Laoo" typeface="DokChampa"/>
+        <a:font script="Sinh" typeface="Iskoola Pota"/>
+        <a:font script="Mong" typeface="Mongolian Baiti"/>
+        <a:font script="Viet" typeface="Times New Roman"/>
+        <a:font script="Uigh" typeface="Microsoft Uighur"/>
+        <a:font script="Geor" typeface="Sylfaen"/>
+        <a:font script="Armn" typeface="Arial"/>
+        <a:font script="Bugi" typeface="Leelawadee UI"/>
+        <a:font script="Bopo" typeface="Microsoft JhengHei"/>
+        <a:font script="Java" typeface="Javanese Text"/>
+        <a:font script="Lisu" typeface="Segoe UI"/>
+        <a:font script="Mymr" typeface="Myanmar Text"/>
+        <a:font script="Nkoo" typeface="Ebrima"/>
+        <a:font script="Olck" typeface="Nirmala UI"/>
+        <a:font script="Osma" typeface="Ebrima"/>
+        <a:font script="Phag" typeface="Phagspa"/>
+        <a:font script="Syrn" typeface="Estrangelo Edessa"/>
+        <a:font script="Syrj" typeface="Estrangelo Edessa"/>
+        <a:font script="Syre" typeface="Estrangelo Edessa"/>
+        <a:font script="Sora" typeface="Nirmala UI"/>
+        <a:font script="Tale" typeface="Microsoft Tai Le"/>
+        <a:font script="Talu" typeface="Microsoft New Tai Lue"/>
+        <a:font script="Tfng" typeface="Ebrima"/>
+      </a:majorFont>
+      <a:minorFont>
+        <a:latin typeface="Aptos" panose="02110004020202020204"/>
+        <a:ea typeface=""/>
+        <a:cs typeface=""/>
+        <a:font script="Jpan" typeface="游ゴシック"/>
+        <a:font script="Hang" typeface="맑은 고딕"/>
+        <a:font script="Hans" typeface="等线"/>
+        <a:font script="Hant" typeface="新細明體"/>
+        <a:font script="Arab" typeface="Arial"/>
+        <a:font script="Hebr" typeface="Arial"/>
+        <a:font script="Thai" typeface="Cordia New"/>
+        <a:font script="Ethi" typeface="Nyala"/>
+        <a:font script="Beng" typeface="Vrinda"/>
+        <a:font script="Gujr" typeface="Shruti"/>
+        <a:font script="Khmr" typeface="DaunPenh"/>
+        <a:font script="Knda" typeface="Tunga"/>
+        <a:font script="Guru" typeface="Raavi"/>
+        <a:font script="Cans" typeface="Euphemia"/>
+        <a:font script="Cher" typeface="Plantagenet Cherokee"/>
+        <a:font script="Yiii" typeface="Microsoft Yi Baiti"/>
+        <a:font script="Tibt" typeface="Microsoft Himalaya"/>
+        <a:font script="Thaa" typeface="MV Boli"/>
+        <a:font script="Deva" typeface="Mangal"/>
+        <a:font script="Telu" typeface="Gautami"/>
+        <a:font script="Taml" typeface="Latha"/>
+        <a:font script="Syrc" typeface="Estrangelo Edessa"/>
+        <a:font script="Orya" typeface="Kalinga"/>
+        <a:font script="Mlym" typeface="Kartika"/>
+        <a:font script="Laoo" typeface="DokChampa"/>
+        <a:font script="Sinh" typeface="Iskoola Pota"/>
+        <a:font script="Mong" typeface="Mongolian Baiti"/>
+        <a:font script="Viet" typeface="Arial"/>
+        <a:font script="Uigh" typeface="Microsoft Uighur"/>
+        <a:font script="Geor" typeface="Sylfaen"/>
+        <a:font script="Armn" typeface="Arial"/>
+        <a:font script="Bugi" typeface="Leelawadee UI"/>
+        <a:font script="Bopo" typeface="Microsoft JhengHei"/>
+        <a:font script="Java" typeface="Javanese Text"/>
+        <a:font script="Lisu" typeface="Segoe UI"/>
+        <a:font script="Mymr" typeface="Myanmar Text"/>
+        <a:font script="Nkoo" typeface="Ebrima"/>
+        <a:font script="Olck" typeface="Nirmala UI"/>
+        <a:font script="Osma" typeface="Ebrima"/>
+        <a:font script="Phag" typeface="Phagspa"/>
+        <a:font script="Syrn" typeface="Estrangelo Edessa"/>
+        <a:font script="Syrj" typeface="Estrangelo Edessa"/>
+        <a:font script="Syre" typeface="Estrangelo Edessa"/>
+        <a:font script="Sora" typeface="Nirmala UI"/>
+        <a:font script="Tale" typeface="Microsoft Tai Le"/>
+        <a:font script="Talu" typeface="Microsoft New Tai Lue"/>
+        <a:font script="Tfng" typeface="Ebrima"/>
+      </a:minorFont>
+    </a:fontScheme>
+    <a:fmtScheme name="Office">
+      <a:fillStyleLst>
+        <a:solidFill>
+          <a:schemeClr val="phClr"/>
+        </a:solidFill>
+        <a:gradFill rotWithShape="1">
+          <a:gsLst>
+            <a:gs pos="0">
+              <a:schemeClr val="phClr">
+                <a:lumMod val="110000"/>
+                <a:satMod val="105000"/>
+                <a:tint val="67000"/>
+              </a:schemeClr>
+            </a:gs>
+            <a:gs pos="50000">
+              <a:schemeClr val="phClr">
+                <a:lumMod val="105000"/>
+                <a:satMod val="103000"/>
+                <a:tint val="73000"/>
+              </a:schemeClr>
+            </a:gs>
+            <a:gs pos="100000">
+              <a:schemeClr val="phClr">
+                <a:lumMod val="105000"/>
+                <a:satMod val="109000"/>
+                <a:tint val="81000"/>
+              </a:schemeClr>
+            </a:gs>
+          </a:gsLst>
+          <a:lin ang="5400000" scaled="0"/>
+        </a:gradFill>
+        <a:gradFill rotWithShape="1">
+          <a:gsLst>
+            <a:gs pos="0">
+              <a:schemeClr val="phClr">
+                <a:satMod val="103000"/>
+                <a:lumMod val="102000"/>
+                <a:tint val="94000"/>
+              </a:schemeClr>
+            </a:gs>
+            <a:gs pos="50000">
+              <a:schemeClr val="phClr">
+                <a:satMod val="110000"/>
+                <a:lumMod val="100000"/>
+                <a:shade val="100000"/>
+              </a:schemeClr>
+            </a:gs>
+            <a:gs pos="100000">
+              <a:schemeClr val="phClr">
+                <a:lumMod val="99000"/>
+                <a:satMod val="120000"/>
+                <a:shade val="78000"/>
+              </a:schemeClr>
+            </a:gs>
+          </a:gsLst>
+          <a:lin ang="5400000" scaled="0"/>
+        </a:gradFill>
+      </a:fillStyleLst>
+      <a:lnStyleLst>
+        <a:ln w="12700" cap="flat" cmpd="sng" algn="ctr">
+          <a:solidFill>
+            <a:schemeClr val="phClr"/>
+          </a:solidFill>
+          <a:prstDash val="solid"/>
+          <a:miter lim="800000"/>
+        </a:ln>
+        <a:ln w="19050" cap="flat" cmpd="sng" algn="ctr">
+          <a:solidFill>
+            <a:schemeClr val="phClr"/>
+          </a:solidFill>
+          <a:prstDash val="solid"/>
+          <a:miter lim="800000"/>
+        </a:ln>
+        <a:ln w="25400" cap="flat" cmpd="sng" algn="ctr">
+          <a:solidFill>
+            <a:schemeClr val="phClr"/>
+          </a:solidFill>
+          <a:prstDash val="solid"/>
+          <a:miter lim="800000"/>
+        </a:ln>
+      </a:lnStyleLst>
+      <a:effectStyleLst>
+        <a:effectStyle>
+          <a:effectLst/>
+        </a:effectStyle>
+        <a:effectStyle>
+          <a:effectLst/>
+        </a:effectStyle>
+        <a:effectStyle>
+          <a:effectLst>
+            <a:outerShdw blurRad="57150" dist="19050" dir="5400000" algn="ctr" rotWithShape="0">
+              <a:srgbClr val="000000">
+                <a:alpha val="63000"/>
+              </a:srgbClr>
+            </a:outerShdw>
+          </a:effectLst>
+        </a:effectStyle>
+      </a:effectStyleLst>
+      <a:bgFillStyleLst>
+        <a:solidFill>
+          <a:schemeClr val="phClr"/>
+        </a:solidFill>
+        <a:solidFill>
+          <a:schemeClr val="phClr">
+            <a:tint val="95000"/>
+            <a:satMod val="170000"/>
+          </a:schemeClr>
+        </a:solidFill>
+        <a:gradFill rotWithShape="1">
+          <a:gsLst>
+            <a:gs pos="0">
+              <a:schemeClr val="phClr">
+                <a:tint val="93000"/>
+                <a:satMod val="150000"/>
+                <a:shade val="98000"/>
+                <a:lumMod val="102000"/>
+              </a:schemeClr>
+            </a:gs>
+            <a:gs pos="50000">
+              <a:schemeClr val="phClr">
+                <a:tint val="98000"/>
+                <a:satMod val="130000"/>
+                <a:shade val="90000"/>
+                <a:lumMod val="103000"/>
+              </a:schemeClr>
+            </a:gs>
+            <a:gs pos="100000">
+              <a:schemeClr val="phClr">
+                <a:shade val="63000"/>
+                <a:satMod val="120000"/>
+              </a:schemeClr>
+            </a:gs>
+          </a:gsLst>
+          <a:lin ang="5400000" scaled="0"/>
+        </a:gradFill>
+      </a:bgFillStyleLst>
+    </a:fmtScheme>
+  </a:themeElements>
+  <a:objectDefaults>
+    <a:lnDef>
+      <a:spPr/>
+      <a:bodyPr/>
+      <a:lstStyle/>
+      <a:style>
+        <a:lnRef idx="2">
+          <a:schemeClr val="accent1"/>
+        </a:lnRef>
+        <a:fillRef idx="0">
+          <a:schemeClr val="accent1"/>
+        </a:fillRef>
+        <a:effectRef idx="1">
+          <a:schemeClr val="accent1"/>
+        </a:effectRef>
+        <a:fontRef idx="minor">
+          <a:schemeClr val="tx1"/>
+        </a:fontRef>
+      </a:style>
+    </a:lnDef>
+  </a:objectDefaults>
+  <a:extraClrSchemeLst/>
+  <a:extLst>
+    <a:ext uri="{05A4C25C-085E-4340-85A3-A5531E510DB2}">
+      <thm15:themeFamily xmlns:thm15="http://schemas.microsoft.com/office/thememl/2012/main" name="Office Theme" id="{2E142A2C-CD16-42D6-873A-C26D2A0506FA}" vid="{1BDDFF52-6CD6-40A5-AB3C-68EB2F1E4D0A}"/>
+    </a:ext>
+  </a:extLst>
+</a:theme>
 </file>
--- a/docs/chapters/images.pptx
+++ b/docs/chapters/images.pptx
@@ -5,7 +5,7 @@
     <p:sldMasterId id="2147483648" r:id="rId1"/>
   </p:sldMasterIdLst>
   <p:notesMasterIdLst>
-    <p:notesMasterId r:id="rId14"/>
+    <p:notesMasterId r:id="rId19"/>
   </p:notesMasterIdLst>
   <p:sldIdLst>
     <p:sldId id="256" r:id="rId2"/>
@@ -20,6 +20,11 @@
     <p:sldId id="265" r:id="rId11"/>
     <p:sldId id="266" r:id="rId12"/>
     <p:sldId id="267" r:id="rId13"/>
+    <p:sldId id="268" r:id="rId14"/>
+    <p:sldId id="269" r:id="rId15"/>
+    <p:sldId id="270" r:id="rId16"/>
+    <p:sldId id="271" r:id="rId17"/>
+    <p:sldId id="272" r:id="rId18"/>
   </p:sldIdLst>
   <p:sldSz cx="12192000" cy="6858000"/>
   <p:notesSz cx="6858000" cy="9144000"/>
@@ -129,7 +134,7 @@
 <file path=ppt/revisionInfo.xml><?xml version="1.0" encoding="utf-8"?>
 <p1510:revInfo xmlns:a="http://schemas.openxmlformats.org/drawingml/2006/main" xmlns:r="http://schemas.openxmlformats.org/officeDocument/2006/relationships" xmlns:p1510="http://schemas.microsoft.com/office/powerpoint/2015/10/main">
   <p1510:revLst>
-    <p1510:client id="{7D97CB1E-4F7A-4B5D-BAC2-AE8954581E6E}" v="30" dt="2025-06-24T05:58:59.349"/>
+    <p1510:client id="{7D97CB1E-4F7A-4B5D-BAC2-AE8954581E6E}" v="43" dt="2025-06-24T16:21:19.714"/>
   </p1510:revLst>
 </p1510:revInfo>
 </file>
@@ -431,7 +436,7 @@
   <pc:docChgLst>
     <pc:chgData name="Alex Casson" userId="53cffa54-f866-4b4c-8e51-0383f28edfe1" providerId="ADAL" clId="{7D97CB1E-4F7A-4B5D-BAC2-AE8954581E6E}"/>
     <pc:docChg chg="undo custSel addSld modSld">
-      <pc:chgData name="Alex Casson" userId="53cffa54-f866-4b4c-8e51-0383f28edfe1" providerId="ADAL" clId="{7D97CB1E-4F7A-4B5D-BAC2-AE8954581E6E}" dt="2025-06-24T05:59:32.140" v="275" actId="1076"/>
+      <pc:chgData name="Alex Casson" userId="53cffa54-f866-4b4c-8e51-0383f28edfe1" providerId="ADAL" clId="{7D97CB1E-4F7A-4B5D-BAC2-AE8954581E6E}" dt="2025-06-24T16:21:33.884" v="654" actId="14100"/>
       <pc:docMkLst>
         <pc:docMk/>
       </pc:docMkLst>
@@ -951,6 +956,265 @@
             <pc:docMk/>
             <pc:sldMk cId="2381781374" sldId="267"/>
             <ac:picMk id="5" creationId="{12D82434-D5E0-433C-9957-1DCEACA6DAE2}"/>
+          </ac:picMkLst>
+        </pc:picChg>
+      </pc:sldChg>
+      <pc:sldChg chg="addSp delSp new mod">
+        <pc:chgData name="Alex Casson" userId="53cffa54-f866-4b4c-8e51-0383f28edfe1" providerId="ADAL" clId="{7D97CB1E-4F7A-4B5D-BAC2-AE8954581E6E}" dt="2025-06-24T12:55:32.612" v="279" actId="22"/>
+        <pc:sldMkLst>
+          <pc:docMk/>
+          <pc:sldMk cId="3675270851" sldId="268"/>
+        </pc:sldMkLst>
+        <pc:spChg chg="del">
+          <ac:chgData name="Alex Casson" userId="53cffa54-f866-4b4c-8e51-0383f28edfe1" providerId="ADAL" clId="{7D97CB1E-4F7A-4B5D-BAC2-AE8954581E6E}" dt="2025-06-24T12:55:30.837" v="277" actId="478"/>
+          <ac:spMkLst>
+            <pc:docMk/>
+            <pc:sldMk cId="3675270851" sldId="268"/>
+            <ac:spMk id="2" creationId="{4B87F4CE-0846-293F-5FD1-F50DE23D7287}"/>
+          </ac:spMkLst>
+        </pc:spChg>
+        <pc:spChg chg="del">
+          <ac:chgData name="Alex Casson" userId="53cffa54-f866-4b4c-8e51-0383f28edfe1" providerId="ADAL" clId="{7D97CB1E-4F7A-4B5D-BAC2-AE8954581E6E}" dt="2025-06-24T12:55:31.597" v="278" actId="478"/>
+          <ac:spMkLst>
+            <pc:docMk/>
+            <pc:sldMk cId="3675270851" sldId="268"/>
+            <ac:spMk id="3" creationId="{FF53A935-B904-C4D9-10FC-6337C4840FFD}"/>
+          </ac:spMkLst>
+        </pc:spChg>
+        <pc:picChg chg="add">
+          <ac:chgData name="Alex Casson" userId="53cffa54-f866-4b4c-8e51-0383f28edfe1" providerId="ADAL" clId="{7D97CB1E-4F7A-4B5D-BAC2-AE8954581E6E}" dt="2025-06-24T12:55:32.612" v="279" actId="22"/>
+          <ac:picMkLst>
+            <pc:docMk/>
+            <pc:sldMk cId="3675270851" sldId="268"/>
+            <ac:picMk id="5" creationId="{989A8163-A8B1-0E0E-DE5C-5829292FA313}"/>
+          </ac:picMkLst>
+        </pc:picChg>
+      </pc:sldChg>
+      <pc:sldChg chg="addSp delSp modSp new mod">
+        <pc:chgData name="Alex Casson" userId="53cffa54-f866-4b4c-8e51-0383f28edfe1" providerId="ADAL" clId="{7D97CB1E-4F7A-4B5D-BAC2-AE8954581E6E}" dt="2025-06-24T15:58:58.577" v="286" actId="14100"/>
+        <pc:sldMkLst>
+          <pc:docMk/>
+          <pc:sldMk cId="1946310147" sldId="269"/>
+        </pc:sldMkLst>
+        <pc:spChg chg="del">
+          <ac:chgData name="Alex Casson" userId="53cffa54-f866-4b4c-8e51-0383f28edfe1" providerId="ADAL" clId="{7D97CB1E-4F7A-4B5D-BAC2-AE8954581E6E}" dt="2025-06-24T12:58:01.844" v="282" actId="478"/>
+          <ac:spMkLst>
+            <pc:docMk/>
+            <pc:sldMk cId="1946310147" sldId="269"/>
+            <ac:spMk id="2" creationId="{ED3243DC-EA5A-DC2C-3C47-DD1CDBB1BEAD}"/>
+          </ac:spMkLst>
+        </pc:spChg>
+        <pc:spChg chg="del">
+          <ac:chgData name="Alex Casson" userId="53cffa54-f866-4b4c-8e51-0383f28edfe1" providerId="ADAL" clId="{7D97CB1E-4F7A-4B5D-BAC2-AE8954581E6E}" dt="2025-06-24T12:58:01.240" v="281" actId="478"/>
+          <ac:spMkLst>
+            <pc:docMk/>
+            <pc:sldMk cId="1946310147" sldId="269"/>
+            <ac:spMk id="3" creationId="{00924603-EF7E-62C7-74D4-16229F9E35AC}"/>
+          </ac:spMkLst>
+        </pc:spChg>
+        <pc:spChg chg="add mod">
+          <ac:chgData name="Alex Casson" userId="53cffa54-f866-4b4c-8e51-0383f28edfe1" providerId="ADAL" clId="{7D97CB1E-4F7A-4B5D-BAC2-AE8954581E6E}" dt="2025-06-24T15:58:58.577" v="286" actId="14100"/>
+          <ac:spMkLst>
+            <pc:docMk/>
+            <pc:sldMk cId="1946310147" sldId="269"/>
+            <ac:spMk id="6" creationId="{5781A8F1-6C0F-C8BC-A412-409D8ACF4880}"/>
+          </ac:spMkLst>
+        </pc:spChg>
+        <pc:picChg chg="add">
+          <ac:chgData name="Alex Casson" userId="53cffa54-f866-4b4c-8e51-0383f28edfe1" providerId="ADAL" clId="{7D97CB1E-4F7A-4B5D-BAC2-AE8954581E6E}" dt="2025-06-24T12:58:02.690" v="283" actId="22"/>
+          <ac:picMkLst>
+            <pc:docMk/>
+            <pc:sldMk cId="1946310147" sldId="269"/>
+            <ac:picMk id="5" creationId="{6A03D067-EAF3-C3A1-743B-552569E1A05C}"/>
+          </ac:picMkLst>
+        </pc:picChg>
+      </pc:sldChg>
+      <pc:sldChg chg="addSp delSp modSp new mod">
+        <pc:chgData name="Alex Casson" userId="53cffa54-f866-4b4c-8e51-0383f28edfe1" providerId="ADAL" clId="{7D97CB1E-4F7A-4B5D-BAC2-AE8954581E6E}" dt="2025-06-24T16:02:16.623" v="293" actId="14100"/>
+        <pc:sldMkLst>
+          <pc:docMk/>
+          <pc:sldMk cId="1137329714" sldId="270"/>
+        </pc:sldMkLst>
+        <pc:spChg chg="del">
+          <ac:chgData name="Alex Casson" userId="53cffa54-f866-4b4c-8e51-0383f28edfe1" providerId="ADAL" clId="{7D97CB1E-4F7A-4B5D-BAC2-AE8954581E6E}" dt="2025-06-24T16:01:56.648" v="289" actId="478"/>
+          <ac:spMkLst>
+            <pc:docMk/>
+            <pc:sldMk cId="1137329714" sldId="270"/>
+            <ac:spMk id="2" creationId="{AA235A85-A210-7405-6184-F3FDD5038926}"/>
+          </ac:spMkLst>
+        </pc:spChg>
+        <pc:spChg chg="del">
+          <ac:chgData name="Alex Casson" userId="53cffa54-f866-4b4c-8e51-0383f28edfe1" providerId="ADAL" clId="{7D97CB1E-4F7A-4B5D-BAC2-AE8954581E6E}" dt="2025-06-24T16:01:56.106" v="288" actId="478"/>
+          <ac:spMkLst>
+            <pc:docMk/>
+            <pc:sldMk cId="1137329714" sldId="270"/>
+            <ac:spMk id="3" creationId="{48183D3D-D587-31F7-EBAC-F2FA4C035C98}"/>
+          </ac:spMkLst>
+        </pc:spChg>
+        <pc:spChg chg="add mod">
+          <ac:chgData name="Alex Casson" userId="53cffa54-f866-4b4c-8e51-0383f28edfe1" providerId="ADAL" clId="{7D97CB1E-4F7A-4B5D-BAC2-AE8954581E6E}" dt="2025-06-24T16:02:16.623" v="293" actId="14100"/>
+          <ac:spMkLst>
+            <pc:docMk/>
+            <pc:sldMk cId="1137329714" sldId="270"/>
+            <ac:spMk id="6" creationId="{6EC57B4D-5C7F-157D-913C-4CFB87CA586B}"/>
+          </ac:spMkLst>
+        </pc:spChg>
+        <pc:picChg chg="add">
+          <ac:chgData name="Alex Casson" userId="53cffa54-f866-4b4c-8e51-0383f28edfe1" providerId="ADAL" clId="{7D97CB1E-4F7A-4B5D-BAC2-AE8954581E6E}" dt="2025-06-24T16:02:02.898" v="290" actId="22"/>
+          <ac:picMkLst>
+            <pc:docMk/>
+            <pc:sldMk cId="1137329714" sldId="270"/>
+            <ac:picMk id="5" creationId="{AE5FB92C-0164-3FC4-A556-5B1C6A184FC2}"/>
+          </ac:picMkLst>
+        </pc:picChg>
+      </pc:sldChg>
+      <pc:sldChg chg="addSp delSp modSp new mod">
+        <pc:chgData name="Alex Casson" userId="53cffa54-f866-4b4c-8e51-0383f28edfe1" providerId="ADAL" clId="{7D97CB1E-4F7A-4B5D-BAC2-AE8954581E6E}" dt="2025-06-24T16:08:52.225" v="578" actId="20577"/>
+        <pc:sldMkLst>
+          <pc:docMk/>
+          <pc:sldMk cId="1718263740" sldId="271"/>
+        </pc:sldMkLst>
+        <pc:spChg chg="del">
+          <ac:chgData name="Alex Casson" userId="53cffa54-f866-4b4c-8e51-0383f28edfe1" providerId="ADAL" clId="{7D97CB1E-4F7A-4B5D-BAC2-AE8954581E6E}" dt="2025-06-24T16:05:03.331" v="296" actId="478"/>
+          <ac:spMkLst>
+            <pc:docMk/>
+            <pc:sldMk cId="1718263740" sldId="271"/>
+            <ac:spMk id="2" creationId="{561B3B0E-EBA7-687F-C414-106DFA2BE768}"/>
+          </ac:spMkLst>
+        </pc:spChg>
+        <pc:spChg chg="del">
+          <ac:chgData name="Alex Casson" userId="53cffa54-f866-4b4c-8e51-0383f28edfe1" providerId="ADAL" clId="{7D97CB1E-4F7A-4B5D-BAC2-AE8954581E6E}" dt="2025-06-24T16:05:02.361" v="295" actId="478"/>
+          <ac:spMkLst>
+            <pc:docMk/>
+            <pc:sldMk cId="1718263740" sldId="271"/>
+            <ac:spMk id="3" creationId="{23DDC6BA-C870-3FC6-1DE3-C2AE0A9264A4}"/>
+          </ac:spMkLst>
+        </pc:spChg>
+        <pc:spChg chg="add mod">
+          <ac:chgData name="Alex Casson" userId="53cffa54-f866-4b4c-8e51-0383f28edfe1" providerId="ADAL" clId="{7D97CB1E-4F7A-4B5D-BAC2-AE8954581E6E}" dt="2025-06-24T16:05:19.090" v="302" actId="14100"/>
+          <ac:spMkLst>
+            <pc:docMk/>
+            <pc:sldMk cId="1718263740" sldId="271"/>
+            <ac:spMk id="6" creationId="{4FB02F4D-9CB3-04ED-96AD-7AFFD2242948}"/>
+          </ac:spMkLst>
+        </pc:spChg>
+        <pc:spChg chg="add mod">
+          <ac:chgData name="Alex Casson" userId="53cffa54-f866-4b4c-8e51-0383f28edfe1" providerId="ADAL" clId="{7D97CB1E-4F7A-4B5D-BAC2-AE8954581E6E}" dt="2025-06-24T16:06:07.423" v="404" actId="1076"/>
+          <ac:spMkLst>
+            <pc:docMk/>
+            <pc:sldMk cId="1718263740" sldId="271"/>
+            <ac:spMk id="7" creationId="{1CDB2DD8-59A9-AB93-0A20-F96FA87F1979}"/>
+          </ac:spMkLst>
+        </pc:spChg>
+        <pc:spChg chg="add mod">
+          <ac:chgData name="Alex Casson" userId="53cffa54-f866-4b4c-8e51-0383f28edfe1" providerId="ADAL" clId="{7D97CB1E-4F7A-4B5D-BAC2-AE8954581E6E}" dt="2025-06-24T16:06:03.008" v="403" actId="14100"/>
+          <ac:spMkLst>
+            <pc:docMk/>
+            <pc:sldMk cId="1718263740" sldId="271"/>
+            <ac:spMk id="8" creationId="{E7B02875-C3AE-1741-37D5-D6A0219E8362}"/>
+          </ac:spMkLst>
+        </pc:spChg>
+        <pc:spChg chg="add mod">
+          <ac:chgData name="Alex Casson" userId="53cffa54-f866-4b4c-8e51-0383f28edfe1" providerId="ADAL" clId="{7D97CB1E-4F7A-4B5D-BAC2-AE8954581E6E}" dt="2025-06-24T16:08:47.430" v="572" actId="1076"/>
+          <ac:spMkLst>
+            <pc:docMk/>
+            <pc:sldMk cId="1718263740" sldId="271"/>
+            <ac:spMk id="9" creationId="{95D48F15-34E2-E1CE-E4A2-7EF24A01EDC8}"/>
+          </ac:spMkLst>
+        </pc:spChg>
+        <pc:spChg chg="add mod">
+          <ac:chgData name="Alex Casson" userId="53cffa54-f866-4b4c-8e51-0383f28edfe1" providerId="ADAL" clId="{7D97CB1E-4F7A-4B5D-BAC2-AE8954581E6E}" dt="2025-06-24T16:08:49.321" v="575" actId="20577"/>
+          <ac:spMkLst>
+            <pc:docMk/>
+            <pc:sldMk cId="1718263740" sldId="271"/>
+            <ac:spMk id="10" creationId="{14334E4B-5D4A-2EEB-32D9-979DF57C033C}"/>
+          </ac:spMkLst>
+        </pc:spChg>
+        <pc:spChg chg="add mod">
+          <ac:chgData name="Alex Casson" userId="53cffa54-f866-4b4c-8e51-0383f28edfe1" providerId="ADAL" clId="{7D97CB1E-4F7A-4B5D-BAC2-AE8954581E6E}" dt="2025-06-24T16:06:52.890" v="441" actId="14100"/>
+          <ac:spMkLst>
+            <pc:docMk/>
+            <pc:sldMk cId="1718263740" sldId="271"/>
+            <ac:spMk id="11" creationId="{AAFBCCF6-D9A6-8669-548B-9278E48A70AA}"/>
+          </ac:spMkLst>
+        </pc:spChg>
+        <pc:spChg chg="add mod">
+          <ac:chgData name="Alex Casson" userId="53cffa54-f866-4b4c-8e51-0383f28edfe1" providerId="ADAL" clId="{7D97CB1E-4F7A-4B5D-BAC2-AE8954581E6E}" dt="2025-06-24T16:08:52.225" v="578" actId="20577"/>
+          <ac:spMkLst>
+            <pc:docMk/>
+            <pc:sldMk cId="1718263740" sldId="271"/>
+            <ac:spMk id="12" creationId="{9252911D-1C32-2E70-C194-60BEB48A497C}"/>
+          </ac:spMkLst>
+        </pc:spChg>
+        <pc:picChg chg="add mod">
+          <ac:chgData name="Alex Casson" userId="53cffa54-f866-4b4c-8e51-0383f28edfe1" providerId="ADAL" clId="{7D97CB1E-4F7A-4B5D-BAC2-AE8954581E6E}" dt="2025-06-24T16:06:25.530" v="410" actId="1076"/>
+          <ac:picMkLst>
+            <pc:docMk/>
+            <pc:sldMk cId="1718263740" sldId="271"/>
+            <ac:picMk id="5" creationId="{94BB17E5-51ED-3EAC-4716-AA5BC85B6547}"/>
+          </ac:picMkLst>
+        </pc:picChg>
+      </pc:sldChg>
+      <pc:sldChg chg="addSp delSp modSp new mod">
+        <pc:chgData name="Alex Casson" userId="53cffa54-f866-4b4c-8e51-0383f28edfe1" providerId="ADAL" clId="{7D97CB1E-4F7A-4B5D-BAC2-AE8954581E6E}" dt="2025-06-24T16:21:33.884" v="654" actId="14100"/>
+        <pc:sldMkLst>
+          <pc:docMk/>
+          <pc:sldMk cId="2323277968" sldId="272"/>
+        </pc:sldMkLst>
+        <pc:spChg chg="del">
+          <ac:chgData name="Alex Casson" userId="53cffa54-f866-4b4c-8e51-0383f28edfe1" providerId="ADAL" clId="{7D97CB1E-4F7A-4B5D-BAC2-AE8954581E6E}" dt="2025-06-24T16:20:17.480" v="580" actId="478"/>
+          <ac:spMkLst>
+            <pc:docMk/>
+            <pc:sldMk cId="2323277968" sldId="272"/>
+            <ac:spMk id="2" creationId="{0F9AA2C1-C75B-E898-9CEF-C80700A4E6A9}"/>
+          </ac:spMkLst>
+        </pc:spChg>
+        <pc:spChg chg="del">
+          <ac:chgData name="Alex Casson" userId="53cffa54-f866-4b4c-8e51-0383f28edfe1" providerId="ADAL" clId="{7D97CB1E-4F7A-4B5D-BAC2-AE8954581E6E}" dt="2025-06-24T16:20:18.097" v="581" actId="478"/>
+          <ac:spMkLst>
+            <pc:docMk/>
+            <pc:sldMk cId="2323277968" sldId="272"/>
+            <ac:spMk id="3" creationId="{F24BCD37-9886-FB9E-F3D7-145EEE41CBC5}"/>
+          </ac:spMkLst>
+        </pc:spChg>
+        <pc:spChg chg="add mod">
+          <ac:chgData name="Alex Casson" userId="53cffa54-f866-4b4c-8e51-0383f28edfe1" providerId="ADAL" clId="{7D97CB1E-4F7A-4B5D-BAC2-AE8954581E6E}" dt="2025-06-24T16:20:37.678" v="585" actId="14100"/>
+          <ac:spMkLst>
+            <pc:docMk/>
+            <pc:sldMk cId="2323277968" sldId="272"/>
+            <ac:spMk id="6" creationId="{AB2D4920-9A0D-E96E-C393-31C5CC6A1E54}"/>
+          </ac:spMkLst>
+        </pc:spChg>
+        <pc:spChg chg="add mod">
+          <ac:chgData name="Alex Casson" userId="53cffa54-f866-4b4c-8e51-0383f28edfe1" providerId="ADAL" clId="{7D97CB1E-4F7A-4B5D-BAC2-AE8954581E6E}" dt="2025-06-24T16:20:54.588" v="619" actId="1076"/>
+          <ac:spMkLst>
+            <pc:docMk/>
+            <pc:sldMk cId="2323277968" sldId="272"/>
+            <ac:spMk id="7" creationId="{3D3272D1-0FF4-0A94-86FE-5387CF2D3A21}"/>
+          </ac:spMkLst>
+        </pc:spChg>
+        <pc:spChg chg="add mod">
+          <ac:chgData name="Alex Casson" userId="53cffa54-f866-4b4c-8e51-0383f28edfe1" providerId="ADAL" clId="{7D97CB1E-4F7A-4B5D-BAC2-AE8954581E6E}" dt="2025-06-24T16:21:17.560" v="626" actId="14100"/>
+          <ac:spMkLst>
+            <pc:docMk/>
+            <pc:sldMk cId="2323277968" sldId="272"/>
+            <ac:spMk id="8" creationId="{EF9DF620-C602-9D2F-902D-CD25207C2CAE}"/>
+          </ac:spMkLst>
+        </pc:spChg>
+        <pc:spChg chg="add mod">
+          <ac:chgData name="Alex Casson" userId="53cffa54-f866-4b4c-8e51-0383f28edfe1" providerId="ADAL" clId="{7D97CB1E-4F7A-4B5D-BAC2-AE8954581E6E}" dt="2025-06-24T16:21:33.884" v="654" actId="14100"/>
+          <ac:spMkLst>
+            <pc:docMk/>
+            <pc:sldMk cId="2323277968" sldId="272"/>
+            <ac:spMk id="9" creationId="{6BC487D4-140A-77D6-45D5-38B6F31EE99D}"/>
+          </ac:spMkLst>
+        </pc:spChg>
+        <pc:picChg chg="add mod">
+          <ac:chgData name="Alex Casson" userId="53cffa54-f866-4b4c-8e51-0383f28edfe1" providerId="ADAL" clId="{7D97CB1E-4F7A-4B5D-BAC2-AE8954581E6E}" dt="2025-06-24T16:21:02.352" v="622" actId="1076"/>
+          <ac:picMkLst>
+            <pc:docMk/>
+            <pc:sldMk cId="2323277968" sldId="272"/>
+            <ac:picMk id="5" creationId="{A76C55FF-D198-AE52-ABE8-2CB06EEB97E3}"/>
           </ac:picMkLst>
         </pc:picChg>
       </pc:sldChg>
@@ -5516,6 +5780,915 @@
     <p:extLst>
       <p:ext uri="{BB962C8B-B14F-4D97-AF65-F5344CB8AC3E}">
         <p14:creationId xmlns:p14="http://schemas.microsoft.com/office/powerpoint/2010/main" val="2381781374"/>
+      </p:ext>
+    </p:extLst>
+  </p:cSld>
+  <p:clrMapOvr>
+    <a:masterClrMapping/>
+  </p:clrMapOvr>
+</p:sld>
+</file>
+
+<file path=ppt/slides/slide13.xml><?xml version="1.0" encoding="utf-8"?>
+<p:sld xmlns:a="http://schemas.openxmlformats.org/drawingml/2006/main" xmlns:r="http://schemas.openxmlformats.org/officeDocument/2006/relationships" xmlns:p="http://schemas.openxmlformats.org/presentationml/2006/main">
+  <p:cSld>
+    <p:spTree>
+      <p:nvGrpSpPr>
+        <p:cNvPr id="1" name=""/>
+        <p:cNvGrpSpPr/>
+        <p:nvPr/>
+      </p:nvGrpSpPr>
+      <p:grpSpPr>
+        <a:xfrm>
+          <a:off x="0" y="0"/>
+          <a:ext cx="0" cy="0"/>
+          <a:chOff x="0" y="0"/>
+          <a:chExt cx="0" cy="0"/>
+        </a:xfrm>
+      </p:grpSpPr>
+      <p:pic>
+        <p:nvPicPr>
+          <p:cNvPr id="5" name="Picture 4">
+            <a:extLst>
+              <a:ext uri="{FF2B5EF4-FFF2-40B4-BE49-F238E27FC236}">
+                <a16:creationId xmlns:a16="http://schemas.microsoft.com/office/drawing/2014/main" id="{989A8163-A8B1-0E0E-DE5C-5829292FA313}"/>
+              </a:ext>
+            </a:extLst>
+          </p:cNvPr>
+          <p:cNvPicPr>
+            <a:picLocks noChangeAspect="1"/>
+          </p:cNvPicPr>
+          <p:nvPr/>
+        </p:nvPicPr>
+        <p:blipFill>
+          <a:blip r:embed="rId2"/>
+          <a:stretch>
+            <a:fillRect/>
+          </a:stretch>
+        </p:blipFill>
+        <p:spPr>
+          <a:xfrm>
+            <a:off x="0" y="303068"/>
+            <a:ext cx="12192000" cy="6251864"/>
+          </a:xfrm>
+          <a:prstGeom prst="rect">
+            <a:avLst/>
+          </a:prstGeom>
+        </p:spPr>
+      </p:pic>
+    </p:spTree>
+    <p:extLst>
+      <p:ext uri="{BB962C8B-B14F-4D97-AF65-F5344CB8AC3E}">
+        <p14:creationId xmlns:p14="http://schemas.microsoft.com/office/powerpoint/2010/main" val="3675270851"/>
+      </p:ext>
+    </p:extLst>
+  </p:cSld>
+  <p:clrMapOvr>
+    <a:masterClrMapping/>
+  </p:clrMapOvr>
+</p:sld>
+</file>
+
+<file path=ppt/slides/slide14.xml><?xml version="1.0" encoding="utf-8"?>
+<p:sld xmlns:a="http://schemas.openxmlformats.org/drawingml/2006/main" xmlns:r="http://schemas.openxmlformats.org/officeDocument/2006/relationships" xmlns:p="http://schemas.openxmlformats.org/presentationml/2006/main">
+  <p:cSld>
+    <p:spTree>
+      <p:nvGrpSpPr>
+        <p:cNvPr id="1" name=""/>
+        <p:cNvGrpSpPr/>
+        <p:nvPr/>
+      </p:nvGrpSpPr>
+      <p:grpSpPr>
+        <a:xfrm>
+          <a:off x="0" y="0"/>
+          <a:ext cx="0" cy="0"/>
+          <a:chOff x="0" y="0"/>
+          <a:chExt cx="0" cy="0"/>
+        </a:xfrm>
+      </p:grpSpPr>
+      <p:pic>
+        <p:nvPicPr>
+          <p:cNvPr id="5" name="Picture 4">
+            <a:extLst>
+              <a:ext uri="{FF2B5EF4-FFF2-40B4-BE49-F238E27FC236}">
+                <a16:creationId xmlns:a16="http://schemas.microsoft.com/office/drawing/2014/main" id="{6A03D067-EAF3-C3A1-743B-552569E1A05C}"/>
+              </a:ext>
+            </a:extLst>
+          </p:cNvPr>
+          <p:cNvPicPr>
+            <a:picLocks noChangeAspect="1"/>
+          </p:cNvPicPr>
+          <p:nvPr/>
+        </p:nvPicPr>
+        <p:blipFill>
+          <a:blip r:embed="rId2"/>
+          <a:stretch>
+            <a:fillRect/>
+          </a:stretch>
+        </p:blipFill>
+        <p:spPr>
+          <a:xfrm>
+            <a:off x="952500" y="0"/>
+            <a:ext cx="10287000" cy="6858000"/>
+          </a:xfrm>
+          <a:prstGeom prst="rect">
+            <a:avLst/>
+          </a:prstGeom>
+        </p:spPr>
+      </p:pic>
+      <p:sp>
+        <p:nvSpPr>
+          <p:cNvPr id="6" name="Rectangle 5">
+            <a:extLst>
+              <a:ext uri="{FF2B5EF4-FFF2-40B4-BE49-F238E27FC236}">
+                <a16:creationId xmlns:a16="http://schemas.microsoft.com/office/drawing/2014/main" id="{5781A8F1-6C0F-C8BC-A412-409D8ACF4880}"/>
+              </a:ext>
+            </a:extLst>
+          </p:cNvPr>
+          <p:cNvSpPr/>
+          <p:nvPr/>
+        </p:nvSpPr>
+        <p:spPr>
+          <a:xfrm>
+            <a:off x="2171387" y="2965957"/>
+            <a:ext cx="1583490" cy="244172"/>
+          </a:xfrm>
+          <a:prstGeom prst="rect">
+            <a:avLst/>
+          </a:prstGeom>
+          <a:noFill/>
+          <a:ln w="28575">
+            <a:solidFill>
+              <a:srgbClr val="C00000"/>
+            </a:solidFill>
+          </a:ln>
+        </p:spPr>
+        <p:style>
+          <a:lnRef idx="2">
+            <a:schemeClr val="accent1">
+              <a:shade val="15000"/>
+            </a:schemeClr>
+          </a:lnRef>
+          <a:fillRef idx="1">
+            <a:schemeClr val="accent1"/>
+          </a:fillRef>
+          <a:effectRef idx="0">
+            <a:schemeClr val="accent1"/>
+          </a:effectRef>
+          <a:fontRef idx="minor">
+            <a:schemeClr val="lt1"/>
+          </a:fontRef>
+        </p:style>
+        <p:txBody>
+          <a:bodyPr rtlCol="0" anchor="ctr"/>
+          <a:lstStyle/>
+          <a:p>
+            <a:pPr algn="ctr"/>
+            <a:endParaRPr lang="en-GB"/>
+          </a:p>
+        </p:txBody>
+      </p:sp>
+    </p:spTree>
+    <p:extLst>
+      <p:ext uri="{BB962C8B-B14F-4D97-AF65-F5344CB8AC3E}">
+        <p14:creationId xmlns:p14="http://schemas.microsoft.com/office/powerpoint/2010/main" val="1946310147"/>
+      </p:ext>
+    </p:extLst>
+  </p:cSld>
+  <p:clrMapOvr>
+    <a:masterClrMapping/>
+  </p:clrMapOvr>
+</p:sld>
+</file>
+
+<file path=ppt/slides/slide15.xml><?xml version="1.0" encoding="utf-8"?>
+<p:sld xmlns:a="http://schemas.openxmlformats.org/drawingml/2006/main" xmlns:r="http://schemas.openxmlformats.org/officeDocument/2006/relationships" xmlns:p="http://schemas.openxmlformats.org/presentationml/2006/main">
+  <p:cSld>
+    <p:spTree>
+      <p:nvGrpSpPr>
+        <p:cNvPr id="1" name=""/>
+        <p:cNvGrpSpPr/>
+        <p:nvPr/>
+      </p:nvGrpSpPr>
+      <p:grpSpPr>
+        <a:xfrm>
+          <a:off x="0" y="0"/>
+          <a:ext cx="0" cy="0"/>
+          <a:chOff x="0" y="0"/>
+          <a:chExt cx="0" cy="0"/>
+        </a:xfrm>
+      </p:grpSpPr>
+      <p:pic>
+        <p:nvPicPr>
+          <p:cNvPr id="5" name="Picture 4">
+            <a:extLst>
+              <a:ext uri="{FF2B5EF4-FFF2-40B4-BE49-F238E27FC236}">
+                <a16:creationId xmlns:a16="http://schemas.microsoft.com/office/drawing/2014/main" id="{AE5FB92C-0164-3FC4-A556-5B1C6A184FC2}"/>
+              </a:ext>
+            </a:extLst>
+          </p:cNvPr>
+          <p:cNvPicPr>
+            <a:picLocks noChangeAspect="1"/>
+          </p:cNvPicPr>
+          <p:nvPr/>
+        </p:nvPicPr>
+        <p:blipFill>
+          <a:blip r:embed="rId2"/>
+          <a:stretch>
+            <a:fillRect/>
+          </a:stretch>
+        </p:blipFill>
+        <p:spPr>
+          <a:xfrm>
+            <a:off x="952500" y="0"/>
+            <a:ext cx="10287000" cy="6858000"/>
+          </a:xfrm>
+          <a:prstGeom prst="rect">
+            <a:avLst/>
+          </a:prstGeom>
+        </p:spPr>
+      </p:pic>
+      <p:sp>
+        <p:nvSpPr>
+          <p:cNvPr id="6" name="Rectangle 5">
+            <a:extLst>
+              <a:ext uri="{FF2B5EF4-FFF2-40B4-BE49-F238E27FC236}">
+                <a16:creationId xmlns:a16="http://schemas.microsoft.com/office/drawing/2014/main" id="{6EC57B4D-5C7F-157D-913C-4CFB87CA586B}"/>
+              </a:ext>
+            </a:extLst>
+          </p:cNvPr>
+          <p:cNvSpPr/>
+          <p:nvPr/>
+        </p:nvSpPr>
+        <p:spPr>
+          <a:xfrm>
+            <a:off x="4603301" y="4454288"/>
+            <a:ext cx="1836409" cy="341447"/>
+          </a:xfrm>
+          <a:prstGeom prst="rect">
+            <a:avLst/>
+          </a:prstGeom>
+          <a:noFill/>
+          <a:ln w="28575">
+            <a:solidFill>
+              <a:srgbClr val="C00000"/>
+            </a:solidFill>
+          </a:ln>
+        </p:spPr>
+        <p:style>
+          <a:lnRef idx="2">
+            <a:schemeClr val="accent1">
+              <a:shade val="15000"/>
+            </a:schemeClr>
+          </a:lnRef>
+          <a:fillRef idx="1">
+            <a:schemeClr val="accent1"/>
+          </a:fillRef>
+          <a:effectRef idx="0">
+            <a:schemeClr val="accent1"/>
+          </a:effectRef>
+          <a:fontRef idx="minor">
+            <a:schemeClr val="lt1"/>
+          </a:fontRef>
+        </p:style>
+        <p:txBody>
+          <a:bodyPr rtlCol="0" anchor="ctr"/>
+          <a:lstStyle/>
+          <a:p>
+            <a:pPr algn="ctr"/>
+            <a:endParaRPr lang="en-GB"/>
+          </a:p>
+        </p:txBody>
+      </p:sp>
+    </p:spTree>
+    <p:extLst>
+      <p:ext uri="{BB962C8B-B14F-4D97-AF65-F5344CB8AC3E}">
+        <p14:creationId xmlns:p14="http://schemas.microsoft.com/office/powerpoint/2010/main" val="1137329714"/>
+      </p:ext>
+    </p:extLst>
+  </p:cSld>
+  <p:clrMapOvr>
+    <a:masterClrMapping/>
+  </p:clrMapOvr>
+</p:sld>
+</file>
+
+<file path=ppt/slides/slide16.xml><?xml version="1.0" encoding="utf-8"?>
+<p:sld xmlns:a="http://schemas.openxmlformats.org/drawingml/2006/main" xmlns:r="http://schemas.openxmlformats.org/officeDocument/2006/relationships" xmlns:p="http://schemas.openxmlformats.org/presentationml/2006/main">
+  <p:cSld>
+    <p:spTree>
+      <p:nvGrpSpPr>
+        <p:cNvPr id="1" name=""/>
+        <p:cNvGrpSpPr/>
+        <p:nvPr/>
+      </p:nvGrpSpPr>
+      <p:grpSpPr>
+        <a:xfrm>
+          <a:off x="0" y="0"/>
+          <a:ext cx="0" cy="0"/>
+          <a:chOff x="0" y="0"/>
+          <a:chExt cx="0" cy="0"/>
+        </a:xfrm>
+      </p:grpSpPr>
+      <p:pic>
+        <p:nvPicPr>
+          <p:cNvPr id="5" name="Picture 4">
+            <a:extLst>
+              <a:ext uri="{FF2B5EF4-FFF2-40B4-BE49-F238E27FC236}">
+                <a16:creationId xmlns:a16="http://schemas.microsoft.com/office/drawing/2014/main" id="{94BB17E5-51ED-3EAC-4716-AA5BC85B6547}"/>
+              </a:ext>
+            </a:extLst>
+          </p:cNvPr>
+          <p:cNvPicPr>
+            <a:picLocks noChangeAspect="1"/>
+          </p:cNvPicPr>
+          <p:nvPr/>
+        </p:nvPicPr>
+        <p:blipFill>
+          <a:blip r:embed="rId2"/>
+          <a:stretch>
+            <a:fillRect/>
+          </a:stretch>
+        </p:blipFill>
+        <p:spPr>
+          <a:xfrm>
+            <a:off x="952500" y="0"/>
+            <a:ext cx="10287000" cy="6858000"/>
+          </a:xfrm>
+          <a:prstGeom prst="rect">
+            <a:avLst/>
+          </a:prstGeom>
+        </p:spPr>
+      </p:pic>
+      <p:sp>
+        <p:nvSpPr>
+          <p:cNvPr id="6" name="Rectangle 5">
+            <a:extLst>
+              <a:ext uri="{FF2B5EF4-FFF2-40B4-BE49-F238E27FC236}">
+                <a16:creationId xmlns:a16="http://schemas.microsoft.com/office/drawing/2014/main" id="{4FB02F4D-9CB3-04ED-96AD-7AFFD2242948}"/>
+              </a:ext>
+            </a:extLst>
+          </p:cNvPr>
+          <p:cNvSpPr/>
+          <p:nvPr/>
+        </p:nvSpPr>
+        <p:spPr>
+          <a:xfrm>
+            <a:off x="1315353" y="553497"/>
+            <a:ext cx="639907" cy="263626"/>
+          </a:xfrm>
+          <a:prstGeom prst="rect">
+            <a:avLst/>
+          </a:prstGeom>
+          <a:noFill/>
+          <a:ln w="28575">
+            <a:solidFill>
+              <a:srgbClr val="C00000"/>
+            </a:solidFill>
+          </a:ln>
+        </p:spPr>
+        <p:style>
+          <a:lnRef idx="2">
+            <a:schemeClr val="accent1">
+              <a:shade val="15000"/>
+            </a:schemeClr>
+          </a:lnRef>
+          <a:fillRef idx="1">
+            <a:schemeClr val="accent1"/>
+          </a:fillRef>
+          <a:effectRef idx="0">
+            <a:schemeClr val="accent1"/>
+          </a:effectRef>
+          <a:fontRef idx="minor">
+            <a:schemeClr val="lt1"/>
+          </a:fontRef>
+        </p:style>
+        <p:txBody>
+          <a:bodyPr rtlCol="0" anchor="ctr"/>
+          <a:lstStyle/>
+          <a:p>
+            <a:pPr algn="ctr"/>
+            <a:endParaRPr lang="en-GB"/>
+          </a:p>
+        </p:txBody>
+      </p:sp>
+      <p:sp>
+        <p:nvSpPr>
+          <p:cNvPr id="7" name="TextBox 6">
+            <a:extLst>
+              <a:ext uri="{FF2B5EF4-FFF2-40B4-BE49-F238E27FC236}">
+                <a16:creationId xmlns:a16="http://schemas.microsoft.com/office/drawing/2014/main" id="{1CDB2DD8-59A9-AB93-0A20-F96FA87F1979}"/>
+              </a:ext>
+            </a:extLst>
+          </p:cNvPr>
+          <p:cNvSpPr txBox="1"/>
+          <p:nvPr/>
+        </p:nvSpPr>
+        <p:spPr>
+          <a:xfrm>
+            <a:off x="1955260" y="456220"/>
+            <a:ext cx="1429966" cy="1200329"/>
+          </a:xfrm>
+          <a:prstGeom prst="rect">
+            <a:avLst/>
+          </a:prstGeom>
+          <a:noFill/>
+        </p:spPr>
+        <p:txBody>
+          <a:bodyPr wrap="square" rtlCol="0">
+            <a:spAutoFit/>
+          </a:bodyPr>
+          <a:lstStyle/>
+          <a:p>
+            <a:r>
+              <a:rPr lang="en-GB" dirty="0">
+                <a:solidFill>
+                  <a:srgbClr val="C00000"/>
+                </a:solidFill>
+              </a:rPr>
+              <a:t>Name of the folder that’s been opened</a:t>
+            </a:r>
+          </a:p>
+        </p:txBody>
+      </p:sp>
+      <p:sp>
+        <p:nvSpPr>
+          <p:cNvPr id="8" name="TextBox 7">
+            <a:extLst>
+              <a:ext uri="{FF2B5EF4-FFF2-40B4-BE49-F238E27FC236}">
+                <a16:creationId xmlns:a16="http://schemas.microsoft.com/office/drawing/2014/main" id="{E7B02875-C3AE-1741-37D5-D6A0219E8362}"/>
+              </a:ext>
+            </a:extLst>
+          </p:cNvPr>
+          <p:cNvSpPr txBox="1"/>
+          <p:nvPr/>
+        </p:nvSpPr>
+        <p:spPr>
+          <a:xfrm>
+            <a:off x="1315353" y="1845658"/>
+            <a:ext cx="2069873" cy="923330"/>
+          </a:xfrm>
+          <a:prstGeom prst="rect">
+            <a:avLst/>
+          </a:prstGeom>
+          <a:noFill/>
+        </p:spPr>
+        <p:txBody>
+          <a:bodyPr wrap="square" rtlCol="0">
+            <a:spAutoFit/>
+          </a:bodyPr>
+          <a:lstStyle/>
+          <a:p>
+            <a:r>
+              <a:rPr lang="en-GB" dirty="0">
+                <a:solidFill>
+                  <a:srgbClr val="C00000"/>
+                </a:solidFill>
+              </a:rPr>
+              <a:t>Files in the folder (if any) will appear here</a:t>
+            </a:r>
+          </a:p>
+        </p:txBody>
+      </p:sp>
+      <p:sp>
+        <p:nvSpPr>
+          <p:cNvPr id="9" name="Rectangle 8">
+            <a:extLst>
+              <a:ext uri="{FF2B5EF4-FFF2-40B4-BE49-F238E27FC236}">
+                <a16:creationId xmlns:a16="http://schemas.microsoft.com/office/drawing/2014/main" id="{95D48F15-34E2-E1CE-E4A2-7EF24A01EDC8}"/>
+              </a:ext>
+            </a:extLst>
+          </p:cNvPr>
+          <p:cNvSpPr/>
+          <p:nvPr/>
+        </p:nvSpPr>
+        <p:spPr>
+          <a:xfrm>
+            <a:off x="4055311" y="2399656"/>
+            <a:ext cx="1022528" cy="339489"/>
+          </a:xfrm>
+          <a:prstGeom prst="rect">
+            <a:avLst/>
+          </a:prstGeom>
+          <a:noFill/>
+          <a:ln w="28575">
+            <a:solidFill>
+              <a:srgbClr val="C00000"/>
+            </a:solidFill>
+          </a:ln>
+        </p:spPr>
+        <p:style>
+          <a:lnRef idx="2">
+            <a:schemeClr val="accent1">
+              <a:shade val="15000"/>
+            </a:schemeClr>
+          </a:lnRef>
+          <a:fillRef idx="1">
+            <a:schemeClr val="accent1"/>
+          </a:fillRef>
+          <a:effectRef idx="0">
+            <a:schemeClr val="accent1"/>
+          </a:effectRef>
+          <a:fontRef idx="minor">
+            <a:schemeClr val="lt1"/>
+          </a:fontRef>
+        </p:style>
+        <p:txBody>
+          <a:bodyPr rtlCol="0" anchor="ctr"/>
+          <a:lstStyle/>
+          <a:p>
+            <a:pPr algn="ctr"/>
+            <a:endParaRPr lang="en-GB"/>
+          </a:p>
+        </p:txBody>
+      </p:sp>
+      <p:sp>
+        <p:nvSpPr>
+          <p:cNvPr id="10" name="TextBox 9">
+            <a:extLst>
+              <a:ext uri="{FF2B5EF4-FFF2-40B4-BE49-F238E27FC236}">
+                <a16:creationId xmlns:a16="http://schemas.microsoft.com/office/drawing/2014/main" id="{14334E4B-5D4A-2EEB-32D9-979DF57C033C}"/>
+              </a:ext>
+            </a:extLst>
+          </p:cNvPr>
+          <p:cNvSpPr txBox="1"/>
+          <p:nvPr/>
+        </p:nvSpPr>
+        <p:spPr>
+          <a:xfrm>
+            <a:off x="5094457" y="2399656"/>
+            <a:ext cx="2201288" cy="369332"/>
+          </a:xfrm>
+          <a:prstGeom prst="rect">
+            <a:avLst/>
+          </a:prstGeom>
+          <a:noFill/>
+        </p:spPr>
+        <p:txBody>
+          <a:bodyPr wrap="square" rtlCol="0">
+            <a:spAutoFit/>
+          </a:bodyPr>
+          <a:lstStyle/>
+          <a:p>
+            <a:r>
+              <a:rPr lang="en-GB" dirty="0">
+                <a:solidFill>
+                  <a:srgbClr val="C00000"/>
+                </a:solidFill>
+              </a:rPr>
+              <a:t>1. Click New File…</a:t>
+            </a:r>
+          </a:p>
+        </p:txBody>
+      </p:sp>
+      <p:sp>
+        <p:nvSpPr>
+          <p:cNvPr id="11" name="Rectangle 10">
+            <a:extLst>
+              <a:ext uri="{FF2B5EF4-FFF2-40B4-BE49-F238E27FC236}">
+                <a16:creationId xmlns:a16="http://schemas.microsoft.com/office/drawing/2014/main" id="{AAFBCCF6-D9A6-8669-548B-9278E48A70AA}"/>
+              </a:ext>
+            </a:extLst>
+          </p:cNvPr>
+          <p:cNvSpPr/>
+          <p:nvPr/>
+        </p:nvSpPr>
+        <p:spPr>
+          <a:xfrm>
+            <a:off x="3513869" y="214009"/>
+            <a:ext cx="1022528" cy="411955"/>
+          </a:xfrm>
+          <a:prstGeom prst="rect">
+            <a:avLst/>
+          </a:prstGeom>
+          <a:noFill/>
+          <a:ln w="28575">
+            <a:solidFill>
+              <a:srgbClr val="C00000"/>
+            </a:solidFill>
+          </a:ln>
+        </p:spPr>
+        <p:style>
+          <a:lnRef idx="2">
+            <a:schemeClr val="accent1">
+              <a:shade val="15000"/>
+            </a:schemeClr>
+          </a:lnRef>
+          <a:fillRef idx="1">
+            <a:schemeClr val="accent1"/>
+          </a:fillRef>
+          <a:effectRef idx="0">
+            <a:schemeClr val="accent1"/>
+          </a:effectRef>
+          <a:fontRef idx="minor">
+            <a:schemeClr val="lt1"/>
+          </a:fontRef>
+        </p:style>
+        <p:txBody>
+          <a:bodyPr rtlCol="0" anchor="ctr"/>
+          <a:lstStyle/>
+          <a:p>
+            <a:pPr algn="ctr"/>
+            <a:endParaRPr lang="en-GB"/>
+          </a:p>
+        </p:txBody>
+      </p:sp>
+      <p:sp>
+        <p:nvSpPr>
+          <p:cNvPr id="12" name="TextBox 11">
+            <a:extLst>
+              <a:ext uri="{FF2B5EF4-FFF2-40B4-BE49-F238E27FC236}">
+                <a16:creationId xmlns:a16="http://schemas.microsoft.com/office/drawing/2014/main" id="{9252911D-1C32-2E70-C194-60BEB48A497C}"/>
+              </a:ext>
+            </a:extLst>
+          </p:cNvPr>
+          <p:cNvSpPr txBox="1"/>
+          <p:nvPr/>
+        </p:nvSpPr>
+        <p:spPr>
+          <a:xfrm>
+            <a:off x="4516628" y="235320"/>
+            <a:ext cx="6631270" cy="646331"/>
+          </a:xfrm>
+          <a:prstGeom prst="rect">
+            <a:avLst/>
+          </a:prstGeom>
+          <a:noFill/>
+        </p:spPr>
+        <p:txBody>
+          <a:bodyPr wrap="square" rtlCol="0">
+            <a:spAutoFit/>
+          </a:bodyPr>
+          <a:lstStyle/>
+          <a:p>
+            <a:r>
+              <a:rPr lang="en-GB" dirty="0">
+                <a:solidFill>
+                  <a:srgbClr val="C00000"/>
+                </a:solidFill>
+              </a:rPr>
+              <a:t>2. Enter file name here (it will appear after you click New File…)</a:t>
+            </a:r>
+          </a:p>
+          <a:p>
+            <a:r>
+              <a:rPr lang="en-GB" dirty="0">
+                <a:solidFill>
+                  <a:srgbClr val="C00000"/>
+                </a:solidFill>
+              </a:rPr>
+              <a:t>                   Remember to include the extension</a:t>
+            </a:r>
+          </a:p>
+        </p:txBody>
+      </p:sp>
+    </p:spTree>
+    <p:extLst>
+      <p:ext uri="{BB962C8B-B14F-4D97-AF65-F5344CB8AC3E}">
+        <p14:creationId xmlns:p14="http://schemas.microsoft.com/office/powerpoint/2010/main" val="1718263740"/>
+      </p:ext>
+    </p:extLst>
+  </p:cSld>
+  <p:clrMapOvr>
+    <a:masterClrMapping/>
+  </p:clrMapOvr>
+</p:sld>
+</file>
+
+<file path=ppt/slides/slide17.xml><?xml version="1.0" encoding="utf-8"?>
+<p:sld xmlns:a="http://schemas.openxmlformats.org/drawingml/2006/main" xmlns:r="http://schemas.openxmlformats.org/officeDocument/2006/relationships" xmlns:p="http://schemas.openxmlformats.org/presentationml/2006/main">
+  <p:cSld>
+    <p:spTree>
+      <p:nvGrpSpPr>
+        <p:cNvPr id="1" name=""/>
+        <p:cNvGrpSpPr/>
+        <p:nvPr/>
+      </p:nvGrpSpPr>
+      <p:grpSpPr>
+        <a:xfrm>
+          <a:off x="0" y="0"/>
+          <a:ext cx="0" cy="0"/>
+          <a:chOff x="0" y="0"/>
+          <a:chExt cx="0" cy="0"/>
+        </a:xfrm>
+      </p:grpSpPr>
+      <p:pic>
+        <p:nvPicPr>
+          <p:cNvPr id="5" name="Picture 4">
+            <a:extLst>
+              <a:ext uri="{FF2B5EF4-FFF2-40B4-BE49-F238E27FC236}">
+                <a16:creationId xmlns:a16="http://schemas.microsoft.com/office/drawing/2014/main" id="{A76C55FF-D198-AE52-ABE8-2CB06EEB97E3}"/>
+              </a:ext>
+            </a:extLst>
+          </p:cNvPr>
+          <p:cNvPicPr>
+            <a:picLocks noChangeAspect="1"/>
+          </p:cNvPicPr>
+          <p:nvPr/>
+        </p:nvPicPr>
+        <p:blipFill>
+          <a:blip r:embed="rId2"/>
+          <a:stretch>
+            <a:fillRect/>
+          </a:stretch>
+        </p:blipFill>
+        <p:spPr>
+          <a:xfrm>
+            <a:off x="952500" y="0"/>
+            <a:ext cx="10287000" cy="6858000"/>
+          </a:xfrm>
+          <a:prstGeom prst="rect">
+            <a:avLst/>
+          </a:prstGeom>
+        </p:spPr>
+      </p:pic>
+      <p:sp>
+        <p:nvSpPr>
+          <p:cNvPr id="6" name="Rectangle 5">
+            <a:extLst>
+              <a:ext uri="{FF2B5EF4-FFF2-40B4-BE49-F238E27FC236}">
+                <a16:creationId xmlns:a16="http://schemas.microsoft.com/office/drawing/2014/main" id="{AB2D4920-9A0D-E96E-C393-31C5CC6A1E54}"/>
+              </a:ext>
+            </a:extLst>
+          </p:cNvPr>
+          <p:cNvSpPr/>
+          <p:nvPr/>
+        </p:nvSpPr>
+        <p:spPr>
+          <a:xfrm>
+            <a:off x="3640328" y="739303"/>
+            <a:ext cx="7390838" cy="2689697"/>
+          </a:xfrm>
+          <a:prstGeom prst="rect">
+            <a:avLst/>
+          </a:prstGeom>
+          <a:noFill/>
+          <a:ln w="28575">
+            <a:solidFill>
+              <a:srgbClr val="C00000"/>
+            </a:solidFill>
+          </a:ln>
+        </p:spPr>
+        <p:style>
+          <a:lnRef idx="2">
+            <a:schemeClr val="accent1">
+              <a:shade val="15000"/>
+            </a:schemeClr>
+          </a:lnRef>
+          <a:fillRef idx="1">
+            <a:schemeClr val="accent1"/>
+          </a:fillRef>
+          <a:effectRef idx="0">
+            <a:schemeClr val="accent1"/>
+          </a:effectRef>
+          <a:fontRef idx="minor">
+            <a:schemeClr val="lt1"/>
+          </a:fontRef>
+        </p:style>
+        <p:txBody>
+          <a:bodyPr rtlCol="0" anchor="ctr"/>
+          <a:lstStyle/>
+          <a:p>
+            <a:pPr algn="ctr"/>
+            <a:endParaRPr lang="en-GB"/>
+          </a:p>
+        </p:txBody>
+      </p:sp>
+      <p:sp>
+        <p:nvSpPr>
+          <p:cNvPr id="7" name="TextBox 6">
+            <a:extLst>
+              <a:ext uri="{FF2B5EF4-FFF2-40B4-BE49-F238E27FC236}">
+                <a16:creationId xmlns:a16="http://schemas.microsoft.com/office/drawing/2014/main" id="{3D3272D1-0FF4-0A94-86FE-5387CF2D3A21}"/>
+              </a:ext>
+            </a:extLst>
+          </p:cNvPr>
+          <p:cNvSpPr txBox="1"/>
+          <p:nvPr/>
+        </p:nvSpPr>
+        <p:spPr>
+          <a:xfrm>
+            <a:off x="5600903" y="2084151"/>
+            <a:ext cx="3689620" cy="369332"/>
+          </a:xfrm>
+          <a:prstGeom prst="rect">
+            <a:avLst/>
+          </a:prstGeom>
+          <a:noFill/>
+        </p:spPr>
+        <p:txBody>
+          <a:bodyPr wrap="square" rtlCol="0">
+            <a:spAutoFit/>
+          </a:bodyPr>
+          <a:lstStyle/>
+          <a:p>
+            <a:r>
+              <a:rPr lang="en-GB" dirty="0">
+                <a:solidFill>
+                  <a:srgbClr val="C00000"/>
+                </a:solidFill>
+              </a:rPr>
+              <a:t>Area to start entering commands</a:t>
+            </a:r>
+          </a:p>
+        </p:txBody>
+      </p:sp>
+      <p:sp>
+        <p:nvSpPr>
+          <p:cNvPr id="8" name="Rectangle 7">
+            <a:extLst>
+              <a:ext uri="{FF2B5EF4-FFF2-40B4-BE49-F238E27FC236}">
+                <a16:creationId xmlns:a16="http://schemas.microsoft.com/office/drawing/2014/main" id="{EF9DF620-C602-9D2F-902D-CD25207C2CAE}"/>
+              </a:ext>
+            </a:extLst>
+          </p:cNvPr>
+          <p:cNvSpPr/>
+          <p:nvPr/>
+        </p:nvSpPr>
+        <p:spPr>
+          <a:xfrm>
+            <a:off x="3394953" y="5943600"/>
+            <a:ext cx="7636213" cy="418289"/>
+          </a:xfrm>
+          <a:prstGeom prst="rect">
+            <a:avLst/>
+          </a:prstGeom>
+          <a:noFill/>
+          <a:ln w="28575">
+            <a:solidFill>
+              <a:srgbClr val="C00000"/>
+            </a:solidFill>
+          </a:ln>
+        </p:spPr>
+        <p:style>
+          <a:lnRef idx="2">
+            <a:schemeClr val="accent1">
+              <a:shade val="15000"/>
+            </a:schemeClr>
+          </a:lnRef>
+          <a:fillRef idx="1">
+            <a:schemeClr val="accent1"/>
+          </a:fillRef>
+          <a:effectRef idx="0">
+            <a:schemeClr val="accent1"/>
+          </a:effectRef>
+          <a:fontRef idx="minor">
+            <a:schemeClr val="lt1"/>
+          </a:fontRef>
+        </p:style>
+        <p:txBody>
+          <a:bodyPr rtlCol="0" anchor="ctr"/>
+          <a:lstStyle/>
+          <a:p>
+            <a:pPr algn="ctr"/>
+            <a:endParaRPr lang="en-GB"/>
+          </a:p>
+        </p:txBody>
+      </p:sp>
+      <p:sp>
+        <p:nvSpPr>
+          <p:cNvPr id="9" name="TextBox 8">
+            <a:extLst>
+              <a:ext uri="{FF2B5EF4-FFF2-40B4-BE49-F238E27FC236}">
+                <a16:creationId xmlns:a16="http://schemas.microsoft.com/office/drawing/2014/main" id="{6BC487D4-140A-77D6-45D5-38B6F31EE99D}"/>
+              </a:ext>
+            </a:extLst>
+          </p:cNvPr>
+          <p:cNvSpPr txBox="1"/>
+          <p:nvPr/>
+        </p:nvSpPr>
+        <p:spPr>
+          <a:xfrm>
+            <a:off x="7549880" y="5574268"/>
+            <a:ext cx="3566043" cy="369332"/>
+          </a:xfrm>
+          <a:prstGeom prst="rect">
+            <a:avLst/>
+          </a:prstGeom>
+          <a:noFill/>
+        </p:spPr>
+        <p:txBody>
+          <a:bodyPr wrap="square" rtlCol="0">
+            <a:spAutoFit/>
+          </a:bodyPr>
+          <a:lstStyle/>
+          <a:p>
+            <a:pPr algn="r"/>
+            <a:r>
+              <a:rPr lang="en-GB" dirty="0">
+                <a:solidFill>
+                  <a:srgbClr val="C00000"/>
+                </a:solidFill>
+              </a:rPr>
+              <a:t>Built in terminal prompt</a:t>
+            </a:r>
+          </a:p>
+        </p:txBody>
+      </p:sp>
+    </p:spTree>
+    <p:extLst>
+      <p:ext uri="{BB962C8B-B14F-4D97-AF65-F5344CB8AC3E}">
+        <p14:creationId xmlns:p14="http://schemas.microsoft.com/office/powerpoint/2010/main" val="2323277968"/>
       </p:ext>
     </p:extLst>
   </p:cSld>
